--- a/ppt/EbinJoseph_X25142224_ski-resort-avalanche-safety.pptx
+++ b/ppt/EbinJoseph_X25142224_ski-resort-avalanche-safety.pptx
@@ -1150,20 +1150,59 @@
         </p:nvSpPr>
         <p:spPr>
           <a:xfrm>
-            <a:off x="640080" y="914400"/>
-            <a:ext cx="10972800" cy="1280160"/>
-          </a:xfrm>
-          <a:prstGeom prst="rect">
-            <a:avLst/>
-          </a:prstGeom>
-          <a:noFill/>
-          <a:ln/>
-        </p:spPr>
-        <p:txBody>
-          <a:bodyPr wrap="square" rtlCol="0" anchor="t"/>
-          <a:lstStyle/>
-          <a:p>
-            <a:pPr algn="l" indent="0" marL="0">
+            <a:off x="658368" y="640080"/>
+            <a:ext cx="10972800" cy="365760"/>
+          </a:xfrm>
+          <a:prstGeom prst="rect">
+            <a:avLst/>
+          </a:prstGeom>
+          <a:noFill/>
+          <a:ln/>
+        </p:spPr>
+        <p:txBody>
+          <a:bodyPr wrap="square" rtlCol="0" anchor="ctr"/>
+          <a:lstStyle/>
+          <a:p>
+            <a:pPr indent="0" marL="0">
+              <a:buNone/>
+            </a:pPr>
+            <a:r>
+              <a:rPr lang="en-US" sz="1400" b="1" spc="300" kern="0" dirty="0">
+                <a:solidFill>
+                  <a:srgbClr val="E4A83C"/>
+                </a:solidFill>
+                <a:latin typeface="Calibri" pitchFamily="34" charset="0"/>
+                <a:ea typeface="Calibri" pitchFamily="34" charset="-122"/>
+                <a:cs typeface="Calibri" pitchFamily="34" charset="-120"/>
+              </a:rPr>
+              <a:t>SKI RESORT AVALANCHE SAFETY</a:t>
+            </a:r>
+            <a:endParaRPr lang="en-US" sz="1400" dirty="0"/>
+          </a:p>
+        </p:txBody>
+      </p:sp>
+      <p:sp>
+        <p:nvSpPr>
+          <p:cNvPr id="3" name="Text 1"/>
+          <p:cNvSpPr/>
+          <p:nvPr/>
+        </p:nvSpPr>
+        <p:spPr>
+          <a:xfrm>
+            <a:off x="640080" y="2514600"/>
+            <a:ext cx="10972800" cy="1188720"/>
+          </a:xfrm>
+          <a:prstGeom prst="rect">
+            <a:avLst/>
+          </a:prstGeom>
+          <a:noFill/>
+          <a:ln/>
+        </p:spPr>
+        <p:txBody>
+          <a:bodyPr wrap="square" rtlCol="0" anchor="ctr"/>
+          <a:lstStyle/>
+          <a:p>
+            <a:pPr indent="0" marL="0">
               <a:buNone/>
             </a:pPr>
             <a:r>
@@ -1183,13 +1222,13 @@
       </p:sp>
       <p:sp>
         <p:nvSpPr>
-          <p:cNvPr id="3" name="Text 1"/>
-          <p:cNvSpPr/>
-          <p:nvPr/>
-        </p:nvSpPr>
-        <p:spPr>
-          <a:xfrm>
-            <a:off x="658368" y="2148840"/>
+          <p:cNvPr id="4" name="Text 2"/>
+          <p:cNvSpPr/>
+          <p:nvPr/>
+        </p:nvSpPr>
+        <p:spPr>
+          <a:xfrm>
+            <a:off x="658368" y="3703320"/>
             <a:ext cx="10972800" cy="365760"/>
           </a:xfrm>
           <a:prstGeom prst="rect">
@@ -1222,14 +1261,14 @@
       </p:sp>
       <p:sp>
         <p:nvSpPr>
-          <p:cNvPr id="4" name="Text 2"/>
-          <p:cNvSpPr/>
-          <p:nvPr/>
-        </p:nvSpPr>
-        <p:spPr>
-          <a:xfrm>
-            <a:off x="658368" y="2697480"/>
-            <a:ext cx="10424160" cy="1371600"/>
+          <p:cNvPr id="5" name="Text 3"/>
+          <p:cNvSpPr/>
+          <p:nvPr/>
+        </p:nvSpPr>
+        <p:spPr>
+          <a:xfrm>
+            <a:off x="658368" y="4251960"/>
+            <a:ext cx="10424160" cy="1188720"/>
           </a:xfrm>
           <a:prstGeom prst="rect">
             <a:avLst/>
@@ -1243,12 +1282,12 @@
           <a:p>
             <a:pPr indent="0" marL="0">
               <a:lnSpc>
-                <a:spcPct val="110000"/>
+                <a:spcPct val="108000"/>
               </a:lnSpc>
               <a:buNone/>
             </a:pPr>
             <a:r>
-              <a:rPr lang="en-US" sz="2000" dirty="0">
+              <a:rPr lang="en-US" sz="1800" dirty="0">
                 <a:solidFill>
                   <a:srgbClr val="CFE2EE"/>
                 </a:solidFill>
@@ -1258,19 +1297,19 @@
               </a:rPr>
               <a:t>Avalanche danger develops, peaks and passes in the gaps between patrol rounds — a seismic spike ahead of a slab release lasts only minutes and can pass entirely between two rounds.</a:t>
             </a:r>
-            <a:endParaRPr lang="en-US" sz="2000" dirty="0"/>
-          </a:p>
-        </p:txBody>
-      </p:sp>
-      <p:sp>
-        <p:nvSpPr>
-          <p:cNvPr id="5" name="Shape 3"/>
-          <p:cNvSpPr/>
-          <p:nvPr/>
-        </p:nvSpPr>
-        <p:spPr>
-          <a:xfrm>
-            <a:off x="658368" y="4206240"/>
+            <a:endParaRPr lang="en-US" sz="1800" dirty="0"/>
+          </a:p>
+        </p:txBody>
+      </p:sp>
+      <p:sp>
+        <p:nvSpPr>
+          <p:cNvPr id="6" name="Shape 4"/>
+          <p:cNvSpPr/>
+          <p:nvPr/>
+        </p:nvSpPr>
+        <p:spPr>
+          <a:xfrm>
+            <a:off x="658368" y="5623560"/>
             <a:ext cx="2651760" cy="566928"/>
           </a:xfrm>
           <a:prstGeom prst="roundRect">
@@ -1291,13 +1330,13 @@
       </p:sp>
       <p:sp>
         <p:nvSpPr>
-          <p:cNvPr id="6" name="Text 4"/>
-          <p:cNvSpPr/>
-          <p:nvPr/>
-        </p:nvSpPr>
-        <p:spPr>
-          <a:xfrm>
-            <a:off x="658368" y="4206240"/>
+          <p:cNvPr id="7" name="Text 5"/>
+          <p:cNvSpPr/>
+          <p:nvPr/>
+        </p:nvSpPr>
+        <p:spPr>
+          <a:xfrm>
+            <a:off x="658368" y="5623560"/>
             <a:ext cx="2651760" cy="566928"/>
           </a:xfrm>
           <a:prstGeom prst="rect">
@@ -1314,7 +1353,7 @@
               <a:buNone/>
             </a:pPr>
             <a:r>
-              <a:rPr lang="en-US" sz="1400" b="1" dirty="0">
+              <a:rPr lang="en-US" sz="1350" b="1" dirty="0">
                 <a:solidFill>
                   <a:srgbClr val="E4A83C"/>
                 </a:solidFill>
@@ -1324,19 +1363,19 @@
               </a:rPr>
               <a:t>Wind halt &gt; 80 km/h</a:t>
             </a:r>
-            <a:endParaRPr lang="en-US" sz="1400" dirty="0"/>
-          </a:p>
-        </p:txBody>
-      </p:sp>
-      <p:sp>
-        <p:nvSpPr>
-          <p:cNvPr id="7" name="Shape 5"/>
-          <p:cNvSpPr/>
-          <p:nvPr/>
-        </p:nvSpPr>
-        <p:spPr>
-          <a:xfrm>
-            <a:off x="3538728" y="4206240"/>
+            <a:endParaRPr lang="en-US" sz="1350" dirty="0"/>
+          </a:p>
+        </p:txBody>
+      </p:sp>
+      <p:sp>
+        <p:nvSpPr>
+          <p:cNvPr id="8" name="Shape 6"/>
+          <p:cNvSpPr/>
+          <p:nvPr/>
+        </p:nvSpPr>
+        <p:spPr>
+          <a:xfrm>
+            <a:off x="3538728" y="5623560"/>
             <a:ext cx="2651760" cy="566928"/>
           </a:xfrm>
           <a:prstGeom prst="roundRect">
@@ -1357,13 +1396,13 @@
       </p:sp>
       <p:sp>
         <p:nvSpPr>
-          <p:cNvPr id="8" name="Text 6"/>
-          <p:cNvSpPr/>
-          <p:nvPr/>
-        </p:nvSpPr>
-        <p:spPr>
-          <a:xfrm>
-            <a:off x="3538728" y="4206240"/>
+          <p:cNvPr id="9" name="Text 7"/>
+          <p:cNvSpPr/>
+          <p:nvPr/>
+        </p:nvSpPr>
+        <p:spPr>
+          <a:xfrm>
+            <a:off x="3538728" y="5623560"/>
             <a:ext cx="2651760" cy="566928"/>
           </a:xfrm>
           <a:prstGeom prst="rect">
@@ -1380,7 +1419,7 @@
               <a:buNone/>
             </a:pPr>
             <a:r>
-              <a:rPr lang="en-US" sz="1400" b="1" dirty="0">
+              <a:rPr lang="en-US" sz="1350" b="1" dirty="0">
                 <a:solidFill>
                   <a:srgbClr val="E4A83C"/>
                 </a:solidFill>
@@ -1390,19 +1429,19 @@
               </a:rPr>
               <a:t>10 sensors · 2 slopes</a:t>
             </a:r>
-            <a:endParaRPr lang="en-US" sz="1400" dirty="0"/>
-          </a:p>
-        </p:txBody>
-      </p:sp>
-      <p:sp>
-        <p:nvSpPr>
-          <p:cNvPr id="9" name="Shape 7"/>
-          <p:cNvSpPr/>
-          <p:nvPr/>
-        </p:nvSpPr>
-        <p:spPr>
-          <a:xfrm>
-            <a:off x="6419088" y="4206240"/>
+            <a:endParaRPr lang="en-US" sz="1350" dirty="0"/>
+          </a:p>
+        </p:txBody>
+      </p:sp>
+      <p:sp>
+        <p:nvSpPr>
+          <p:cNvPr id="10" name="Shape 8"/>
+          <p:cNvSpPr/>
+          <p:nvPr/>
+        </p:nvSpPr>
+        <p:spPr>
+          <a:xfrm>
+            <a:off x="6419088" y="5623560"/>
             <a:ext cx="2651760" cy="566928"/>
           </a:xfrm>
           <a:prstGeom prst="roundRect">
@@ -1423,13 +1462,13 @@
       </p:sp>
       <p:sp>
         <p:nvSpPr>
-          <p:cNvPr id="10" name="Text 8"/>
-          <p:cNvSpPr/>
-          <p:nvPr/>
-        </p:nvSpPr>
-        <p:spPr>
-          <a:xfrm>
-            <a:off x="6419088" y="4206240"/>
+          <p:cNvPr id="11" name="Text 9"/>
+          <p:cNvSpPr/>
+          <p:nvPr/>
+        </p:nvSpPr>
+        <p:spPr>
+          <a:xfrm>
+            <a:off x="6419088" y="5623560"/>
             <a:ext cx="2651760" cy="566928"/>
           </a:xfrm>
           <a:prstGeom prst="rect">
@@ -1446,7 +1485,7 @@
               <a:buNone/>
             </a:pPr>
             <a:r>
-              <a:rPr lang="en-US" sz="1400" b="1" dirty="0">
+              <a:rPr lang="en-US" sz="1350" b="1" dirty="0">
                 <a:solidFill>
                   <a:srgbClr val="E4A83C"/>
                 </a:solidFill>
@@ -1456,20 +1495,20 @@
               </a:rPr>
               <a:t>4 edge rules</a:t>
             </a:r>
-            <a:endParaRPr lang="en-US" sz="1400" dirty="0"/>
-          </a:p>
-        </p:txBody>
-      </p:sp>
-      <p:sp>
-        <p:nvSpPr>
-          <p:cNvPr id="11" name="Text 9"/>
-          <p:cNvSpPr/>
-          <p:nvPr/>
-        </p:nvSpPr>
-        <p:spPr>
-          <a:xfrm>
-            <a:off x="658368" y="6126480"/>
-            <a:ext cx="10972800" cy="365760"/>
+            <a:endParaRPr lang="en-US" sz="1350" dirty="0"/>
+          </a:p>
+        </p:txBody>
+      </p:sp>
+      <p:sp>
+        <p:nvSpPr>
+          <p:cNvPr id="12" name="Text 10"/>
+          <p:cNvSpPr/>
+          <p:nvPr/>
+        </p:nvSpPr>
+        <p:spPr>
+          <a:xfrm>
+            <a:off x="658368" y="6400800"/>
+            <a:ext cx="10972800" cy="320040"/>
           </a:xfrm>
           <a:prstGeom prst="rect">
             <a:avLst/>
@@ -1485,7 +1524,7 @@
               <a:buNone/>
             </a:pPr>
             <a:r>
-              <a:rPr lang="en-US" sz="1300" dirty="0">
+              <a:rPr lang="en-US" sz="1250" dirty="0">
                 <a:solidFill>
                   <a:srgbClr val="567480"/>
                 </a:solidFill>
@@ -1495,7 +1534,7 @@
               </a:rPr>
               <a:t>Fog &amp; Edge Computing (H9FECC)   ·   deployed live on AWS</a:t>
             </a:r>
-            <a:endParaRPr lang="en-US" sz="1300" dirty="0"/>
+            <a:endParaRPr lang="en-US" sz="1250" dirty="0"/>
           </a:p>
         </p:txBody>
       </p:sp>
@@ -1605,8 +1644,8 @@
         </p:nvSpPr>
         <p:spPr>
           <a:xfrm>
-            <a:off x="1325880" y="2670048"/>
-            <a:ext cx="201168" cy="201168"/>
+            <a:off x="1335024" y="2633472"/>
+            <a:ext cx="182880" cy="182880"/>
           </a:xfrm>
           <a:prstGeom prst="ellipse">
             <a:avLst/>
@@ -1625,8 +1664,8 @@
         </p:nvSpPr>
         <p:spPr>
           <a:xfrm>
-            <a:off x="594360" y="2926080"/>
-            <a:ext cx="1664208" cy="411480"/>
+            <a:off x="612648" y="2852928"/>
+            <a:ext cx="1627632" cy="365760"/>
           </a:xfrm>
           <a:prstGeom prst="rect">
             <a:avLst/>
@@ -1664,8 +1703,8 @@
         </p:nvSpPr>
         <p:spPr>
           <a:xfrm>
-            <a:off x="621792" y="3310128"/>
-            <a:ext cx="1609344" cy="457200"/>
+            <a:off x="640080" y="3200400"/>
+            <a:ext cx="1572768" cy="411480"/>
           </a:xfrm>
           <a:prstGeom prst="rect">
             <a:avLst/>
@@ -1754,8 +1793,8 @@
         </p:nvSpPr>
         <p:spPr>
           <a:xfrm>
-            <a:off x="3193633" y="2670048"/>
-            <a:ext cx="201168" cy="201168"/>
+            <a:off x="3202777" y="2633472"/>
+            <a:ext cx="182880" cy="182880"/>
           </a:xfrm>
           <a:prstGeom prst="ellipse">
             <a:avLst/>
@@ -1774,8 +1813,8 @@
         </p:nvSpPr>
         <p:spPr>
           <a:xfrm>
-            <a:off x="2462113" y="2926080"/>
-            <a:ext cx="1664208" cy="411480"/>
+            <a:off x="2480401" y="2852928"/>
+            <a:ext cx="1627632" cy="365760"/>
           </a:xfrm>
           <a:prstGeom prst="rect">
             <a:avLst/>
@@ -1813,8 +1852,8 @@
         </p:nvSpPr>
         <p:spPr>
           <a:xfrm>
-            <a:off x="2489545" y="3310128"/>
-            <a:ext cx="1609344" cy="457200"/>
+            <a:off x="2507833" y="3200400"/>
+            <a:ext cx="1572768" cy="411480"/>
           </a:xfrm>
           <a:prstGeom prst="rect">
             <a:avLst/>
@@ -1903,8 +1942,8 @@
         </p:nvSpPr>
         <p:spPr>
           <a:xfrm>
-            <a:off x="5061387" y="2670048"/>
-            <a:ext cx="201168" cy="201168"/>
+            <a:off x="5070531" y="2633472"/>
+            <a:ext cx="182880" cy="182880"/>
           </a:xfrm>
           <a:prstGeom prst="ellipse">
             <a:avLst/>
@@ -1923,8 +1962,8 @@
         </p:nvSpPr>
         <p:spPr>
           <a:xfrm>
-            <a:off x="4329867" y="2926080"/>
-            <a:ext cx="1664208" cy="411480"/>
+            <a:off x="4348155" y="2852928"/>
+            <a:ext cx="1627632" cy="365760"/>
           </a:xfrm>
           <a:prstGeom prst="rect">
             <a:avLst/>
@@ -1962,8 +2001,8 @@
         </p:nvSpPr>
         <p:spPr>
           <a:xfrm>
-            <a:off x="4357299" y="3310128"/>
-            <a:ext cx="1609344" cy="457200"/>
+            <a:off x="4375587" y="3200400"/>
+            <a:ext cx="1572768" cy="411480"/>
           </a:xfrm>
           <a:prstGeom prst="rect">
             <a:avLst/>
@@ -2052,8 +2091,8 @@
         </p:nvSpPr>
         <p:spPr>
           <a:xfrm>
-            <a:off x="6929140" y="2670048"/>
-            <a:ext cx="201168" cy="201168"/>
+            <a:off x="6938284" y="2633472"/>
+            <a:ext cx="182880" cy="182880"/>
           </a:xfrm>
           <a:prstGeom prst="ellipse">
             <a:avLst/>
@@ -2072,8 +2111,8 @@
         </p:nvSpPr>
         <p:spPr>
           <a:xfrm>
-            <a:off x="6197620" y="2926080"/>
-            <a:ext cx="1664208" cy="411480"/>
+            <a:off x="6215908" y="2852928"/>
+            <a:ext cx="1627632" cy="365760"/>
           </a:xfrm>
           <a:prstGeom prst="rect">
             <a:avLst/>
@@ -2111,8 +2150,8 @@
         </p:nvSpPr>
         <p:spPr>
           <a:xfrm>
-            <a:off x="6225052" y="3310128"/>
-            <a:ext cx="1609344" cy="457200"/>
+            <a:off x="6243340" y="3200400"/>
+            <a:ext cx="1572768" cy="411480"/>
           </a:xfrm>
           <a:prstGeom prst="rect">
             <a:avLst/>
@@ -2201,8 +2240,8 @@
         </p:nvSpPr>
         <p:spPr>
           <a:xfrm>
-            <a:off x="8796894" y="2670048"/>
-            <a:ext cx="201168" cy="201168"/>
+            <a:off x="8806038" y="2633472"/>
+            <a:ext cx="182880" cy="182880"/>
           </a:xfrm>
           <a:prstGeom prst="ellipse">
             <a:avLst/>
@@ -2221,8 +2260,8 @@
         </p:nvSpPr>
         <p:spPr>
           <a:xfrm>
-            <a:off x="8065374" y="2926080"/>
-            <a:ext cx="1664208" cy="411480"/>
+            <a:off x="8083662" y="2852928"/>
+            <a:ext cx="1627632" cy="365760"/>
           </a:xfrm>
           <a:prstGeom prst="rect">
             <a:avLst/>
@@ -2260,8 +2299,8 @@
         </p:nvSpPr>
         <p:spPr>
           <a:xfrm>
-            <a:off x="8092806" y="3310128"/>
-            <a:ext cx="1609344" cy="457200"/>
+            <a:off x="8111094" y="3200400"/>
+            <a:ext cx="1572768" cy="411480"/>
           </a:xfrm>
           <a:prstGeom prst="rect">
             <a:avLst/>
@@ -2350,8 +2389,8 @@
         </p:nvSpPr>
         <p:spPr>
           <a:xfrm>
-            <a:off x="10664647" y="2670048"/>
-            <a:ext cx="201168" cy="201168"/>
+            <a:off x="10673791" y="2633472"/>
+            <a:ext cx="182880" cy="182880"/>
           </a:xfrm>
           <a:prstGeom prst="ellipse">
             <a:avLst/>
@@ -2370,8 +2409,8 @@
         </p:nvSpPr>
         <p:spPr>
           <a:xfrm>
-            <a:off x="9933127" y="2926080"/>
-            <a:ext cx="1664208" cy="411480"/>
+            <a:off x="9951415" y="2852928"/>
+            <a:ext cx="1627632" cy="365760"/>
           </a:xfrm>
           <a:prstGeom prst="rect">
             <a:avLst/>
@@ -2409,8 +2448,8 @@
         </p:nvSpPr>
         <p:spPr>
           <a:xfrm>
-            <a:off x="9960559" y="3310128"/>
-            <a:ext cx="1609344" cy="457200"/>
+            <a:off x="9978847" y="3200400"/>
+            <a:ext cx="1572768" cy="411480"/>
           </a:xfrm>
           <a:prstGeom prst="rect">
             <a:avLst/>
@@ -2526,8 +2565,8 @@
         </p:nvSpPr>
         <p:spPr>
           <a:xfrm>
-            <a:off x="640080" y="5212080"/>
-            <a:ext cx="10972800" cy="640080"/>
+            <a:off x="640080" y="5257800"/>
+            <a:ext cx="10972800" cy="731520"/>
           </a:xfrm>
           <a:prstGeom prst="rect">
             <a:avLst/>
@@ -2759,7 +2798,7 @@
                 <a:ea typeface="Calibri" pitchFamily="34" charset="-122"/>
                 <a:cs typeface="Calibri" pitchFamily="34" charset="-120"/>
               </a:rPr>
-              <a:t>Pipeline health, all green</a:t>
+              <a:t>A live risk gauge per slope</a:t>
             </a:r>
             <a:endParaRPr lang="en-US" sz="1800" dirty="0"/>
           </a:p>
@@ -2798,7 +2837,7 @@
                 <a:ea typeface="Calibri" pitchFamily="34" charset="-122"/>
                 <a:cs typeface="Calibri" pitchFamily="34" charset="-120"/>
               </a:rPr>
-              <a:t>Four of four checks reporting true: gateway, queue, Lambda and pipeline.</a:t>
+              <a:t>Snowpack, snow temperature, wind, seismic vibration and lift chairs feed a per-slope risk gauge, updated every window.</a:t>
             </a:r>
             <a:endParaRPr lang="en-US" sz="1350" dirty="0"/>
           </a:p>
@@ -2896,7 +2935,7 @@
                 <a:ea typeface="Calibri" pitchFamily="34" charset="-122"/>
                 <a:cs typeface="Calibri" pitchFamily="34" charset="-120"/>
               </a:rPr>
-              <a:t>Live on the slope</a:t>
+              <a:t>A lift-wind-halt alert on real data</a:t>
             </a:r>
             <a:endParaRPr lang="en-US" sz="1800" dirty="0"/>
           </a:p>
@@ -2935,7 +2974,7 @@
                 <a:ea typeface="Calibri" pitchFamily="34" charset="-122"/>
                 <a:cs typeface="Calibri" pitchFamily="34" charset="-120"/>
               </a:rPr>
-              <a:t>Slope-a risk gauge at HIGH with wind at 111.8 km/h tripping the lift-wind-halt banner; 0 to 569 records within ~90 s.</a:t>
+              <a:t>Slope-a's gauge reads HIGH with wind at 111.8 km/h tripping the lift-wind-halt banner — no patrol involved.</a:t>
             </a:r>
             <a:endParaRPr lang="en-US" sz="1350" dirty="0"/>
           </a:p>
@@ -3033,7 +3072,7 @@
                 <a:ea typeface="Calibri" pitchFamily="34" charset="-122"/>
                 <a:cs typeface="Calibri" pitchFamily="34" charset="-120"/>
               </a:rPr>
-              <a:t>Tested end to end</a:t>
+              <a:t>Filling live before your eyes</a:t>
             </a:r>
             <a:endParaRPr lang="en-US" sz="1800" dirty="0"/>
           </a:p>
@@ -3072,7 +3111,7 @@
                 <a:ea typeface="Calibri" pitchFamily="34" charset="-122"/>
                 <a:cs typeface="Calibri" pitchFamily="34" charset="-120"/>
               </a:rPr>
-              <a:t>121 automated tests pass across sensors, fog, processor and dashboard.</a:t>
+              <a:t>The store climbs 0 to 569 records in about ninety seconds and keeps rising, so the board is genuinely live.</a:t>
             </a:r>
             <a:endParaRPr lang="en-US" sz="1350" dirty="0"/>
           </a:p>
@@ -3157,24 +3196,24 @@
         </p:nvSpPr>
         <p:spPr>
           <a:xfrm>
-            <a:off x="640080" y="640080"/>
-            <a:ext cx="10972800" cy="640080"/>
-          </a:xfrm>
-          <a:prstGeom prst="rect">
-            <a:avLst/>
-          </a:prstGeom>
-          <a:noFill/>
-          <a:ln/>
-        </p:spPr>
-        <p:txBody>
-          <a:bodyPr wrap="square" rtlCol="0" anchor="ctr"/>
+            <a:off x="640080" y="594360"/>
+            <a:ext cx="10972800" cy="822960"/>
+          </a:xfrm>
+          <a:prstGeom prst="rect">
+            <a:avLst/>
+          </a:prstGeom>
+          <a:noFill/>
+          <a:ln/>
+        </p:spPr>
+        <p:txBody>
+          <a:bodyPr wrap="square" rtlCol="0" anchor="t"/>
           <a:lstStyle/>
           <a:p>
             <a:pPr indent="0" marL="0">
               <a:buNone/>
             </a:pPr>
             <a:r>
-              <a:rPr lang="en-US" sz="3000" b="1" dirty="0">
+              <a:rPr lang="en-US" sz="2800" b="1" dirty="0">
                 <a:solidFill>
                   <a:srgbClr val="FFFFFF"/>
                 </a:solidFill>
@@ -3184,7 +3223,7 @@
               </a:rPr>
               <a:t>Hardest Part — the dashboard that lied</a:t>
             </a:r>
-            <a:endParaRPr lang="en-US" sz="3000" dirty="0"/>
+            <a:endParaRPr lang="en-US" sz="2800" dirty="0"/>
           </a:p>
         </p:txBody>
       </p:sp>
@@ -3196,12 +3235,12 @@
         </p:nvSpPr>
         <p:spPr>
           <a:xfrm>
-            <a:off x="731520" y="1920240"/>
-            <a:ext cx="10698480" cy="1965960"/>
+            <a:off x="731520" y="1874520"/>
+            <a:ext cx="5212080" cy="4160520"/>
           </a:xfrm>
           <a:prstGeom prst="roundRect">
             <a:avLst>
-              <a:gd name="adj" fmla="val 4651"/>
+              <a:gd name="adj" fmla="val 2198"/>
             </a:avLst>
           </a:prstGeom>
           <a:solidFill>
@@ -3223,7 +3262,7 @@
         </p:nvSpPr>
         <p:spPr>
           <a:xfrm>
-            <a:off x="1005840" y="2103120"/>
+            <a:off x="1051560" y="2103120"/>
             <a:ext cx="3657600" cy="457200"/>
           </a:xfrm>
           <a:prstGeom prst="rect">
@@ -3262,8 +3301,8 @@
         </p:nvSpPr>
         <p:spPr>
           <a:xfrm>
-            <a:off x="1005840" y="2578608"/>
-            <a:ext cx="9966960" cy="1188720"/>
+            <a:off x="1051560" y="2651760"/>
+            <a:ext cx="4572000" cy="3200400"/>
           </a:xfrm>
           <a:prstGeom prst="rect">
             <a:avLst/>
@@ -3277,12 +3316,12 @@
           <a:p>
             <a:pPr indent="0" marL="0">
               <a:lnSpc>
-                <a:spcPct val="105000"/>
+                <a:spcPct val="110000"/>
               </a:lnSpc>
               <a:buNone/>
             </a:pPr>
             <a:r>
-              <a:rPr lang="en-US" sz="1300" dirty="0">
+              <a:rPr lang="en-US" sz="1350" dirty="0">
                 <a:solidFill>
                   <a:srgbClr val="CFE2EE"/>
                 </a:solidFill>
@@ -3292,7 +3331,7 @@
               </a:rPr>
               <a:t>Deployed to real AWS, the health endpoint reported gateway, queue, Lambda and pipeline all true, curl returned live JSON, and the browser console showed zero errors and zero failed requests — yet every panel on the page stayed empty, indistinguishable from still loading. The API's responses carried no cross-origin header, so the browser silently blocked the S3 page's calls, and the polling loop swallowed each failure into a quiet retry.</a:t>
             </a:r>
-            <a:endParaRPr lang="en-US" sz="1300" dirty="0"/>
+            <a:endParaRPr lang="en-US" sz="1350" dirty="0"/>
           </a:p>
         </p:txBody>
       </p:sp>
@@ -3304,12 +3343,12 @@
         </p:nvSpPr>
         <p:spPr>
           <a:xfrm>
-            <a:off x="731520" y="4041648"/>
-            <a:ext cx="10698480" cy="1965960"/>
+            <a:off x="6263640" y="1874520"/>
+            <a:ext cx="5212080" cy="4160520"/>
           </a:xfrm>
           <a:prstGeom prst="roundRect">
             <a:avLst>
-              <a:gd name="adj" fmla="val 4651"/>
+              <a:gd name="adj" fmla="val 2198"/>
             </a:avLst>
           </a:prstGeom>
           <a:solidFill>
@@ -3331,7 +3370,7 @@
         </p:nvSpPr>
         <p:spPr>
           <a:xfrm>
-            <a:off x="1005840" y="4224528"/>
+            <a:off x="6583680" y="2103120"/>
             <a:ext cx="3657600" cy="457200"/>
           </a:xfrm>
           <a:prstGeom prst="rect">
@@ -3370,8 +3409,8 @@
         </p:nvSpPr>
         <p:spPr>
           <a:xfrm>
-            <a:off x="1005840" y="4700016"/>
-            <a:ext cx="9966960" cy="1188720"/>
+            <a:off x="6583680" y="2651760"/>
+            <a:ext cx="4572000" cy="3200400"/>
           </a:xfrm>
           <a:prstGeom prst="rect">
             <a:avLst/>
@@ -3385,12 +3424,12 @@
           <a:p>
             <a:pPr indent="0" marL="0">
               <a:lnSpc>
-                <a:spcPct val="105000"/>
+                <a:spcPct val="110000"/>
               </a:lnSpc>
               <a:buNone/>
             </a:pPr>
             <a:r>
-              <a:rPr lang="en-US" sz="1300" dirty="0">
+              <a:rPr lang="en-US" sz="1350" dirty="0">
                 <a:solidFill>
                   <a:srgbClr val="CFE2EE"/>
                 </a:solidFill>
@@ -3400,7 +3439,7 @@
               </a:rPr>
               <a:t>Add the cross-origin header to every response the API Lambda returns, then redeploy and re-verify in a real browser until every panel filled with live data. New rule: a green health check proves the API works, but only a browser proves the user sees it.</a:t>
             </a:r>
-            <a:endParaRPr lang="en-US" sz="1300" dirty="0"/>
+            <a:endParaRPr lang="en-US" sz="1350" dirty="0"/>
           </a:p>
         </p:txBody>
       </p:sp>

--- a/ppt/EbinJoseph_X25142224_ski-resort-avalanche-safety.pptx
+++ b/ppt/EbinJoseph_X25142224_ski-resort-avalanche-safety.pptx
@@ -3170,7 +3170,7 @@
     <p:bg>
       <p:bgPr>
         <a:solidFill>
-          <a:srgbClr val="142430"/>
+          <a:srgbClr val="FFFFFF"/>
         </a:solidFill>
       </p:bgPr>
     </p:bg>
@@ -3196,7 +3196,7 @@
         </p:nvSpPr>
         <p:spPr>
           <a:xfrm>
-            <a:off x="640080" y="594360"/>
+            <a:off x="640080" y="502920"/>
             <a:ext cx="10972800" cy="822960"/>
           </a:xfrm>
           <a:prstGeom prst="rect">
@@ -3215,7 +3215,7 @@
             <a:r>
               <a:rPr lang="en-US" sz="2800" b="1" dirty="0">
                 <a:solidFill>
-                  <a:srgbClr val="FFFFFF"/>
+                  <a:srgbClr val="132430"/>
                 </a:solidFill>
                 <a:latin typeface="Bookman Old Style" pitchFamily="34" charset="0"/>
                 <a:ea typeface="Bookman Old Style" pitchFamily="34" charset="-122"/>
@@ -3235,8 +3235,8 @@
         </p:nvSpPr>
         <p:spPr>
           <a:xfrm>
-            <a:off x="731520" y="1874520"/>
-            <a:ext cx="5212080" cy="4160520"/>
+            <a:off x="640080" y="1874520"/>
+            <a:ext cx="4937760" cy="4160520"/>
           </a:xfrm>
           <a:prstGeom prst="roundRect">
             <a:avLst>
@@ -3244,9 +3244,9 @@
             </a:avLst>
           </a:prstGeom>
           <a:solidFill>
-            <a:srgbClr val="1E4056"/>
-          </a:solidFill>
-          <a:ln w="15875">
+            <a:srgbClr val="EDF4F9"/>
+          </a:solidFill>
+          <a:ln w="19050">
             <a:solidFill>
               <a:srgbClr val="E4A83C"/>
             </a:solidFill>
@@ -3262,7 +3262,7 @@
         </p:nvSpPr>
         <p:spPr>
           <a:xfrm>
-            <a:off x="1051560" y="2103120"/>
+            <a:off x="960120" y="2103120"/>
             <a:ext cx="3657600" cy="457200"/>
           </a:xfrm>
           <a:prstGeom prst="rect">
@@ -3301,8 +3301,8 @@
         </p:nvSpPr>
         <p:spPr>
           <a:xfrm>
-            <a:off x="1051560" y="2651760"/>
-            <a:ext cx="4572000" cy="3200400"/>
+            <a:off x="960120" y="2651760"/>
+            <a:ext cx="4343400" cy="3200400"/>
           </a:xfrm>
           <a:prstGeom prst="rect">
             <a:avLst/>
@@ -3316,14 +3316,14 @@
           <a:p>
             <a:pPr indent="0" marL="0">
               <a:lnSpc>
-                <a:spcPct val="110000"/>
+                <a:spcPct val="112000"/>
               </a:lnSpc>
               <a:buNone/>
             </a:pPr>
             <a:r>
               <a:rPr lang="en-US" sz="1350" dirty="0">
                 <a:solidFill>
-                  <a:srgbClr val="CFE2EE"/>
+                  <a:srgbClr val="132430"/>
                 </a:solidFill>
                 <a:latin typeface="Calibri" pitchFamily="34" charset="0"/>
                 <a:ea typeface="Calibri" pitchFamily="34" charset="-122"/>
@@ -3343,8 +3343,8 @@
         </p:nvSpPr>
         <p:spPr>
           <a:xfrm>
-            <a:off x="6263640" y="1874520"/>
-            <a:ext cx="5212080" cy="4160520"/>
+            <a:off x="6611112" y="1874520"/>
+            <a:ext cx="4937760" cy="4160520"/>
           </a:xfrm>
           <a:prstGeom prst="roundRect">
             <a:avLst>
@@ -3352,11 +3352,11 @@
             </a:avLst>
           </a:prstGeom>
           <a:solidFill>
-            <a:srgbClr val="1E4056"/>
-          </a:solidFill>
-          <a:ln w="15875">
+            <a:srgbClr val="EDF4F9"/>
+          </a:solidFill>
+          <a:ln w="19050">
             <a:solidFill>
-              <a:srgbClr val="5EA0C4"/>
+              <a:srgbClr val="2E82AC"/>
             </a:solidFill>
             <a:prstDash val="solid"/>
           </a:ln>
@@ -3370,7 +3370,7 @@
         </p:nvSpPr>
         <p:spPr>
           <a:xfrm>
-            <a:off x="6583680" y="2103120"/>
+            <a:off x="6931152" y="2103120"/>
             <a:ext cx="3657600" cy="457200"/>
           </a:xfrm>
           <a:prstGeom prst="rect">
@@ -3389,7 +3389,7 @@
             <a:r>
               <a:rPr lang="en-US" sz="1900" b="1" dirty="0">
                 <a:solidFill>
-                  <a:srgbClr val="5EA0C4"/>
+                  <a:srgbClr val="2E82AC"/>
                 </a:solidFill>
                 <a:latin typeface="Bookman Old Style" pitchFamily="34" charset="0"/>
                 <a:ea typeface="Bookman Old Style" pitchFamily="34" charset="-122"/>
@@ -3409,8 +3409,8 @@
         </p:nvSpPr>
         <p:spPr>
           <a:xfrm>
-            <a:off x="6583680" y="2651760"/>
-            <a:ext cx="4572000" cy="3200400"/>
+            <a:off x="6931152" y="2651760"/>
+            <a:ext cx="4343400" cy="3200400"/>
           </a:xfrm>
           <a:prstGeom prst="rect">
             <a:avLst/>
@@ -3424,14 +3424,14 @@
           <a:p>
             <a:pPr indent="0" marL="0">
               <a:lnSpc>
-                <a:spcPct val="110000"/>
+                <a:spcPct val="112000"/>
               </a:lnSpc>
               <a:buNone/>
             </a:pPr>
             <a:r>
               <a:rPr lang="en-US" sz="1350" dirty="0">
                 <a:solidFill>
-                  <a:srgbClr val="CFE2EE"/>
+                  <a:srgbClr val="132430"/>
                 </a:solidFill>
                 <a:latin typeface="Calibri" pitchFamily="34" charset="0"/>
                 <a:ea typeface="Calibri" pitchFamily="34" charset="-122"/>
@@ -3442,6 +3442,26 @@
             <a:endParaRPr lang="en-US" sz="1350" dirty="0"/>
           </a:p>
         </p:txBody>
+      </p:sp>
+      <p:sp>
+        <p:nvSpPr>
+          <p:cNvPr id="9" name="Shape 7"/>
+          <p:cNvSpPr/>
+          <p:nvPr/>
+        </p:nvSpPr>
+        <p:spPr>
+          <a:xfrm>
+            <a:off x="5669280" y="3703320"/>
+            <a:ext cx="841248" cy="512064"/>
+          </a:xfrm>
+          <a:prstGeom prst="rightArrow">
+            <a:avLst/>
+          </a:prstGeom>
+          <a:solidFill>
+            <a:srgbClr val="1E5A82"/>
+          </a:solidFill>
+          <a:ln/>
+        </p:spPr>
       </p:sp>
     </p:spTree>
   </p:cSld>

--- a/ppt/EbinJoseph_X25142224_ski-resort-avalanche-safety.pptx
+++ b/ppt/EbinJoseph_X25142224_ski-resort-avalanche-safety.pptx
@@ -2714,8 +2714,35 @@
         </p:nvSpPr>
         <p:spPr>
           <a:xfrm>
-            <a:off x="731520" y="1965960"/>
-            <a:ext cx="685800" cy="685800"/>
+            <a:off x="640080" y="1874520"/>
+            <a:ext cx="3502152" cy="3977640"/>
+          </a:xfrm>
+          <a:prstGeom prst="roundRect">
+            <a:avLst>
+              <a:gd name="adj" fmla="val 2611"/>
+            </a:avLst>
+          </a:prstGeom>
+          <a:solidFill>
+            <a:srgbClr val="EDF4F9"/>
+          </a:solidFill>
+          <a:ln w="15240">
+            <a:solidFill>
+              <a:srgbClr val="2E82AC"/>
+            </a:solidFill>
+            <a:prstDash val="solid"/>
+          </a:ln>
+        </p:spPr>
+      </p:sp>
+      <p:sp>
+        <p:nvSpPr>
+          <p:cNvPr id="5" name="Shape 3"/>
+          <p:cNvSpPr/>
+          <p:nvPr/>
+        </p:nvSpPr>
+        <p:spPr>
+          <a:xfrm>
+            <a:off x="914400" y="2148840"/>
+            <a:ext cx="603504" cy="603504"/>
           </a:xfrm>
           <a:prstGeom prst="ellipse">
             <a:avLst/>
@@ -2728,14 +2755,14 @@
       </p:sp>
       <p:sp>
         <p:nvSpPr>
-          <p:cNvPr id="5" name="Text 3"/>
-          <p:cNvSpPr/>
-          <p:nvPr/>
-        </p:nvSpPr>
-        <p:spPr>
-          <a:xfrm>
-            <a:off x="731520" y="1965960"/>
-            <a:ext cx="685800" cy="685800"/>
+          <p:cNvPr id="6" name="Text 4"/>
+          <p:cNvSpPr/>
+          <p:nvPr/>
+        </p:nvSpPr>
+        <p:spPr>
+          <a:xfrm>
+            <a:off x="914400" y="2148840"/>
+            <a:ext cx="603504" cy="603504"/>
           </a:xfrm>
           <a:prstGeom prst="rect">
             <a:avLst/>
@@ -2751,7 +2778,7 @@
               <a:buNone/>
             </a:pPr>
             <a:r>
-              <a:rPr lang="en-US" sz="2600" b="1" dirty="0">
+              <a:rPr lang="en-US" sz="2200" b="1" dirty="0">
                 <a:solidFill>
                   <a:srgbClr val="FFFFFF"/>
                 </a:solidFill>
@@ -2761,20 +2788,20 @@
               </a:rPr>
               <a:t>1</a:t>
             </a:r>
-            <a:endParaRPr lang="en-US" sz="2600" dirty="0"/>
-          </a:p>
-        </p:txBody>
-      </p:sp>
-      <p:sp>
-        <p:nvSpPr>
-          <p:cNvPr id="6" name="Text 4"/>
-          <p:cNvSpPr/>
-          <p:nvPr/>
-        </p:nvSpPr>
-        <p:spPr>
-          <a:xfrm>
-            <a:off x="1691640" y="1920240"/>
-            <a:ext cx="9875520" cy="411480"/>
+            <a:endParaRPr lang="en-US" sz="2200" dirty="0"/>
+          </a:p>
+        </p:txBody>
+      </p:sp>
+      <p:sp>
+        <p:nvSpPr>
+          <p:cNvPr id="7" name="Text 5"/>
+          <p:cNvSpPr/>
+          <p:nvPr/>
+        </p:nvSpPr>
+        <p:spPr>
+          <a:xfrm>
+            <a:off x="914400" y="2898648"/>
+            <a:ext cx="2953512" cy="777240"/>
           </a:xfrm>
           <a:prstGeom prst="rect">
             <a:avLst/>
@@ -2790,7 +2817,7 @@
               <a:buNone/>
             </a:pPr>
             <a:r>
-              <a:rPr lang="en-US" sz="1800" b="1" dirty="0">
+              <a:rPr lang="en-US" sz="1600" b="1" dirty="0">
                 <a:solidFill>
                   <a:srgbClr val="132430"/>
                 </a:solidFill>
@@ -2800,20 +2827,20 @@
               </a:rPr>
               <a:t>A live risk gauge per slope</a:t>
             </a:r>
-            <a:endParaRPr lang="en-US" sz="1800" dirty="0"/>
-          </a:p>
-        </p:txBody>
-      </p:sp>
-      <p:sp>
-        <p:nvSpPr>
-          <p:cNvPr id="7" name="Text 5"/>
-          <p:cNvSpPr/>
-          <p:nvPr/>
-        </p:nvSpPr>
-        <p:spPr>
-          <a:xfrm>
-            <a:off x="1691640" y="2340864"/>
-            <a:ext cx="9875520" cy="640080"/>
+            <a:endParaRPr lang="en-US" sz="1600" dirty="0"/>
+          </a:p>
+        </p:txBody>
+      </p:sp>
+      <p:sp>
+        <p:nvSpPr>
+          <p:cNvPr id="8" name="Text 6"/>
+          <p:cNvSpPr/>
+          <p:nvPr/>
+        </p:nvSpPr>
+        <p:spPr>
+          <a:xfrm>
+            <a:off x="914400" y="3657600"/>
+            <a:ext cx="2953512" cy="2011680"/>
           </a:xfrm>
           <a:prstGeom prst="rect">
             <a:avLst/>
@@ -2826,10 +2853,13 @@
           <a:lstStyle/>
           <a:p>
             <a:pPr indent="0" marL="0">
-              <a:buNone/>
-            </a:pPr>
-            <a:r>
-              <a:rPr lang="en-US" sz="1350" dirty="0">
+              <a:lnSpc>
+                <a:spcPct val="106000"/>
+              </a:lnSpc>
+              <a:buNone/>
+            </a:pPr>
+            <a:r>
+              <a:rPr lang="en-US" sz="1250" dirty="0">
                 <a:solidFill>
                   <a:srgbClr val="567480"/>
                 </a:solidFill>
@@ -2839,20 +2869,47 @@
               </a:rPr>
               <a:t>Snowpack, snow temperature, wind, seismic vibration and lift chairs feed a per-slope risk gauge, updated every window.</a:t>
             </a:r>
-            <a:endParaRPr lang="en-US" sz="1350" dirty="0"/>
-          </a:p>
-        </p:txBody>
-      </p:sp>
-      <p:sp>
-        <p:nvSpPr>
-          <p:cNvPr id="8" name="Shape 6"/>
-          <p:cNvSpPr/>
-          <p:nvPr/>
-        </p:nvSpPr>
-        <p:spPr>
-          <a:xfrm>
-            <a:off x="731520" y="3383280"/>
-            <a:ext cx="685800" cy="685800"/>
+            <a:endParaRPr lang="en-US" sz="1250" dirty="0"/>
+          </a:p>
+        </p:txBody>
+      </p:sp>
+      <p:sp>
+        <p:nvSpPr>
+          <p:cNvPr id="9" name="Shape 7"/>
+          <p:cNvSpPr/>
+          <p:nvPr/>
+        </p:nvSpPr>
+        <p:spPr>
+          <a:xfrm>
+            <a:off x="4416552" y="1874520"/>
+            <a:ext cx="3502152" cy="3977640"/>
+          </a:xfrm>
+          <a:prstGeom prst="roundRect">
+            <a:avLst>
+              <a:gd name="adj" fmla="val 2611"/>
+            </a:avLst>
+          </a:prstGeom>
+          <a:solidFill>
+            <a:srgbClr val="EDF4F9"/>
+          </a:solidFill>
+          <a:ln w="15240">
+            <a:solidFill>
+              <a:srgbClr val="2E82AC"/>
+            </a:solidFill>
+            <a:prstDash val="solid"/>
+          </a:ln>
+        </p:spPr>
+      </p:sp>
+      <p:sp>
+        <p:nvSpPr>
+          <p:cNvPr id="10" name="Shape 8"/>
+          <p:cNvSpPr/>
+          <p:nvPr/>
+        </p:nvSpPr>
+        <p:spPr>
+          <a:xfrm>
+            <a:off x="4690872" y="2148840"/>
+            <a:ext cx="603504" cy="603504"/>
           </a:xfrm>
           <a:prstGeom prst="ellipse">
             <a:avLst/>
@@ -2865,14 +2922,14 @@
       </p:sp>
       <p:sp>
         <p:nvSpPr>
-          <p:cNvPr id="9" name="Text 7"/>
-          <p:cNvSpPr/>
-          <p:nvPr/>
-        </p:nvSpPr>
-        <p:spPr>
-          <a:xfrm>
-            <a:off x="731520" y="3383280"/>
-            <a:ext cx="685800" cy="685800"/>
+          <p:cNvPr id="11" name="Text 9"/>
+          <p:cNvSpPr/>
+          <p:nvPr/>
+        </p:nvSpPr>
+        <p:spPr>
+          <a:xfrm>
+            <a:off x="4690872" y="2148840"/>
+            <a:ext cx="603504" cy="603504"/>
           </a:xfrm>
           <a:prstGeom prst="rect">
             <a:avLst/>
@@ -2888,7 +2945,7 @@
               <a:buNone/>
             </a:pPr>
             <a:r>
-              <a:rPr lang="en-US" sz="2600" b="1" dirty="0">
+              <a:rPr lang="en-US" sz="2200" b="1" dirty="0">
                 <a:solidFill>
                   <a:srgbClr val="FFFFFF"/>
                 </a:solidFill>
@@ -2898,20 +2955,20 @@
               </a:rPr>
               <a:t>2</a:t>
             </a:r>
-            <a:endParaRPr lang="en-US" sz="2600" dirty="0"/>
-          </a:p>
-        </p:txBody>
-      </p:sp>
-      <p:sp>
-        <p:nvSpPr>
-          <p:cNvPr id="10" name="Text 8"/>
-          <p:cNvSpPr/>
-          <p:nvPr/>
-        </p:nvSpPr>
-        <p:spPr>
-          <a:xfrm>
-            <a:off x="1691640" y="3337560"/>
-            <a:ext cx="9875520" cy="411480"/>
+            <a:endParaRPr lang="en-US" sz="2200" dirty="0"/>
+          </a:p>
+        </p:txBody>
+      </p:sp>
+      <p:sp>
+        <p:nvSpPr>
+          <p:cNvPr id="12" name="Text 10"/>
+          <p:cNvSpPr/>
+          <p:nvPr/>
+        </p:nvSpPr>
+        <p:spPr>
+          <a:xfrm>
+            <a:off x="4690872" y="2898648"/>
+            <a:ext cx="2953512" cy="777240"/>
           </a:xfrm>
           <a:prstGeom prst="rect">
             <a:avLst/>
@@ -2927,7 +2984,7 @@
               <a:buNone/>
             </a:pPr>
             <a:r>
-              <a:rPr lang="en-US" sz="1800" b="1" dirty="0">
+              <a:rPr lang="en-US" sz="1600" b="1" dirty="0">
                 <a:solidFill>
                   <a:srgbClr val="132430"/>
                 </a:solidFill>
@@ -2937,20 +2994,20 @@
               </a:rPr>
               <a:t>A lift-wind-halt alert on real data</a:t>
             </a:r>
-            <a:endParaRPr lang="en-US" sz="1800" dirty="0"/>
-          </a:p>
-        </p:txBody>
-      </p:sp>
-      <p:sp>
-        <p:nvSpPr>
-          <p:cNvPr id="11" name="Text 9"/>
-          <p:cNvSpPr/>
-          <p:nvPr/>
-        </p:nvSpPr>
-        <p:spPr>
-          <a:xfrm>
-            <a:off x="1691640" y="3758184"/>
-            <a:ext cx="9875520" cy="640080"/>
+            <a:endParaRPr lang="en-US" sz="1600" dirty="0"/>
+          </a:p>
+        </p:txBody>
+      </p:sp>
+      <p:sp>
+        <p:nvSpPr>
+          <p:cNvPr id="13" name="Text 11"/>
+          <p:cNvSpPr/>
+          <p:nvPr/>
+        </p:nvSpPr>
+        <p:spPr>
+          <a:xfrm>
+            <a:off x="4690872" y="3657600"/>
+            <a:ext cx="2953512" cy="2011680"/>
           </a:xfrm>
           <a:prstGeom prst="rect">
             <a:avLst/>
@@ -2963,10 +3020,13 @@
           <a:lstStyle/>
           <a:p>
             <a:pPr indent="0" marL="0">
-              <a:buNone/>
-            </a:pPr>
-            <a:r>
-              <a:rPr lang="en-US" sz="1350" dirty="0">
+              <a:lnSpc>
+                <a:spcPct val="106000"/>
+              </a:lnSpc>
+              <a:buNone/>
+            </a:pPr>
+            <a:r>
+              <a:rPr lang="en-US" sz="1250" dirty="0">
                 <a:solidFill>
                   <a:srgbClr val="567480"/>
                 </a:solidFill>
@@ -2976,20 +3036,47 @@
               </a:rPr>
               <a:t>Slope-a's gauge reads HIGH with wind at 111.8 km/h tripping the lift-wind-halt banner — no patrol involved.</a:t>
             </a:r>
-            <a:endParaRPr lang="en-US" sz="1350" dirty="0"/>
-          </a:p>
-        </p:txBody>
-      </p:sp>
-      <p:sp>
-        <p:nvSpPr>
-          <p:cNvPr id="12" name="Shape 10"/>
-          <p:cNvSpPr/>
-          <p:nvPr/>
-        </p:nvSpPr>
-        <p:spPr>
-          <a:xfrm>
-            <a:off x="731520" y="4800600"/>
-            <a:ext cx="685800" cy="685800"/>
+            <a:endParaRPr lang="en-US" sz="1250" dirty="0"/>
+          </a:p>
+        </p:txBody>
+      </p:sp>
+      <p:sp>
+        <p:nvSpPr>
+          <p:cNvPr id="14" name="Shape 12"/>
+          <p:cNvSpPr/>
+          <p:nvPr/>
+        </p:nvSpPr>
+        <p:spPr>
+          <a:xfrm>
+            <a:off x="8193024" y="1874520"/>
+            <a:ext cx="3502152" cy="3977640"/>
+          </a:xfrm>
+          <a:prstGeom prst="roundRect">
+            <a:avLst>
+              <a:gd name="adj" fmla="val 2611"/>
+            </a:avLst>
+          </a:prstGeom>
+          <a:solidFill>
+            <a:srgbClr val="EDF4F9"/>
+          </a:solidFill>
+          <a:ln w="15240">
+            <a:solidFill>
+              <a:srgbClr val="2E82AC"/>
+            </a:solidFill>
+            <a:prstDash val="solid"/>
+          </a:ln>
+        </p:spPr>
+      </p:sp>
+      <p:sp>
+        <p:nvSpPr>
+          <p:cNvPr id="15" name="Shape 13"/>
+          <p:cNvSpPr/>
+          <p:nvPr/>
+        </p:nvSpPr>
+        <p:spPr>
+          <a:xfrm>
+            <a:off x="8467344" y="2148840"/>
+            <a:ext cx="603504" cy="603504"/>
           </a:xfrm>
           <a:prstGeom prst="ellipse">
             <a:avLst/>
@@ -3002,14 +3089,14 @@
       </p:sp>
       <p:sp>
         <p:nvSpPr>
-          <p:cNvPr id="13" name="Text 11"/>
-          <p:cNvSpPr/>
-          <p:nvPr/>
-        </p:nvSpPr>
-        <p:spPr>
-          <a:xfrm>
-            <a:off x="731520" y="4800600"/>
-            <a:ext cx="685800" cy="685800"/>
+          <p:cNvPr id="16" name="Text 14"/>
+          <p:cNvSpPr/>
+          <p:nvPr/>
+        </p:nvSpPr>
+        <p:spPr>
+          <a:xfrm>
+            <a:off x="8467344" y="2148840"/>
+            <a:ext cx="603504" cy="603504"/>
           </a:xfrm>
           <a:prstGeom prst="rect">
             <a:avLst/>
@@ -3025,7 +3112,7 @@
               <a:buNone/>
             </a:pPr>
             <a:r>
-              <a:rPr lang="en-US" sz="2600" b="1" dirty="0">
+              <a:rPr lang="en-US" sz="2200" b="1" dirty="0">
                 <a:solidFill>
                   <a:srgbClr val="FFFFFF"/>
                 </a:solidFill>
@@ -3035,20 +3122,20 @@
               </a:rPr>
               <a:t>3</a:t>
             </a:r>
-            <a:endParaRPr lang="en-US" sz="2600" dirty="0"/>
-          </a:p>
-        </p:txBody>
-      </p:sp>
-      <p:sp>
-        <p:nvSpPr>
-          <p:cNvPr id="14" name="Text 12"/>
-          <p:cNvSpPr/>
-          <p:nvPr/>
-        </p:nvSpPr>
-        <p:spPr>
-          <a:xfrm>
-            <a:off x="1691640" y="4754880"/>
-            <a:ext cx="9875520" cy="411480"/>
+            <a:endParaRPr lang="en-US" sz="2200" dirty="0"/>
+          </a:p>
+        </p:txBody>
+      </p:sp>
+      <p:sp>
+        <p:nvSpPr>
+          <p:cNvPr id="17" name="Text 15"/>
+          <p:cNvSpPr/>
+          <p:nvPr/>
+        </p:nvSpPr>
+        <p:spPr>
+          <a:xfrm>
+            <a:off x="8467344" y="2898648"/>
+            <a:ext cx="2953512" cy="777240"/>
           </a:xfrm>
           <a:prstGeom prst="rect">
             <a:avLst/>
@@ -3064,7 +3151,7 @@
               <a:buNone/>
             </a:pPr>
             <a:r>
-              <a:rPr lang="en-US" sz="1800" b="1" dirty="0">
+              <a:rPr lang="en-US" sz="1600" b="1" dirty="0">
                 <a:solidFill>
                   <a:srgbClr val="132430"/>
                 </a:solidFill>
@@ -3074,20 +3161,20 @@
               </a:rPr>
               <a:t>Filling live before your eyes</a:t>
             </a:r>
-            <a:endParaRPr lang="en-US" sz="1800" dirty="0"/>
-          </a:p>
-        </p:txBody>
-      </p:sp>
-      <p:sp>
-        <p:nvSpPr>
-          <p:cNvPr id="15" name="Text 13"/>
-          <p:cNvSpPr/>
-          <p:nvPr/>
-        </p:nvSpPr>
-        <p:spPr>
-          <a:xfrm>
-            <a:off x="1691640" y="5175504"/>
-            <a:ext cx="9875520" cy="640080"/>
+            <a:endParaRPr lang="en-US" sz="1600" dirty="0"/>
+          </a:p>
+        </p:txBody>
+      </p:sp>
+      <p:sp>
+        <p:nvSpPr>
+          <p:cNvPr id="18" name="Text 16"/>
+          <p:cNvSpPr/>
+          <p:nvPr/>
+        </p:nvSpPr>
+        <p:spPr>
+          <a:xfrm>
+            <a:off x="8467344" y="3657600"/>
+            <a:ext cx="2953512" cy="2011680"/>
           </a:xfrm>
           <a:prstGeom prst="rect">
             <a:avLst/>
@@ -3100,10 +3187,13 @@
           <a:lstStyle/>
           <a:p>
             <a:pPr indent="0" marL="0">
-              <a:buNone/>
-            </a:pPr>
-            <a:r>
-              <a:rPr lang="en-US" sz="1350" dirty="0">
+              <a:lnSpc>
+                <a:spcPct val="106000"/>
+              </a:lnSpc>
+              <a:buNone/>
+            </a:pPr>
+            <a:r>
+              <a:rPr lang="en-US" sz="1250" dirty="0">
                 <a:solidFill>
                   <a:srgbClr val="567480"/>
                 </a:solidFill>
@@ -3113,46 +3203,7 @@
               </a:rPr>
               <a:t>The store climbs 0 to 569 records in about ninety seconds and keeps rising, so the board is genuinely live.</a:t>
             </a:r>
-            <a:endParaRPr lang="en-US" sz="1350" dirty="0"/>
-          </a:p>
-        </p:txBody>
-      </p:sp>
-      <p:sp>
-        <p:nvSpPr>
-          <p:cNvPr id="16" name="Text 14"/>
-          <p:cNvSpPr/>
-          <p:nvPr/>
-        </p:nvSpPr>
-        <p:spPr>
-          <a:xfrm>
-            <a:off x="640080" y="6263640"/>
-            <a:ext cx="10972800" cy="365760"/>
-          </a:xfrm>
-          <a:prstGeom prst="rect">
-            <a:avLst/>
-          </a:prstGeom>
-          <a:noFill/>
-          <a:ln/>
-        </p:spPr>
-        <p:txBody>
-          <a:bodyPr wrap="square" rtlCol="0" anchor="ctr"/>
-          <a:lstStyle/>
-          <a:p>
-            <a:pPr indent="0" marL="0">
-              <a:buNone/>
-            </a:pPr>
-            <a:r>
-              <a:rPr lang="en-US" sz="1300" i="1" dirty="0">
-                <a:solidFill>
-                  <a:srgbClr val="5EA0C4"/>
-                </a:solidFill>
-                <a:latin typeface="Calibri" pitchFamily="34" charset="0"/>
-                <a:ea typeface="Calibri" pitchFamily="34" charset="-122"/>
-                <a:cs typeface="Calibri" pitchFamily="34" charset="-120"/>
-              </a:rPr>
-              <a:t>Switch to the live dashboard here — backup video ready.</a:t>
-            </a:r>
-            <a:endParaRPr lang="en-US" sz="1300" dirty="0"/>
+            <a:endParaRPr lang="en-US" sz="1250" dirty="0"/>
           </a:p>
         </p:txBody>
       </p:sp>

--- a/ppt/EbinJoseph_X25142224_ski-resort-avalanche-safety.pptx
+++ b/ppt/EbinJoseph_X25142224_ski-resort-avalanche-safety.pptx
@@ -1309,23 +1309,16 @@
         </p:nvSpPr>
         <p:spPr>
           <a:xfrm>
-            <a:off x="658368" y="5623560"/>
-            <a:ext cx="2651760" cy="566928"/>
-          </a:xfrm>
-          <a:prstGeom prst="roundRect">
-            <a:avLst>
-              <a:gd name="adj" fmla="val 50000"/>
-            </a:avLst>
-          </a:prstGeom>
-          <a:solidFill>
-            <a:srgbClr val="1A3548"/>
-          </a:solidFill>
-          <a:ln w="12700">
-            <a:solidFill>
-              <a:srgbClr val="E4A83C"/>
-            </a:solidFill>
-            <a:prstDash val="solid"/>
-          </a:ln>
+            <a:off x="658368" y="5769864"/>
+            <a:ext cx="146304" cy="146304"/>
+          </a:xfrm>
+          <a:prstGeom prst="rect">
+            <a:avLst/>
+          </a:prstGeom>
+          <a:solidFill>
+            <a:srgbClr val="E4A83C"/>
+          </a:solidFill>
+          <a:ln/>
         </p:spPr>
       </p:sp>
       <p:sp>
@@ -1336,8 +1329,8 @@
         </p:nvSpPr>
         <p:spPr>
           <a:xfrm>
-            <a:off x="658368" y="5623560"/>
-            <a:ext cx="2651760" cy="566928"/>
+            <a:off x="932688" y="5623560"/>
+            <a:ext cx="2560320" cy="457200"/>
           </a:xfrm>
           <a:prstGeom prst="rect">
             <a:avLst/>
@@ -1349,13 +1342,13 @@
           <a:bodyPr wrap="square" lIns="0" tIns="0" rIns="0" bIns="0" rtlCol="0" anchor="ctr"/>
           <a:lstStyle/>
           <a:p>
-            <a:pPr algn="ctr" indent="0" marL="0">
-              <a:buNone/>
-            </a:pPr>
-            <a:r>
-              <a:rPr lang="en-US" sz="1350" b="1" dirty="0">
-                <a:solidFill>
-                  <a:srgbClr val="E4A83C"/>
+            <a:pPr indent="0" marL="0">
+              <a:buNone/>
+            </a:pPr>
+            <a:r>
+              <a:rPr lang="en-US" sz="1400" b="1" dirty="0">
+                <a:solidFill>
+                  <a:srgbClr val="CFE2EE"/>
                 </a:solidFill>
                 <a:latin typeface="Calibri" pitchFamily="34" charset="0"/>
                 <a:ea typeface="Calibri" pitchFamily="34" charset="-122"/>
@@ -1363,7 +1356,7 @@
               </a:rPr>
               <a:t>Wind halt &gt; 80 km/h</a:t>
             </a:r>
-            <a:endParaRPr lang="en-US" sz="1350" dirty="0"/>
+            <a:endParaRPr lang="en-US" sz="1400" dirty="0"/>
           </a:p>
         </p:txBody>
       </p:sp>
@@ -1375,23 +1368,16 @@
         </p:nvSpPr>
         <p:spPr>
           <a:xfrm>
-            <a:off x="3538728" y="5623560"/>
-            <a:ext cx="2651760" cy="566928"/>
-          </a:xfrm>
-          <a:prstGeom prst="roundRect">
-            <a:avLst>
-              <a:gd name="adj" fmla="val 50000"/>
-            </a:avLst>
-          </a:prstGeom>
-          <a:solidFill>
-            <a:srgbClr val="1A3548"/>
-          </a:solidFill>
-          <a:ln w="12700">
-            <a:solidFill>
-              <a:srgbClr val="E4A83C"/>
-            </a:solidFill>
-            <a:prstDash val="solid"/>
-          </a:ln>
+            <a:off x="3538728" y="5769864"/>
+            <a:ext cx="146304" cy="146304"/>
+          </a:xfrm>
+          <a:prstGeom prst="rect">
+            <a:avLst/>
+          </a:prstGeom>
+          <a:solidFill>
+            <a:srgbClr val="E4A83C"/>
+          </a:solidFill>
+          <a:ln/>
         </p:spPr>
       </p:sp>
       <p:sp>
@@ -1402,8 +1388,8 @@
         </p:nvSpPr>
         <p:spPr>
           <a:xfrm>
-            <a:off x="3538728" y="5623560"/>
-            <a:ext cx="2651760" cy="566928"/>
+            <a:off x="3813048" y="5623560"/>
+            <a:ext cx="2560320" cy="457200"/>
           </a:xfrm>
           <a:prstGeom prst="rect">
             <a:avLst/>
@@ -1415,13 +1401,13 @@
           <a:bodyPr wrap="square" lIns="0" tIns="0" rIns="0" bIns="0" rtlCol="0" anchor="ctr"/>
           <a:lstStyle/>
           <a:p>
-            <a:pPr algn="ctr" indent="0" marL="0">
-              <a:buNone/>
-            </a:pPr>
-            <a:r>
-              <a:rPr lang="en-US" sz="1350" b="1" dirty="0">
-                <a:solidFill>
-                  <a:srgbClr val="E4A83C"/>
+            <a:pPr indent="0" marL="0">
+              <a:buNone/>
+            </a:pPr>
+            <a:r>
+              <a:rPr lang="en-US" sz="1400" b="1" dirty="0">
+                <a:solidFill>
+                  <a:srgbClr val="CFE2EE"/>
                 </a:solidFill>
                 <a:latin typeface="Calibri" pitchFamily="34" charset="0"/>
                 <a:ea typeface="Calibri" pitchFamily="34" charset="-122"/>
@@ -1429,7 +1415,7 @@
               </a:rPr>
               <a:t>10 sensors · 2 slopes</a:t>
             </a:r>
-            <a:endParaRPr lang="en-US" sz="1350" dirty="0"/>
+            <a:endParaRPr lang="en-US" sz="1400" dirty="0"/>
           </a:p>
         </p:txBody>
       </p:sp>
@@ -1441,23 +1427,16 @@
         </p:nvSpPr>
         <p:spPr>
           <a:xfrm>
-            <a:off x="6419088" y="5623560"/>
-            <a:ext cx="2651760" cy="566928"/>
-          </a:xfrm>
-          <a:prstGeom prst="roundRect">
-            <a:avLst>
-              <a:gd name="adj" fmla="val 50000"/>
-            </a:avLst>
-          </a:prstGeom>
-          <a:solidFill>
-            <a:srgbClr val="1A3548"/>
-          </a:solidFill>
-          <a:ln w="12700">
-            <a:solidFill>
-              <a:srgbClr val="E4A83C"/>
-            </a:solidFill>
-            <a:prstDash val="solid"/>
-          </a:ln>
+            <a:off x="6419088" y="5769864"/>
+            <a:ext cx="146304" cy="146304"/>
+          </a:xfrm>
+          <a:prstGeom prst="rect">
+            <a:avLst/>
+          </a:prstGeom>
+          <a:solidFill>
+            <a:srgbClr val="E4A83C"/>
+          </a:solidFill>
+          <a:ln/>
         </p:spPr>
       </p:sp>
       <p:sp>
@@ -1468,8 +1447,8 @@
         </p:nvSpPr>
         <p:spPr>
           <a:xfrm>
-            <a:off x="6419088" y="5623560"/>
-            <a:ext cx="2651760" cy="566928"/>
+            <a:off x="6693408" y="5623560"/>
+            <a:ext cx="2560320" cy="457200"/>
           </a:xfrm>
           <a:prstGeom prst="rect">
             <a:avLst/>
@@ -1481,13 +1460,13 @@
           <a:bodyPr wrap="square" lIns="0" tIns="0" rIns="0" bIns="0" rtlCol="0" anchor="ctr"/>
           <a:lstStyle/>
           <a:p>
-            <a:pPr algn="ctr" indent="0" marL="0">
-              <a:buNone/>
-            </a:pPr>
-            <a:r>
-              <a:rPr lang="en-US" sz="1350" b="1" dirty="0">
-                <a:solidFill>
-                  <a:srgbClr val="E4A83C"/>
+            <a:pPr indent="0" marL="0">
+              <a:buNone/>
+            </a:pPr>
+            <a:r>
+              <a:rPr lang="en-US" sz="1400" b="1" dirty="0">
+                <a:solidFill>
+                  <a:srgbClr val="CFE2EE"/>
                 </a:solidFill>
                 <a:latin typeface="Calibri" pitchFamily="34" charset="0"/>
                 <a:ea typeface="Calibri" pitchFamily="34" charset="-122"/>
@@ -1495,7 +1474,7 @@
               </a:rPr>
               <a:t>4 edge rules</a:t>
             </a:r>
-            <a:endParaRPr lang="en-US" sz="1350" dirty="0"/>
+            <a:endParaRPr lang="en-US" sz="1400" dirty="0"/>
           </a:p>
         </p:txBody>
       </p:sp>
@@ -1523,17 +1502,6 @@
             <a:pPr indent="0" marL="0">
               <a:buNone/>
             </a:pPr>
-            <a:r>
-              <a:rPr lang="en-US" sz="1250" dirty="0">
-                <a:solidFill>
-                  <a:srgbClr val="567480"/>
-                </a:solidFill>
-                <a:latin typeface="Calibri" pitchFamily="34" charset="0"/>
-                <a:ea typeface="Calibri" pitchFamily="34" charset="-122"/>
-                <a:cs typeface="Calibri" pitchFamily="34" charset="-120"/>
-              </a:rPr>
-              <a:t>Fog &amp; Edge Computing (H9FECC)   ·   deployed live on AWS</a:t>
-            </a:r>
             <a:endParaRPr lang="en-US" sz="1250" dirty="0"/>
           </a:p>
         </p:txBody>

--- a/ppt/EbinJoseph_X25142224_ski-resort-avalanche-safety.pptx
+++ b/ppt/EbinJoseph_X25142224_ski-resort-avalanche-safety.pptx
@@ -1124,7 +1124,7 @@
     <p:bg>
       <p:bgPr>
         <a:solidFill>
-          <a:srgbClr val="142430"/>
+          <a:srgbClr val="EEF5FB"/>
         </a:solidFill>
       </p:bgPr>
     </p:bg>
@@ -1144,53 +1144,96 @@
       </p:grpSpPr>
       <p:sp>
         <p:nvSpPr>
-          <p:cNvPr id="2" name="Text 0"/>
-          <p:cNvSpPr/>
-          <p:nvPr/>
-        </p:nvSpPr>
-        <p:spPr>
-          <a:xfrm>
-            <a:off x="658368" y="640080"/>
-            <a:ext cx="10972800" cy="365760"/>
-          </a:xfrm>
-          <a:prstGeom prst="rect">
-            <a:avLst/>
-          </a:prstGeom>
-          <a:noFill/>
-          <a:ln/>
-        </p:spPr>
-        <p:txBody>
-          <a:bodyPr wrap="square" rtlCol="0" anchor="ctr"/>
-          <a:lstStyle/>
-          <a:p>
-            <a:pPr indent="0" marL="0">
-              <a:buNone/>
-            </a:pPr>
-            <a:r>
-              <a:rPr lang="en-US" sz="1400" b="1" spc="300" kern="0" dirty="0">
-                <a:solidFill>
-                  <a:srgbClr val="E4A83C"/>
+          <p:cNvPr id="2" name="Shape 0"/>
+          <p:cNvSpPr/>
+          <p:nvPr/>
+        </p:nvSpPr>
+        <p:spPr>
+          <a:xfrm>
+            <a:off x="10682935" y="5349240"/>
+            <a:ext cx="3017520" cy="3017520"/>
+          </a:xfrm>
+          <a:prstGeom prst="ellipse">
+            <a:avLst/>
+          </a:prstGeom>
+          <a:solidFill>
+            <a:srgbClr val="0B6FA8"/>
+          </a:solidFill>
+          <a:ln/>
+        </p:spPr>
+      </p:sp>
+      <p:sp>
+        <p:nvSpPr>
+          <p:cNvPr id="3" name="Shape 1"/>
+          <p:cNvSpPr/>
+          <p:nvPr/>
+        </p:nvSpPr>
+        <p:spPr>
+          <a:xfrm>
+            <a:off x="11231575" y="5897880"/>
+            <a:ext cx="1920240" cy="1920240"/>
+          </a:xfrm>
+          <a:prstGeom prst="ellipse">
+            <a:avLst/>
+          </a:prstGeom>
+          <a:solidFill>
+            <a:srgbClr val="51B5EE"/>
+          </a:solidFill>
+          <a:ln/>
+        </p:spPr>
+      </p:sp>
+      <p:sp>
+        <p:nvSpPr>
+          <p:cNvPr id="4" name="Text 2"/>
+          <p:cNvSpPr/>
+          <p:nvPr/>
+        </p:nvSpPr>
+        <p:spPr>
+          <a:xfrm>
+            <a:off x="758952" y="1645920"/>
+            <a:ext cx="10637215" cy="1645920"/>
+          </a:xfrm>
+          <a:prstGeom prst="rect">
+            <a:avLst/>
+          </a:prstGeom>
+          <a:noFill/>
+          <a:ln/>
+        </p:spPr>
+        <p:txBody>
+          <a:bodyPr wrap="square" rtlCol="0" anchor="t"/>
+          <a:lstStyle/>
+          <a:p>
+            <a:pPr indent="0" marL="0">
+              <a:lnSpc>
+                <a:spcPct val="98000"/>
+              </a:lnSpc>
+              <a:buNone/>
+            </a:pPr>
+            <a:r>
+              <a:rPr lang="en-US" sz="3800" b="1" dirty="0">
+                <a:solidFill>
+                  <a:srgbClr val="0F2C47"/>
                 </a:solidFill>
                 <a:latin typeface="Calibri" pitchFamily="34" charset="0"/>
                 <a:ea typeface="Calibri" pitchFamily="34" charset="-122"/>
                 <a:cs typeface="Calibri" pitchFamily="34" charset="-120"/>
               </a:rPr>
-              <a:t>SKI RESORT AVALANCHE SAFETY</a:t>
-            </a:r>
-            <a:endParaRPr lang="en-US" sz="1400" dirty="0"/>
-          </a:p>
-        </p:txBody>
-      </p:sp>
-      <p:sp>
-        <p:nvSpPr>
-          <p:cNvPr id="3" name="Text 1"/>
-          <p:cNvSpPr/>
-          <p:nvPr/>
-        </p:nvSpPr>
-        <p:spPr>
-          <a:xfrm>
-            <a:off x="640080" y="2514600"/>
-            <a:ext cx="10972800" cy="1188720"/>
+              <a:t>Ski Resort Avalanche Safety</a:t>
+            </a:r>
+            <a:endParaRPr lang="en-US" sz="3800" dirty="0"/>
+          </a:p>
+        </p:txBody>
+      </p:sp>
+      <p:sp>
+        <p:nvSpPr>
+          <p:cNvPr id="5" name="Text 3"/>
+          <p:cNvSpPr/>
+          <p:nvPr/>
+        </p:nvSpPr>
+        <p:spPr>
+          <a:xfrm>
+            <a:off x="777240" y="3337560"/>
+            <a:ext cx="10637215" cy="365760"/>
           </a:xfrm>
           <a:prstGeom prst="rect">
             <a:avLst/>
@@ -1206,48 +1249,9 @@
               <a:buNone/>
             </a:pPr>
             <a:r>
-              <a:rPr lang="en-US" sz="4000" b="1" dirty="0">
-                <a:solidFill>
-                  <a:srgbClr val="FFFFFF"/>
-                </a:solidFill>
-                <a:latin typeface="Bookman Old Style" pitchFamily="34" charset="0"/>
-                <a:ea typeface="Bookman Old Style" pitchFamily="34" charset="-122"/>
-                <a:cs typeface="Bookman Old Style" pitchFamily="34" charset="-120"/>
-              </a:rPr>
-              <a:t>Ski Resort Avalanche Safety</a:t>
-            </a:r>
-            <a:endParaRPr lang="en-US" sz="4000" dirty="0"/>
-          </a:p>
-        </p:txBody>
-      </p:sp>
-      <p:sp>
-        <p:nvSpPr>
-          <p:cNvPr id="4" name="Text 2"/>
-          <p:cNvSpPr/>
-          <p:nvPr/>
-        </p:nvSpPr>
-        <p:spPr>
-          <a:xfrm>
-            <a:off x="658368" y="3703320"/>
-            <a:ext cx="10972800" cy="365760"/>
-          </a:xfrm>
-          <a:prstGeom prst="rect">
-            <a:avLst/>
-          </a:prstGeom>
-          <a:noFill/>
-          <a:ln/>
-        </p:spPr>
-        <p:txBody>
-          <a:bodyPr wrap="square" rtlCol="0" anchor="ctr"/>
-          <a:lstStyle/>
-          <a:p>
-            <a:pPr indent="0" marL="0">
-              <a:buNone/>
-            </a:pPr>
-            <a:r>
-              <a:rPr lang="en-US" sz="1600" dirty="0">
-                <a:solidFill>
-                  <a:srgbClr val="5EA0C4"/>
+              <a:rPr lang="en-US" sz="1450" dirty="0">
+                <a:solidFill>
+                  <a:srgbClr val="5F6B74"/>
                 </a:solidFill>
                 <a:latin typeface="Calibri" pitchFamily="34" charset="0"/>
                 <a:ea typeface="Calibri" pitchFamily="34" charset="-122"/>
@@ -1255,41 +1259,41 @@
               </a:rPr>
               <a:t>Ebin Joseph   ·   X25142224</a:t>
             </a:r>
-            <a:endParaRPr lang="en-US" sz="1600" dirty="0"/>
-          </a:p>
-        </p:txBody>
-      </p:sp>
-      <p:sp>
-        <p:nvSpPr>
-          <p:cNvPr id="5" name="Text 3"/>
-          <p:cNvSpPr/>
-          <p:nvPr/>
-        </p:nvSpPr>
-        <p:spPr>
-          <a:xfrm>
-            <a:off x="658368" y="4251960"/>
-            <a:ext cx="10424160" cy="1188720"/>
-          </a:xfrm>
-          <a:prstGeom prst="rect">
-            <a:avLst/>
-          </a:prstGeom>
-          <a:noFill/>
-          <a:ln/>
-        </p:spPr>
-        <p:txBody>
-          <a:bodyPr wrap="square" rtlCol="0" anchor="ctr"/>
+            <a:endParaRPr lang="en-US" sz="1450" dirty="0"/>
+          </a:p>
+        </p:txBody>
+      </p:sp>
+      <p:sp>
+        <p:nvSpPr>
+          <p:cNvPr id="6" name="Text 4"/>
+          <p:cNvSpPr/>
+          <p:nvPr/>
+        </p:nvSpPr>
+        <p:spPr>
+          <a:xfrm>
+            <a:off x="777240" y="3931920"/>
+            <a:ext cx="8138160" cy="1325880"/>
+          </a:xfrm>
+          <a:prstGeom prst="rect">
+            <a:avLst/>
+          </a:prstGeom>
+          <a:noFill/>
+          <a:ln/>
+        </p:spPr>
+        <p:txBody>
+          <a:bodyPr wrap="square" rtlCol="0" anchor="t"/>
           <a:lstStyle/>
           <a:p>
             <a:pPr indent="0" marL="0">
               <a:lnSpc>
-                <a:spcPct val="108000"/>
+                <a:spcPct val="130000"/>
               </a:lnSpc>
               <a:buNone/>
             </a:pPr>
             <a:r>
-              <a:rPr lang="en-US" sz="1800" dirty="0">
-                <a:solidFill>
-                  <a:srgbClr val="CFE2EE"/>
+              <a:rPr lang="en-US" sz="1400" dirty="0">
+                <a:solidFill>
+                  <a:srgbClr val="0F2C47"/>
                 </a:solidFill>
                 <a:latin typeface="Calibri" pitchFamily="34" charset="0"/>
                 <a:ea typeface="Calibri" pitchFamily="34" charset="-122"/>
@@ -1297,212 +1301,7 @@
               </a:rPr>
               <a:t>Avalanche danger develops, peaks and passes in the gaps between patrol rounds — a seismic spike ahead of a slab release lasts only minutes and can pass entirely between two rounds.</a:t>
             </a:r>
-            <a:endParaRPr lang="en-US" sz="1800" dirty="0"/>
-          </a:p>
-        </p:txBody>
-      </p:sp>
-      <p:sp>
-        <p:nvSpPr>
-          <p:cNvPr id="6" name="Shape 4"/>
-          <p:cNvSpPr/>
-          <p:nvPr/>
-        </p:nvSpPr>
-        <p:spPr>
-          <a:xfrm>
-            <a:off x="658368" y="5769864"/>
-            <a:ext cx="146304" cy="146304"/>
-          </a:xfrm>
-          <a:prstGeom prst="rect">
-            <a:avLst/>
-          </a:prstGeom>
-          <a:solidFill>
-            <a:srgbClr val="E4A83C"/>
-          </a:solidFill>
-          <a:ln/>
-        </p:spPr>
-      </p:sp>
-      <p:sp>
-        <p:nvSpPr>
-          <p:cNvPr id="7" name="Text 5"/>
-          <p:cNvSpPr/>
-          <p:nvPr/>
-        </p:nvSpPr>
-        <p:spPr>
-          <a:xfrm>
-            <a:off x="932688" y="5623560"/>
-            <a:ext cx="2560320" cy="457200"/>
-          </a:xfrm>
-          <a:prstGeom prst="rect">
-            <a:avLst/>
-          </a:prstGeom>
-          <a:noFill/>
-          <a:ln/>
-        </p:spPr>
-        <p:txBody>
-          <a:bodyPr wrap="square" lIns="0" tIns="0" rIns="0" bIns="0" rtlCol="0" anchor="ctr"/>
-          <a:lstStyle/>
-          <a:p>
-            <a:pPr indent="0" marL="0">
-              <a:buNone/>
-            </a:pPr>
-            <a:r>
-              <a:rPr lang="en-US" sz="1400" b="1" dirty="0">
-                <a:solidFill>
-                  <a:srgbClr val="CFE2EE"/>
-                </a:solidFill>
-                <a:latin typeface="Calibri" pitchFamily="34" charset="0"/>
-                <a:ea typeface="Calibri" pitchFamily="34" charset="-122"/>
-                <a:cs typeface="Calibri" pitchFamily="34" charset="-120"/>
-              </a:rPr>
-              <a:t>Wind halt &gt; 80 km/h</a:t>
-            </a:r>
             <a:endParaRPr lang="en-US" sz="1400" dirty="0"/>
-          </a:p>
-        </p:txBody>
-      </p:sp>
-      <p:sp>
-        <p:nvSpPr>
-          <p:cNvPr id="8" name="Shape 6"/>
-          <p:cNvSpPr/>
-          <p:nvPr/>
-        </p:nvSpPr>
-        <p:spPr>
-          <a:xfrm>
-            <a:off x="3538728" y="5769864"/>
-            <a:ext cx="146304" cy="146304"/>
-          </a:xfrm>
-          <a:prstGeom prst="rect">
-            <a:avLst/>
-          </a:prstGeom>
-          <a:solidFill>
-            <a:srgbClr val="E4A83C"/>
-          </a:solidFill>
-          <a:ln/>
-        </p:spPr>
-      </p:sp>
-      <p:sp>
-        <p:nvSpPr>
-          <p:cNvPr id="9" name="Text 7"/>
-          <p:cNvSpPr/>
-          <p:nvPr/>
-        </p:nvSpPr>
-        <p:spPr>
-          <a:xfrm>
-            <a:off x="3813048" y="5623560"/>
-            <a:ext cx="2560320" cy="457200"/>
-          </a:xfrm>
-          <a:prstGeom prst="rect">
-            <a:avLst/>
-          </a:prstGeom>
-          <a:noFill/>
-          <a:ln/>
-        </p:spPr>
-        <p:txBody>
-          <a:bodyPr wrap="square" lIns="0" tIns="0" rIns="0" bIns="0" rtlCol="0" anchor="ctr"/>
-          <a:lstStyle/>
-          <a:p>
-            <a:pPr indent="0" marL="0">
-              <a:buNone/>
-            </a:pPr>
-            <a:r>
-              <a:rPr lang="en-US" sz="1400" b="1" dirty="0">
-                <a:solidFill>
-                  <a:srgbClr val="CFE2EE"/>
-                </a:solidFill>
-                <a:latin typeface="Calibri" pitchFamily="34" charset="0"/>
-                <a:ea typeface="Calibri" pitchFamily="34" charset="-122"/>
-                <a:cs typeface="Calibri" pitchFamily="34" charset="-120"/>
-              </a:rPr>
-              <a:t>10 sensors · 2 slopes</a:t>
-            </a:r>
-            <a:endParaRPr lang="en-US" sz="1400" dirty="0"/>
-          </a:p>
-        </p:txBody>
-      </p:sp>
-      <p:sp>
-        <p:nvSpPr>
-          <p:cNvPr id="10" name="Shape 8"/>
-          <p:cNvSpPr/>
-          <p:nvPr/>
-        </p:nvSpPr>
-        <p:spPr>
-          <a:xfrm>
-            <a:off x="6419088" y="5769864"/>
-            <a:ext cx="146304" cy="146304"/>
-          </a:xfrm>
-          <a:prstGeom prst="rect">
-            <a:avLst/>
-          </a:prstGeom>
-          <a:solidFill>
-            <a:srgbClr val="E4A83C"/>
-          </a:solidFill>
-          <a:ln/>
-        </p:spPr>
-      </p:sp>
-      <p:sp>
-        <p:nvSpPr>
-          <p:cNvPr id="11" name="Text 9"/>
-          <p:cNvSpPr/>
-          <p:nvPr/>
-        </p:nvSpPr>
-        <p:spPr>
-          <a:xfrm>
-            <a:off x="6693408" y="5623560"/>
-            <a:ext cx="2560320" cy="457200"/>
-          </a:xfrm>
-          <a:prstGeom prst="rect">
-            <a:avLst/>
-          </a:prstGeom>
-          <a:noFill/>
-          <a:ln/>
-        </p:spPr>
-        <p:txBody>
-          <a:bodyPr wrap="square" lIns="0" tIns="0" rIns="0" bIns="0" rtlCol="0" anchor="ctr"/>
-          <a:lstStyle/>
-          <a:p>
-            <a:pPr indent="0" marL="0">
-              <a:buNone/>
-            </a:pPr>
-            <a:r>
-              <a:rPr lang="en-US" sz="1400" b="1" dirty="0">
-                <a:solidFill>
-                  <a:srgbClr val="CFE2EE"/>
-                </a:solidFill>
-                <a:latin typeface="Calibri" pitchFamily="34" charset="0"/>
-                <a:ea typeface="Calibri" pitchFamily="34" charset="-122"/>
-                <a:cs typeface="Calibri" pitchFamily="34" charset="-120"/>
-              </a:rPr>
-              <a:t>4 edge rules</a:t>
-            </a:r>
-            <a:endParaRPr lang="en-US" sz="1400" dirty="0"/>
-          </a:p>
-        </p:txBody>
-      </p:sp>
-      <p:sp>
-        <p:nvSpPr>
-          <p:cNvPr id="12" name="Text 10"/>
-          <p:cNvSpPr/>
-          <p:nvPr/>
-        </p:nvSpPr>
-        <p:spPr>
-          <a:xfrm>
-            <a:off x="658368" y="6400800"/>
-            <a:ext cx="10972800" cy="320040"/>
-          </a:xfrm>
-          <a:prstGeom prst="rect">
-            <a:avLst/>
-          </a:prstGeom>
-          <a:noFill/>
-          <a:ln/>
-        </p:spPr>
-        <p:txBody>
-          <a:bodyPr wrap="square" rtlCol="0" anchor="ctr"/>
-          <a:lstStyle/>
-          <a:p>
-            <a:pPr indent="0" marL="0">
-              <a:buNone/>
-            </a:pPr>
-            <a:endParaRPr lang="en-US" sz="1250" dirty="0"/>
           </a:p>
         </p:txBody>
       </p:sp>
@@ -1520,7 +1319,7 @@
     <p:bg>
       <p:bgPr>
         <a:solidFill>
-          <a:srgbClr val="FFFFFF"/>
+          <a:srgbClr val="EEF5FB"/>
         </a:solidFill>
       </p:bgPr>
     </p:bg>
@@ -1540,23 +1339,63 @@
       </p:grpSpPr>
       <p:sp>
         <p:nvSpPr>
-          <p:cNvPr id="2" name="Text 0"/>
-          <p:cNvSpPr/>
-          <p:nvPr/>
-        </p:nvSpPr>
-        <p:spPr>
-          <a:xfrm>
-            <a:off x="640080" y="457200"/>
-            <a:ext cx="10972800" cy="640080"/>
-          </a:xfrm>
-          <a:prstGeom prst="rect">
-            <a:avLst/>
-          </a:prstGeom>
-          <a:noFill/>
-          <a:ln/>
-        </p:spPr>
-        <p:txBody>
-          <a:bodyPr wrap="square" rtlCol="0" anchor="ctr"/>
+          <p:cNvPr id="2" name="Shape 0"/>
+          <p:cNvSpPr/>
+          <p:nvPr/>
+        </p:nvSpPr>
+        <p:spPr>
+          <a:xfrm>
+            <a:off x="10682935" y="5349240"/>
+            <a:ext cx="3017520" cy="3017520"/>
+          </a:xfrm>
+          <a:prstGeom prst="ellipse">
+            <a:avLst/>
+          </a:prstGeom>
+          <a:solidFill>
+            <a:srgbClr val="0B6FA8"/>
+          </a:solidFill>
+          <a:ln/>
+        </p:spPr>
+      </p:sp>
+      <p:sp>
+        <p:nvSpPr>
+          <p:cNvPr id="3" name="Shape 1"/>
+          <p:cNvSpPr/>
+          <p:nvPr/>
+        </p:nvSpPr>
+        <p:spPr>
+          <a:xfrm>
+            <a:off x="11231575" y="5897880"/>
+            <a:ext cx="1920240" cy="1920240"/>
+          </a:xfrm>
+          <a:prstGeom prst="ellipse">
+            <a:avLst/>
+          </a:prstGeom>
+          <a:solidFill>
+            <a:srgbClr val="51B5EE"/>
+          </a:solidFill>
+          <a:ln/>
+        </p:spPr>
+      </p:sp>
+      <p:sp>
+        <p:nvSpPr>
+          <p:cNvPr id="4" name="Text 2"/>
+          <p:cNvSpPr/>
+          <p:nvPr/>
+        </p:nvSpPr>
+        <p:spPr>
+          <a:xfrm>
+            <a:off x="777240" y="731520"/>
+            <a:ext cx="914400" cy="640080"/>
+          </a:xfrm>
+          <a:prstGeom prst="rect">
+            <a:avLst/>
+          </a:prstGeom>
+          <a:noFill/>
+          <a:ln/>
+        </p:spPr>
+        <p:txBody>
+          <a:bodyPr wrap="square" lIns="0" tIns="0" rIns="0" bIns="0" rtlCol="0" anchor="ctr"/>
           <a:lstStyle/>
           <a:p>
             <a:pPr indent="0" marL="0">
@@ -1565,40 +1404,118 @@
             <a:r>
               <a:rPr lang="en-US" sz="3000" b="1" dirty="0">
                 <a:solidFill>
-                  <a:srgbClr val="132430"/>
-                </a:solidFill>
-                <a:latin typeface="Bookman Old Style" pitchFamily="34" charset="0"/>
-                <a:ea typeface="Bookman Old Style" pitchFamily="34" charset="-122"/>
-                <a:cs typeface="Bookman Old Style" pitchFamily="34" charset="-120"/>
+                  <a:srgbClr val="0B6FA8"/>
+                </a:solidFill>
+                <a:latin typeface="Calibri" pitchFamily="34" charset="0"/>
+                <a:ea typeface="Calibri" pitchFamily="34" charset="-122"/>
+                <a:cs typeface="Calibri" pitchFamily="34" charset="-120"/>
+              </a:rPr>
+              <a:t>01</a:t>
+            </a:r>
+            <a:endParaRPr lang="en-US" sz="3000" dirty="0"/>
+          </a:p>
+        </p:txBody>
+      </p:sp>
+      <p:sp>
+        <p:nvSpPr>
+          <p:cNvPr id="5" name="Text 3"/>
+          <p:cNvSpPr/>
+          <p:nvPr/>
+        </p:nvSpPr>
+        <p:spPr>
+          <a:xfrm>
+            <a:off x="1645920" y="905256"/>
+            <a:ext cx="9768535" cy="274320"/>
+          </a:xfrm>
+          <a:prstGeom prst="rect">
+            <a:avLst/>
+          </a:prstGeom>
+          <a:noFill/>
+          <a:ln/>
+        </p:spPr>
+        <p:txBody>
+          <a:bodyPr wrap="square" lIns="0" tIns="0" rIns="0" bIns="0" rtlCol="0" anchor="ctr"/>
+          <a:lstStyle/>
+          <a:p>
+            <a:pPr indent="0" marL="0">
+              <a:buNone/>
+            </a:pPr>
+            <a:r>
+              <a:rPr lang="en-US" sz="1100" b="1" spc="200" kern="0" dirty="0">
+                <a:solidFill>
+                  <a:srgbClr val="5F6B74"/>
+                </a:solidFill>
+                <a:latin typeface="Calibri" pitchFamily="34" charset="0"/>
+                <a:ea typeface="Calibri" pitchFamily="34" charset="-122"/>
+                <a:cs typeface="Calibri" pitchFamily="34" charset="-120"/>
+              </a:rPr>
+              <a:t>ARCHITECTURE</a:t>
+            </a:r>
+            <a:endParaRPr lang="en-US" sz="1100" dirty="0"/>
+          </a:p>
+        </p:txBody>
+      </p:sp>
+      <p:sp>
+        <p:nvSpPr>
+          <p:cNvPr id="6" name="Text 4"/>
+          <p:cNvSpPr/>
+          <p:nvPr/>
+        </p:nvSpPr>
+        <p:spPr>
+          <a:xfrm>
+            <a:off x="777240" y="1380744"/>
+            <a:ext cx="10637215" cy="640080"/>
+          </a:xfrm>
+          <a:prstGeom prst="rect">
+            <a:avLst/>
+          </a:prstGeom>
+          <a:noFill/>
+          <a:ln/>
+        </p:spPr>
+        <p:txBody>
+          <a:bodyPr wrap="square" lIns="0" tIns="0" rIns="0" bIns="0" rtlCol="0" anchor="ctr"/>
+          <a:lstStyle/>
+          <a:p>
+            <a:pPr indent="0" marL="0">
+              <a:buNone/>
+            </a:pPr>
+            <a:r>
+              <a:rPr lang="en-US" sz="2300" b="1" dirty="0">
+                <a:solidFill>
+                  <a:srgbClr val="0F2C47"/>
+                </a:solidFill>
+                <a:latin typeface="Calibri" pitchFamily="34" charset="0"/>
+                <a:ea typeface="Calibri" pitchFamily="34" charset="-122"/>
+                <a:cs typeface="Calibri" pitchFamily="34" charset="-120"/>
               </a:rPr>
               <a:t>What I Built — Fog First, Cloud Second</a:t>
             </a:r>
-            <a:endParaRPr lang="en-US" sz="3000" dirty="0"/>
-          </a:p>
-        </p:txBody>
-      </p:sp>
-      <p:sp>
-        <p:nvSpPr>
-          <p:cNvPr id="3" name="Shape 1"/>
-          <p:cNvSpPr/>
-          <p:nvPr/>
-        </p:nvSpPr>
-        <p:spPr>
-          <a:xfrm>
-            <a:off x="640080" y="2468880"/>
-            <a:ext cx="1572768" cy="1371600"/>
+            <a:endParaRPr lang="en-US" sz="2300" dirty="0"/>
+          </a:p>
+        </p:txBody>
+      </p:sp>
+      <p:sp>
+        <p:nvSpPr>
+          <p:cNvPr id="7" name="Shape 5"/>
+          <p:cNvSpPr/>
+          <p:nvPr/>
+        </p:nvSpPr>
+        <p:spPr>
+          <a:xfrm>
+            <a:off x="777240" y="2971800"/>
+            <a:ext cx="1391869" cy="1965960"/>
           </a:xfrm>
           <a:prstGeom prst="roundRect">
             <a:avLst>
-              <a:gd name="adj" fmla="val 6667"/>
+              <a:gd name="adj" fmla="val 9197"/>
             </a:avLst>
           </a:prstGeom>
           <a:solidFill>
-            <a:srgbClr val="EDF4F9"/>
-          </a:solidFill>
-          <a:ln w="19050">
+            <a:srgbClr val="0B6FA8"/>
+          </a:solidFill>
+          <a:ln w="12700">
             <a:solidFill>
-              <a:srgbClr val="5EA0C4"/>
+              <a:srgbClr val="0B6FA8"/>
             </a:solidFill>
             <a:prstDash val="solid"/>
           </a:ln>
@@ -1606,34 +1523,14 @@
       </p:sp>
       <p:sp>
         <p:nvSpPr>
-          <p:cNvPr id="4" name="Shape 2"/>
-          <p:cNvSpPr/>
-          <p:nvPr/>
-        </p:nvSpPr>
-        <p:spPr>
-          <a:xfrm>
-            <a:off x="1335024" y="2633472"/>
-            <a:ext cx="182880" cy="182880"/>
-          </a:xfrm>
-          <a:prstGeom prst="ellipse">
-            <a:avLst/>
-          </a:prstGeom>
-          <a:solidFill>
-            <a:srgbClr val="5EA0C4"/>
-          </a:solidFill>
-          <a:ln/>
-        </p:spPr>
-      </p:sp>
-      <p:sp>
-        <p:nvSpPr>
-          <p:cNvPr id="5" name="Text 3"/>
-          <p:cNvSpPr/>
-          <p:nvPr/>
-        </p:nvSpPr>
-        <p:spPr>
-          <a:xfrm>
-            <a:off x="612648" y="2852928"/>
-            <a:ext cx="1627632" cy="365760"/>
+          <p:cNvPr id="8" name="Text 6"/>
+          <p:cNvSpPr/>
+          <p:nvPr/>
+        </p:nvSpPr>
+        <p:spPr>
+          <a:xfrm>
+            <a:off x="923544" y="3154680"/>
+            <a:ext cx="1099261" cy="320040"/>
           </a:xfrm>
           <a:prstGeom prst="rect">
             <a:avLst/>
@@ -1645,13 +1542,55 @@
           <a:bodyPr wrap="square" lIns="0" tIns="0" rIns="0" bIns="0" rtlCol="0" anchor="ctr"/>
           <a:lstStyle/>
           <a:p>
-            <a:pPr algn="ctr" indent="0" marL="0">
-              <a:buNone/>
-            </a:pPr>
-            <a:r>
-              <a:rPr lang="en-US" sz="1450" b="1" dirty="0">
-                <a:solidFill>
-                  <a:srgbClr val="132430"/>
+            <a:pPr indent="0" marL="0">
+              <a:buNone/>
+            </a:pPr>
+            <a:r>
+              <a:rPr lang="en-US" sz="1100" dirty="0">
+                <a:solidFill>
+                  <a:srgbClr val="FFFFFF"/>
+                </a:solidFill>
+                <a:latin typeface="Consolas" pitchFamily="34" charset="0"/>
+                <a:ea typeface="Consolas" pitchFamily="34" charset="-122"/>
+                <a:cs typeface="Consolas" pitchFamily="34" charset="-120"/>
+              </a:rPr>
+              <a:t>01</a:t>
+            </a:r>
+            <a:endParaRPr lang="en-US" sz="1100" dirty="0"/>
+          </a:p>
+        </p:txBody>
+      </p:sp>
+      <p:sp>
+        <p:nvSpPr>
+          <p:cNvPr id="9" name="Text 7"/>
+          <p:cNvSpPr/>
+          <p:nvPr/>
+        </p:nvSpPr>
+        <p:spPr>
+          <a:xfrm>
+            <a:off x="923544" y="3593592"/>
+            <a:ext cx="1099261" cy="868680"/>
+          </a:xfrm>
+          <a:prstGeom prst="rect">
+            <a:avLst/>
+          </a:prstGeom>
+          <a:noFill/>
+          <a:ln/>
+        </p:spPr>
+        <p:txBody>
+          <a:bodyPr wrap="square" lIns="0" tIns="0" rIns="0" bIns="0" rtlCol="0" anchor="t"/>
+          <a:lstStyle/>
+          <a:p>
+            <a:pPr indent="0" marL="0">
+              <a:lnSpc>
+                <a:spcPct val="96000"/>
+              </a:lnSpc>
+              <a:buNone/>
+            </a:pPr>
+            <a:r>
+              <a:rPr lang="en-US" sz="1300" b="1" dirty="0">
+                <a:solidFill>
+                  <a:srgbClr val="FFFFFF"/>
                 </a:solidFill>
                 <a:latin typeface="Calibri" pitchFamily="34" charset="0"/>
                 <a:ea typeface="Calibri" pitchFamily="34" charset="-122"/>
@@ -1659,38 +1598,38 @@
               </a:rPr>
               <a:t>Slope sensors</a:t>
             </a:r>
-            <a:endParaRPr lang="en-US" sz="1450" dirty="0"/>
-          </a:p>
-        </p:txBody>
-      </p:sp>
-      <p:sp>
-        <p:nvSpPr>
-          <p:cNvPr id="6" name="Text 4"/>
-          <p:cNvSpPr/>
-          <p:nvPr/>
-        </p:nvSpPr>
-        <p:spPr>
-          <a:xfrm>
-            <a:off x="640080" y="3200400"/>
-            <a:ext cx="1572768" cy="411480"/>
-          </a:xfrm>
-          <a:prstGeom prst="rect">
-            <a:avLst/>
-          </a:prstGeom>
-          <a:noFill/>
-          <a:ln/>
-        </p:spPr>
-        <p:txBody>
-          <a:bodyPr wrap="square" lIns="0" tIns="0" rIns="0" bIns="0" rtlCol="0" anchor="t"/>
-          <a:lstStyle/>
-          <a:p>
-            <a:pPr algn="ctr" indent="0" marL="0">
-              <a:buNone/>
-            </a:pPr>
-            <a:r>
-              <a:rPr lang="en-US" sz="1050" dirty="0">
-                <a:solidFill>
-                  <a:srgbClr val="567480"/>
+            <a:endParaRPr lang="en-US" sz="1300" dirty="0"/>
+          </a:p>
+        </p:txBody>
+      </p:sp>
+      <p:sp>
+        <p:nvSpPr>
+          <p:cNvPr id="10" name="Text 8"/>
+          <p:cNvSpPr/>
+          <p:nvPr/>
+        </p:nvSpPr>
+        <p:spPr>
+          <a:xfrm>
+            <a:off x="923544" y="4453128"/>
+            <a:ext cx="1099261" cy="365760"/>
+          </a:xfrm>
+          <a:prstGeom prst="rect">
+            <a:avLst/>
+          </a:prstGeom>
+          <a:noFill/>
+          <a:ln/>
+        </p:spPr>
+        <p:txBody>
+          <a:bodyPr wrap="square" lIns="0" tIns="0" rIns="0" bIns="0" rtlCol="0" anchor="ctr"/>
+          <a:lstStyle/>
+          <a:p>
+            <a:pPr indent="0" marL="0">
+              <a:buNone/>
+            </a:pPr>
+            <a:r>
+              <a:rPr lang="en-US" sz="900" dirty="0">
+                <a:solidFill>
+                  <a:srgbClr val="FFFFFF"/>
                 </a:solidFill>
                 <a:latin typeface="Calibri" pitchFamily="34" charset="0"/>
                 <a:ea typeface="Calibri" pitchFamily="34" charset="-122"/>
@@ -1698,56 +1637,52 @@
               </a:rPr>
               <a:t>10 · 2 slopes</a:t>
             </a:r>
-            <a:endParaRPr lang="en-US" sz="1050" dirty="0"/>
-          </a:p>
-        </p:txBody>
-      </p:sp>
-      <p:sp>
-        <p:nvSpPr>
-          <p:cNvPr id="7" name="Shape 5"/>
-          <p:cNvSpPr/>
-          <p:nvPr/>
-        </p:nvSpPr>
-        <p:spPr>
-          <a:xfrm>
-            <a:off x="2231136" y="3154680"/>
-            <a:ext cx="258409" cy="0"/>
-          </a:xfrm>
-          <a:prstGeom prst="line">
-            <a:avLst/>
-          </a:prstGeom>
-          <a:noFill/>
-          <a:ln w="25400">
-            <a:solidFill>
-              <a:srgbClr val="5EA0C4"/>
-            </a:solidFill>
-            <a:prstDash val="solid"/>
-            <a:tailEnd type="triangle"/>
-          </a:ln>
-        </p:spPr>
-      </p:sp>
-      <p:sp>
-        <p:nvSpPr>
-          <p:cNvPr id="8" name="Shape 6"/>
-          <p:cNvSpPr/>
-          <p:nvPr/>
-        </p:nvSpPr>
-        <p:spPr>
-          <a:xfrm>
-            <a:off x="2507833" y="2468880"/>
-            <a:ext cx="1572768" cy="1371600"/>
+            <a:endParaRPr lang="en-US" sz="900" dirty="0"/>
+          </a:p>
+        </p:txBody>
+      </p:sp>
+      <p:sp>
+        <p:nvSpPr>
+          <p:cNvPr id="11" name="Shape 9"/>
+          <p:cNvSpPr/>
+          <p:nvPr/>
+        </p:nvSpPr>
+        <p:spPr>
+          <a:xfrm>
+            <a:off x="2242261" y="3845052"/>
+            <a:ext cx="310896" cy="219456"/>
+          </a:xfrm>
+          <a:prstGeom prst="rightArrow">
+            <a:avLst/>
+          </a:prstGeom>
+          <a:solidFill>
+            <a:srgbClr val="5F6B74"/>
+          </a:solidFill>
+          <a:ln/>
+        </p:spPr>
+      </p:sp>
+      <p:sp>
+        <p:nvSpPr>
+          <p:cNvPr id="12" name="Shape 10"/>
+          <p:cNvSpPr/>
+          <p:nvPr/>
+        </p:nvSpPr>
+        <p:spPr>
+          <a:xfrm>
+            <a:off x="2626309" y="2971800"/>
+            <a:ext cx="1391869" cy="1965960"/>
           </a:xfrm>
           <a:prstGeom prst="roundRect">
             <a:avLst>
-              <a:gd name="adj" fmla="val 6667"/>
+              <a:gd name="adj" fmla="val 9197"/>
             </a:avLst>
           </a:prstGeom>
           <a:solidFill>
-            <a:srgbClr val="EDF4F9"/>
-          </a:solidFill>
-          <a:ln w="19050">
+            <a:srgbClr val="0B6FA8"/>
+          </a:solidFill>
+          <a:ln w="12700">
             <a:solidFill>
-              <a:srgbClr val="5EA0C4"/>
+              <a:srgbClr val="0B6FA8"/>
             </a:solidFill>
             <a:prstDash val="solid"/>
           </a:ln>
@@ -1755,34 +1690,14 @@
       </p:sp>
       <p:sp>
         <p:nvSpPr>
-          <p:cNvPr id="9" name="Shape 7"/>
-          <p:cNvSpPr/>
-          <p:nvPr/>
-        </p:nvSpPr>
-        <p:spPr>
-          <a:xfrm>
-            <a:off x="3202777" y="2633472"/>
-            <a:ext cx="182880" cy="182880"/>
-          </a:xfrm>
-          <a:prstGeom prst="ellipse">
-            <a:avLst/>
-          </a:prstGeom>
-          <a:solidFill>
-            <a:srgbClr val="5EA0C4"/>
-          </a:solidFill>
-          <a:ln/>
-        </p:spPr>
-      </p:sp>
-      <p:sp>
-        <p:nvSpPr>
-          <p:cNvPr id="10" name="Text 8"/>
-          <p:cNvSpPr/>
-          <p:nvPr/>
-        </p:nvSpPr>
-        <p:spPr>
-          <a:xfrm>
-            <a:off x="2480401" y="2852928"/>
-            <a:ext cx="1627632" cy="365760"/>
+          <p:cNvPr id="13" name="Text 11"/>
+          <p:cNvSpPr/>
+          <p:nvPr/>
+        </p:nvSpPr>
+        <p:spPr>
+          <a:xfrm>
+            <a:off x="2772613" y="3154680"/>
+            <a:ext cx="1099261" cy="320040"/>
           </a:xfrm>
           <a:prstGeom prst="rect">
             <a:avLst/>
@@ -1794,13 +1709,55 @@
           <a:bodyPr wrap="square" lIns="0" tIns="0" rIns="0" bIns="0" rtlCol="0" anchor="ctr"/>
           <a:lstStyle/>
           <a:p>
-            <a:pPr algn="ctr" indent="0" marL="0">
-              <a:buNone/>
-            </a:pPr>
-            <a:r>
-              <a:rPr lang="en-US" sz="1450" b="1" dirty="0">
-                <a:solidFill>
-                  <a:srgbClr val="132430"/>
+            <a:pPr indent="0" marL="0">
+              <a:buNone/>
+            </a:pPr>
+            <a:r>
+              <a:rPr lang="en-US" sz="1100" dirty="0">
+                <a:solidFill>
+                  <a:srgbClr val="FFFFFF"/>
+                </a:solidFill>
+                <a:latin typeface="Consolas" pitchFamily="34" charset="0"/>
+                <a:ea typeface="Consolas" pitchFamily="34" charset="-122"/>
+                <a:cs typeface="Consolas" pitchFamily="34" charset="-120"/>
+              </a:rPr>
+              <a:t>02</a:t>
+            </a:r>
+            <a:endParaRPr lang="en-US" sz="1100" dirty="0"/>
+          </a:p>
+        </p:txBody>
+      </p:sp>
+      <p:sp>
+        <p:nvSpPr>
+          <p:cNvPr id="14" name="Text 12"/>
+          <p:cNvSpPr/>
+          <p:nvPr/>
+        </p:nvSpPr>
+        <p:spPr>
+          <a:xfrm>
+            <a:off x="2772613" y="3593592"/>
+            <a:ext cx="1099261" cy="868680"/>
+          </a:xfrm>
+          <a:prstGeom prst="rect">
+            <a:avLst/>
+          </a:prstGeom>
+          <a:noFill/>
+          <a:ln/>
+        </p:spPr>
+        <p:txBody>
+          <a:bodyPr wrap="square" lIns="0" tIns="0" rIns="0" bIns="0" rtlCol="0" anchor="t"/>
+          <a:lstStyle/>
+          <a:p>
+            <a:pPr indent="0" marL="0">
+              <a:lnSpc>
+                <a:spcPct val="96000"/>
+              </a:lnSpc>
+              <a:buNone/>
+            </a:pPr>
+            <a:r>
+              <a:rPr lang="en-US" sz="1300" b="1" dirty="0">
+                <a:solidFill>
+                  <a:srgbClr val="FFFFFF"/>
                 </a:solidFill>
                 <a:latin typeface="Calibri" pitchFamily="34" charset="0"/>
                 <a:ea typeface="Calibri" pitchFamily="34" charset="-122"/>
@@ -1808,38 +1765,38 @@
               </a:rPr>
               <a:t>Fog node</a:t>
             </a:r>
-            <a:endParaRPr lang="en-US" sz="1450" dirty="0"/>
-          </a:p>
-        </p:txBody>
-      </p:sp>
-      <p:sp>
-        <p:nvSpPr>
-          <p:cNvPr id="11" name="Text 9"/>
-          <p:cNvSpPr/>
-          <p:nvPr/>
-        </p:nvSpPr>
-        <p:spPr>
-          <a:xfrm>
-            <a:off x="2507833" y="3200400"/>
-            <a:ext cx="1572768" cy="411480"/>
-          </a:xfrm>
-          <a:prstGeom prst="rect">
-            <a:avLst/>
-          </a:prstGeom>
-          <a:noFill/>
-          <a:ln/>
-        </p:spPr>
-        <p:txBody>
-          <a:bodyPr wrap="square" lIns="0" tIns="0" rIns="0" bIns="0" rtlCol="0" anchor="t"/>
-          <a:lstStyle/>
-          <a:p>
-            <a:pPr algn="ctr" indent="0" marL="0">
-              <a:buNone/>
-            </a:pPr>
-            <a:r>
-              <a:rPr lang="en-US" sz="1050" dirty="0">
-                <a:solidFill>
-                  <a:srgbClr val="567480"/>
+            <a:endParaRPr lang="en-US" sz="1300" dirty="0"/>
+          </a:p>
+        </p:txBody>
+      </p:sp>
+      <p:sp>
+        <p:nvSpPr>
+          <p:cNvPr id="15" name="Text 13"/>
+          <p:cNvSpPr/>
+          <p:nvPr/>
+        </p:nvSpPr>
+        <p:spPr>
+          <a:xfrm>
+            <a:off x="2772613" y="4453128"/>
+            <a:ext cx="1099261" cy="365760"/>
+          </a:xfrm>
+          <a:prstGeom prst="rect">
+            <a:avLst/>
+          </a:prstGeom>
+          <a:noFill/>
+          <a:ln/>
+        </p:spPr>
+        <p:txBody>
+          <a:bodyPr wrap="square" lIns="0" tIns="0" rIns="0" bIns="0" rtlCol="0" anchor="ctr"/>
+          <a:lstStyle/>
+          <a:p>
+            <a:pPr indent="0" marL="0">
+              <a:buNone/>
+            </a:pPr>
+            <a:r>
+              <a:rPr lang="en-US" sz="900" dirty="0">
+                <a:solidFill>
+                  <a:srgbClr val="FFFFFF"/>
                 </a:solidFill>
                 <a:latin typeface="Calibri" pitchFamily="34" charset="0"/>
                 <a:ea typeface="Calibri" pitchFamily="34" charset="-122"/>
@@ -1847,56 +1804,52 @@
               </a:rPr>
               <a:t>window · 4 rules</a:t>
             </a:r>
-            <a:endParaRPr lang="en-US" sz="1050" dirty="0"/>
-          </a:p>
-        </p:txBody>
-      </p:sp>
-      <p:sp>
-        <p:nvSpPr>
-          <p:cNvPr id="12" name="Shape 10"/>
-          <p:cNvSpPr/>
-          <p:nvPr/>
-        </p:nvSpPr>
-        <p:spPr>
-          <a:xfrm>
-            <a:off x="4098889" y="3154680"/>
-            <a:ext cx="258409" cy="0"/>
-          </a:xfrm>
-          <a:prstGeom prst="line">
-            <a:avLst/>
-          </a:prstGeom>
-          <a:noFill/>
-          <a:ln w="25400">
-            <a:solidFill>
-              <a:srgbClr val="5EA0C4"/>
-            </a:solidFill>
-            <a:prstDash val="solid"/>
-            <a:tailEnd type="triangle"/>
-          </a:ln>
-        </p:spPr>
-      </p:sp>
-      <p:sp>
-        <p:nvSpPr>
-          <p:cNvPr id="13" name="Shape 11"/>
-          <p:cNvSpPr/>
-          <p:nvPr/>
-        </p:nvSpPr>
-        <p:spPr>
-          <a:xfrm>
-            <a:off x="4375587" y="2468880"/>
-            <a:ext cx="1572768" cy="1371600"/>
+            <a:endParaRPr lang="en-US" sz="900" dirty="0"/>
+          </a:p>
+        </p:txBody>
+      </p:sp>
+      <p:sp>
+        <p:nvSpPr>
+          <p:cNvPr id="16" name="Shape 14"/>
+          <p:cNvSpPr/>
+          <p:nvPr/>
+        </p:nvSpPr>
+        <p:spPr>
+          <a:xfrm>
+            <a:off x="4091330" y="3845052"/>
+            <a:ext cx="310896" cy="219456"/>
+          </a:xfrm>
+          <a:prstGeom prst="rightArrow">
+            <a:avLst/>
+          </a:prstGeom>
+          <a:solidFill>
+            <a:srgbClr val="5F6B74"/>
+          </a:solidFill>
+          <a:ln/>
+        </p:spPr>
+      </p:sp>
+      <p:sp>
+        <p:nvSpPr>
+          <p:cNvPr id="17" name="Shape 15"/>
+          <p:cNvSpPr/>
+          <p:nvPr/>
+        </p:nvSpPr>
+        <p:spPr>
+          <a:xfrm>
+            <a:off x="4475378" y="2971800"/>
+            <a:ext cx="1391869" cy="1965960"/>
           </a:xfrm>
           <a:prstGeom prst="roundRect">
             <a:avLst>
-              <a:gd name="adj" fmla="val 6667"/>
+              <a:gd name="adj" fmla="val 9197"/>
             </a:avLst>
           </a:prstGeom>
           <a:solidFill>
-            <a:srgbClr val="EDF4F9"/>
-          </a:solidFill>
-          <a:ln w="19050">
+            <a:srgbClr val="FFFFFF"/>
+          </a:solidFill>
+          <a:ln w="12700">
             <a:solidFill>
-              <a:srgbClr val="1E5A82"/>
+              <a:srgbClr val="E4E6E9"/>
             </a:solidFill>
             <a:prstDash val="solid"/>
           </a:ln>
@@ -1904,34 +1857,14 @@
       </p:sp>
       <p:sp>
         <p:nvSpPr>
-          <p:cNvPr id="14" name="Shape 12"/>
-          <p:cNvSpPr/>
-          <p:nvPr/>
-        </p:nvSpPr>
-        <p:spPr>
-          <a:xfrm>
-            <a:off x="5070531" y="2633472"/>
-            <a:ext cx="182880" cy="182880"/>
-          </a:xfrm>
-          <a:prstGeom prst="ellipse">
-            <a:avLst/>
-          </a:prstGeom>
-          <a:solidFill>
-            <a:srgbClr val="1E5A82"/>
-          </a:solidFill>
-          <a:ln/>
-        </p:spPr>
-      </p:sp>
-      <p:sp>
-        <p:nvSpPr>
-          <p:cNvPr id="15" name="Text 13"/>
-          <p:cNvSpPr/>
-          <p:nvPr/>
-        </p:nvSpPr>
-        <p:spPr>
-          <a:xfrm>
-            <a:off x="4348155" y="2852928"/>
-            <a:ext cx="1627632" cy="365760"/>
+          <p:cNvPr id="18" name="Text 16"/>
+          <p:cNvSpPr/>
+          <p:nvPr/>
+        </p:nvSpPr>
+        <p:spPr>
+          <a:xfrm>
+            <a:off x="4621682" y="3154680"/>
+            <a:ext cx="1099261" cy="320040"/>
           </a:xfrm>
           <a:prstGeom prst="rect">
             <a:avLst/>
@@ -1943,13 +1876,55 @@
           <a:bodyPr wrap="square" lIns="0" tIns="0" rIns="0" bIns="0" rtlCol="0" anchor="ctr"/>
           <a:lstStyle/>
           <a:p>
-            <a:pPr algn="ctr" indent="0" marL="0">
-              <a:buNone/>
-            </a:pPr>
-            <a:r>
-              <a:rPr lang="en-US" sz="1450" b="1" dirty="0">
-                <a:solidFill>
-                  <a:srgbClr val="132430"/>
+            <a:pPr indent="0" marL="0">
+              <a:buNone/>
+            </a:pPr>
+            <a:r>
+              <a:rPr lang="en-US" sz="1100" dirty="0">
+                <a:solidFill>
+                  <a:srgbClr val="0B6FA8"/>
+                </a:solidFill>
+                <a:latin typeface="Consolas" pitchFamily="34" charset="0"/>
+                <a:ea typeface="Consolas" pitchFamily="34" charset="-122"/>
+                <a:cs typeface="Consolas" pitchFamily="34" charset="-120"/>
+              </a:rPr>
+              <a:t>03</a:t>
+            </a:r>
+            <a:endParaRPr lang="en-US" sz="1100" dirty="0"/>
+          </a:p>
+        </p:txBody>
+      </p:sp>
+      <p:sp>
+        <p:nvSpPr>
+          <p:cNvPr id="19" name="Text 17"/>
+          <p:cNvSpPr/>
+          <p:nvPr/>
+        </p:nvSpPr>
+        <p:spPr>
+          <a:xfrm>
+            <a:off x="4621682" y="3593592"/>
+            <a:ext cx="1099261" cy="868680"/>
+          </a:xfrm>
+          <a:prstGeom prst="rect">
+            <a:avLst/>
+          </a:prstGeom>
+          <a:noFill/>
+          <a:ln/>
+        </p:spPr>
+        <p:txBody>
+          <a:bodyPr wrap="square" lIns="0" tIns="0" rIns="0" bIns="0" rtlCol="0" anchor="t"/>
+          <a:lstStyle/>
+          <a:p>
+            <a:pPr indent="0" marL="0">
+              <a:lnSpc>
+                <a:spcPct val="96000"/>
+              </a:lnSpc>
+              <a:buNone/>
+            </a:pPr>
+            <a:r>
+              <a:rPr lang="en-US" sz="1300" b="1" dirty="0">
+                <a:solidFill>
+                  <a:srgbClr val="0F2C47"/>
                 </a:solidFill>
                 <a:latin typeface="Calibri" pitchFamily="34" charset="0"/>
                 <a:ea typeface="Calibri" pitchFamily="34" charset="-122"/>
@@ -1957,38 +1932,38 @@
               </a:rPr>
               <a:t>Amazon SQS</a:t>
             </a:r>
-            <a:endParaRPr lang="en-US" sz="1450" dirty="0"/>
-          </a:p>
-        </p:txBody>
-      </p:sp>
-      <p:sp>
-        <p:nvSpPr>
-          <p:cNvPr id="16" name="Text 14"/>
-          <p:cNvSpPr/>
-          <p:nvPr/>
-        </p:nvSpPr>
-        <p:spPr>
-          <a:xfrm>
-            <a:off x="4375587" y="3200400"/>
-            <a:ext cx="1572768" cy="411480"/>
-          </a:xfrm>
-          <a:prstGeom prst="rect">
-            <a:avLst/>
-          </a:prstGeom>
-          <a:noFill/>
-          <a:ln/>
-        </p:spPr>
-        <p:txBody>
-          <a:bodyPr wrap="square" lIns="0" tIns="0" rIns="0" bIns="0" rtlCol="0" anchor="t"/>
-          <a:lstStyle/>
-          <a:p>
-            <a:pPr algn="ctr" indent="0" marL="0">
-              <a:buNone/>
-            </a:pPr>
-            <a:r>
-              <a:rPr lang="en-US" sz="1050" dirty="0">
-                <a:solidFill>
-                  <a:srgbClr val="567480"/>
+            <a:endParaRPr lang="en-US" sz="1300" dirty="0"/>
+          </a:p>
+        </p:txBody>
+      </p:sp>
+      <p:sp>
+        <p:nvSpPr>
+          <p:cNvPr id="20" name="Text 18"/>
+          <p:cNvSpPr/>
+          <p:nvPr/>
+        </p:nvSpPr>
+        <p:spPr>
+          <a:xfrm>
+            <a:off x="4621682" y="4453128"/>
+            <a:ext cx="1099261" cy="365760"/>
+          </a:xfrm>
+          <a:prstGeom prst="rect">
+            <a:avLst/>
+          </a:prstGeom>
+          <a:noFill/>
+          <a:ln/>
+        </p:spPr>
+        <p:txBody>
+          <a:bodyPr wrap="square" lIns="0" tIns="0" rIns="0" bIns="0" rtlCol="0" anchor="ctr"/>
+          <a:lstStyle/>
+          <a:p>
+            <a:pPr indent="0" marL="0">
+              <a:buNone/>
+            </a:pPr>
+            <a:r>
+              <a:rPr lang="en-US" sz="900" dirty="0">
+                <a:solidFill>
+                  <a:srgbClr val="5F6B74"/>
                 </a:solidFill>
                 <a:latin typeface="Calibri" pitchFamily="34" charset="0"/>
                 <a:ea typeface="Calibri" pitchFamily="34" charset="-122"/>
@@ -1996,56 +1971,52 @@
               </a:rPr>
               <a:t>1 summary / window</a:t>
             </a:r>
-            <a:endParaRPr lang="en-US" sz="1050" dirty="0"/>
-          </a:p>
-        </p:txBody>
-      </p:sp>
-      <p:sp>
-        <p:nvSpPr>
-          <p:cNvPr id="17" name="Shape 15"/>
-          <p:cNvSpPr/>
-          <p:nvPr/>
-        </p:nvSpPr>
-        <p:spPr>
-          <a:xfrm>
-            <a:off x="5966643" y="3154680"/>
-            <a:ext cx="258409" cy="0"/>
-          </a:xfrm>
-          <a:prstGeom prst="line">
-            <a:avLst/>
-          </a:prstGeom>
-          <a:noFill/>
-          <a:ln w="25400">
-            <a:solidFill>
-              <a:srgbClr val="5EA0C4"/>
-            </a:solidFill>
-            <a:prstDash val="solid"/>
-            <a:tailEnd type="triangle"/>
-          </a:ln>
-        </p:spPr>
-      </p:sp>
-      <p:sp>
-        <p:nvSpPr>
-          <p:cNvPr id="18" name="Shape 16"/>
-          <p:cNvSpPr/>
-          <p:nvPr/>
-        </p:nvSpPr>
-        <p:spPr>
-          <a:xfrm>
-            <a:off x="6243340" y="2468880"/>
-            <a:ext cx="1572768" cy="1371600"/>
+            <a:endParaRPr lang="en-US" sz="900" dirty="0"/>
+          </a:p>
+        </p:txBody>
+      </p:sp>
+      <p:sp>
+        <p:nvSpPr>
+          <p:cNvPr id="21" name="Shape 19"/>
+          <p:cNvSpPr/>
+          <p:nvPr/>
+        </p:nvSpPr>
+        <p:spPr>
+          <a:xfrm>
+            <a:off x="5940400" y="3845052"/>
+            <a:ext cx="310896" cy="219456"/>
+          </a:xfrm>
+          <a:prstGeom prst="rightArrow">
+            <a:avLst/>
+          </a:prstGeom>
+          <a:solidFill>
+            <a:srgbClr val="5F6B74"/>
+          </a:solidFill>
+          <a:ln/>
+        </p:spPr>
+      </p:sp>
+      <p:sp>
+        <p:nvSpPr>
+          <p:cNvPr id="22" name="Shape 20"/>
+          <p:cNvSpPr/>
+          <p:nvPr/>
+        </p:nvSpPr>
+        <p:spPr>
+          <a:xfrm>
+            <a:off x="6324448" y="2971800"/>
+            <a:ext cx="1391869" cy="1965960"/>
           </a:xfrm>
           <a:prstGeom prst="roundRect">
             <a:avLst>
-              <a:gd name="adj" fmla="val 6667"/>
+              <a:gd name="adj" fmla="val 9197"/>
             </a:avLst>
           </a:prstGeom>
           <a:solidFill>
-            <a:srgbClr val="EDF4F9"/>
-          </a:solidFill>
-          <a:ln w="19050">
+            <a:srgbClr val="FFFFFF"/>
+          </a:solidFill>
+          <a:ln w="12700">
             <a:solidFill>
-              <a:srgbClr val="1E5A82"/>
+              <a:srgbClr val="E4E6E9"/>
             </a:solidFill>
             <a:prstDash val="solid"/>
           </a:ln>
@@ -2053,34 +2024,14 @@
       </p:sp>
       <p:sp>
         <p:nvSpPr>
-          <p:cNvPr id="19" name="Shape 17"/>
-          <p:cNvSpPr/>
-          <p:nvPr/>
-        </p:nvSpPr>
-        <p:spPr>
-          <a:xfrm>
-            <a:off x="6938284" y="2633472"/>
-            <a:ext cx="182880" cy="182880"/>
-          </a:xfrm>
-          <a:prstGeom prst="ellipse">
-            <a:avLst/>
-          </a:prstGeom>
-          <a:solidFill>
-            <a:srgbClr val="1E5A82"/>
-          </a:solidFill>
-          <a:ln/>
-        </p:spPr>
-      </p:sp>
-      <p:sp>
-        <p:nvSpPr>
-          <p:cNvPr id="20" name="Text 18"/>
-          <p:cNvSpPr/>
-          <p:nvPr/>
-        </p:nvSpPr>
-        <p:spPr>
-          <a:xfrm>
-            <a:off x="6215908" y="2852928"/>
-            <a:ext cx="1627632" cy="365760"/>
+          <p:cNvPr id="23" name="Text 21"/>
+          <p:cNvSpPr/>
+          <p:nvPr/>
+        </p:nvSpPr>
+        <p:spPr>
+          <a:xfrm>
+            <a:off x="6470752" y="3154680"/>
+            <a:ext cx="1099261" cy="320040"/>
           </a:xfrm>
           <a:prstGeom prst="rect">
             <a:avLst/>
@@ -2092,13 +2043,55 @@
           <a:bodyPr wrap="square" lIns="0" tIns="0" rIns="0" bIns="0" rtlCol="0" anchor="ctr"/>
           <a:lstStyle/>
           <a:p>
-            <a:pPr algn="ctr" indent="0" marL="0">
-              <a:buNone/>
-            </a:pPr>
-            <a:r>
-              <a:rPr lang="en-US" sz="1450" b="1" dirty="0">
-                <a:solidFill>
-                  <a:srgbClr val="132430"/>
+            <a:pPr indent="0" marL="0">
+              <a:buNone/>
+            </a:pPr>
+            <a:r>
+              <a:rPr lang="en-US" sz="1100" dirty="0">
+                <a:solidFill>
+                  <a:srgbClr val="0B6FA8"/>
+                </a:solidFill>
+                <a:latin typeface="Consolas" pitchFamily="34" charset="0"/>
+                <a:ea typeface="Consolas" pitchFamily="34" charset="-122"/>
+                <a:cs typeface="Consolas" pitchFamily="34" charset="-120"/>
+              </a:rPr>
+              <a:t>04</a:t>
+            </a:r>
+            <a:endParaRPr lang="en-US" sz="1100" dirty="0"/>
+          </a:p>
+        </p:txBody>
+      </p:sp>
+      <p:sp>
+        <p:nvSpPr>
+          <p:cNvPr id="24" name="Text 22"/>
+          <p:cNvSpPr/>
+          <p:nvPr/>
+        </p:nvSpPr>
+        <p:spPr>
+          <a:xfrm>
+            <a:off x="6470752" y="3593592"/>
+            <a:ext cx="1099261" cy="868680"/>
+          </a:xfrm>
+          <a:prstGeom prst="rect">
+            <a:avLst/>
+          </a:prstGeom>
+          <a:noFill/>
+          <a:ln/>
+        </p:spPr>
+        <p:txBody>
+          <a:bodyPr wrap="square" lIns="0" tIns="0" rIns="0" bIns="0" rtlCol="0" anchor="t"/>
+          <a:lstStyle/>
+          <a:p>
+            <a:pPr indent="0" marL="0">
+              <a:lnSpc>
+                <a:spcPct val="96000"/>
+              </a:lnSpc>
+              <a:buNone/>
+            </a:pPr>
+            <a:r>
+              <a:rPr lang="en-US" sz="1300" b="1" dirty="0">
+                <a:solidFill>
+                  <a:srgbClr val="0F2C47"/>
                 </a:solidFill>
                 <a:latin typeface="Calibri" pitchFamily="34" charset="0"/>
                 <a:ea typeface="Calibri" pitchFamily="34" charset="-122"/>
@@ -2106,38 +2099,38 @@
               </a:rPr>
               <a:t>AWS Lambda</a:t>
             </a:r>
-            <a:endParaRPr lang="en-US" sz="1450" dirty="0"/>
-          </a:p>
-        </p:txBody>
-      </p:sp>
-      <p:sp>
-        <p:nvSpPr>
-          <p:cNvPr id="21" name="Text 19"/>
-          <p:cNvSpPr/>
-          <p:nvPr/>
-        </p:nvSpPr>
-        <p:spPr>
-          <a:xfrm>
-            <a:off x="6243340" y="3200400"/>
-            <a:ext cx="1572768" cy="411480"/>
-          </a:xfrm>
-          <a:prstGeom prst="rect">
-            <a:avLst/>
-          </a:prstGeom>
-          <a:noFill/>
-          <a:ln/>
-        </p:spPr>
-        <p:txBody>
-          <a:bodyPr wrap="square" lIns="0" tIns="0" rIns="0" bIns="0" rtlCol="0" anchor="t"/>
-          <a:lstStyle/>
-          <a:p>
-            <a:pPr algn="ctr" indent="0" marL="0">
-              <a:buNone/>
-            </a:pPr>
-            <a:r>
-              <a:rPr lang="en-US" sz="1050" dirty="0">
-                <a:solidFill>
-                  <a:srgbClr val="567480"/>
+            <a:endParaRPr lang="en-US" sz="1300" dirty="0"/>
+          </a:p>
+        </p:txBody>
+      </p:sp>
+      <p:sp>
+        <p:nvSpPr>
+          <p:cNvPr id="25" name="Text 23"/>
+          <p:cNvSpPr/>
+          <p:nvPr/>
+        </p:nvSpPr>
+        <p:spPr>
+          <a:xfrm>
+            <a:off x="6470752" y="4453128"/>
+            <a:ext cx="1099261" cy="365760"/>
+          </a:xfrm>
+          <a:prstGeom prst="rect">
+            <a:avLst/>
+          </a:prstGeom>
+          <a:noFill/>
+          <a:ln/>
+        </p:spPr>
+        <p:txBody>
+          <a:bodyPr wrap="square" lIns="0" tIns="0" rIns="0" bIns="0" rtlCol="0" anchor="ctr"/>
+          <a:lstStyle/>
+          <a:p>
+            <a:pPr indent="0" marL="0">
+              <a:buNone/>
+            </a:pPr>
+            <a:r>
+              <a:rPr lang="en-US" sz="900" dirty="0">
+                <a:solidFill>
+                  <a:srgbClr val="5F6B74"/>
                 </a:solidFill>
                 <a:latin typeface="Calibri" pitchFamily="34" charset="0"/>
                 <a:ea typeface="Calibri" pitchFamily="34" charset="-122"/>
@@ -2145,56 +2138,52 @@
               </a:rPr>
               <a:t>nodejs20 ingest</a:t>
             </a:r>
-            <a:endParaRPr lang="en-US" sz="1050" dirty="0"/>
-          </a:p>
-        </p:txBody>
-      </p:sp>
-      <p:sp>
-        <p:nvSpPr>
-          <p:cNvPr id="22" name="Shape 20"/>
-          <p:cNvSpPr/>
-          <p:nvPr/>
-        </p:nvSpPr>
-        <p:spPr>
-          <a:xfrm>
-            <a:off x="7834396" y="3154680"/>
-            <a:ext cx="258409" cy="0"/>
-          </a:xfrm>
-          <a:prstGeom prst="line">
-            <a:avLst/>
-          </a:prstGeom>
-          <a:noFill/>
-          <a:ln w="25400">
-            <a:solidFill>
-              <a:srgbClr val="5EA0C4"/>
-            </a:solidFill>
-            <a:prstDash val="solid"/>
-            <a:tailEnd type="triangle"/>
-          </a:ln>
-        </p:spPr>
-      </p:sp>
-      <p:sp>
-        <p:nvSpPr>
-          <p:cNvPr id="23" name="Shape 21"/>
-          <p:cNvSpPr/>
-          <p:nvPr/>
-        </p:nvSpPr>
-        <p:spPr>
-          <a:xfrm>
-            <a:off x="8111094" y="2468880"/>
-            <a:ext cx="1572768" cy="1371600"/>
+            <a:endParaRPr lang="en-US" sz="900" dirty="0"/>
+          </a:p>
+        </p:txBody>
+      </p:sp>
+      <p:sp>
+        <p:nvSpPr>
+          <p:cNvPr id="26" name="Shape 24"/>
+          <p:cNvSpPr/>
+          <p:nvPr/>
+        </p:nvSpPr>
+        <p:spPr>
+          <a:xfrm>
+            <a:off x="7789469" y="3845052"/>
+            <a:ext cx="310896" cy="219456"/>
+          </a:xfrm>
+          <a:prstGeom prst="rightArrow">
+            <a:avLst/>
+          </a:prstGeom>
+          <a:solidFill>
+            <a:srgbClr val="5F6B74"/>
+          </a:solidFill>
+          <a:ln/>
+        </p:spPr>
+      </p:sp>
+      <p:sp>
+        <p:nvSpPr>
+          <p:cNvPr id="27" name="Shape 25"/>
+          <p:cNvSpPr/>
+          <p:nvPr/>
+        </p:nvSpPr>
+        <p:spPr>
+          <a:xfrm>
+            <a:off x="8173517" y="2971800"/>
+            <a:ext cx="1391869" cy="1965960"/>
           </a:xfrm>
           <a:prstGeom prst="roundRect">
             <a:avLst>
-              <a:gd name="adj" fmla="val 6667"/>
+              <a:gd name="adj" fmla="val 9197"/>
             </a:avLst>
           </a:prstGeom>
           <a:solidFill>
-            <a:srgbClr val="EDF4F9"/>
-          </a:solidFill>
-          <a:ln w="19050">
+            <a:srgbClr val="FFFFFF"/>
+          </a:solidFill>
+          <a:ln w="12700">
             <a:solidFill>
-              <a:srgbClr val="1E5A82"/>
+              <a:srgbClr val="E4E6E9"/>
             </a:solidFill>
             <a:prstDash val="solid"/>
           </a:ln>
@@ -2202,34 +2191,14 @@
       </p:sp>
       <p:sp>
         <p:nvSpPr>
-          <p:cNvPr id="24" name="Shape 22"/>
-          <p:cNvSpPr/>
-          <p:nvPr/>
-        </p:nvSpPr>
-        <p:spPr>
-          <a:xfrm>
-            <a:off x="8806038" y="2633472"/>
-            <a:ext cx="182880" cy="182880"/>
-          </a:xfrm>
-          <a:prstGeom prst="ellipse">
-            <a:avLst/>
-          </a:prstGeom>
-          <a:solidFill>
-            <a:srgbClr val="1E5A82"/>
-          </a:solidFill>
-          <a:ln/>
-        </p:spPr>
-      </p:sp>
-      <p:sp>
-        <p:nvSpPr>
-          <p:cNvPr id="25" name="Text 23"/>
-          <p:cNvSpPr/>
-          <p:nvPr/>
-        </p:nvSpPr>
-        <p:spPr>
-          <a:xfrm>
-            <a:off x="8083662" y="2852928"/>
-            <a:ext cx="1627632" cy="365760"/>
+          <p:cNvPr id="28" name="Text 26"/>
+          <p:cNvSpPr/>
+          <p:nvPr/>
+        </p:nvSpPr>
+        <p:spPr>
+          <a:xfrm>
+            <a:off x="8319821" y="3154680"/>
+            <a:ext cx="1099261" cy="320040"/>
           </a:xfrm>
           <a:prstGeom prst="rect">
             <a:avLst/>
@@ -2241,13 +2210,55 @@
           <a:bodyPr wrap="square" lIns="0" tIns="0" rIns="0" bIns="0" rtlCol="0" anchor="ctr"/>
           <a:lstStyle/>
           <a:p>
-            <a:pPr algn="ctr" indent="0" marL="0">
-              <a:buNone/>
-            </a:pPr>
-            <a:r>
-              <a:rPr lang="en-US" sz="1450" b="1" dirty="0">
-                <a:solidFill>
-                  <a:srgbClr val="132430"/>
+            <a:pPr indent="0" marL="0">
+              <a:buNone/>
+            </a:pPr>
+            <a:r>
+              <a:rPr lang="en-US" sz="1100" dirty="0">
+                <a:solidFill>
+                  <a:srgbClr val="0B6FA8"/>
+                </a:solidFill>
+                <a:latin typeface="Consolas" pitchFamily="34" charset="0"/>
+                <a:ea typeface="Consolas" pitchFamily="34" charset="-122"/>
+                <a:cs typeface="Consolas" pitchFamily="34" charset="-120"/>
+              </a:rPr>
+              <a:t>05</a:t>
+            </a:r>
+            <a:endParaRPr lang="en-US" sz="1100" dirty="0"/>
+          </a:p>
+        </p:txBody>
+      </p:sp>
+      <p:sp>
+        <p:nvSpPr>
+          <p:cNvPr id="29" name="Text 27"/>
+          <p:cNvSpPr/>
+          <p:nvPr/>
+        </p:nvSpPr>
+        <p:spPr>
+          <a:xfrm>
+            <a:off x="8319821" y="3593592"/>
+            <a:ext cx="1099261" cy="868680"/>
+          </a:xfrm>
+          <a:prstGeom prst="rect">
+            <a:avLst/>
+          </a:prstGeom>
+          <a:noFill/>
+          <a:ln/>
+        </p:spPr>
+        <p:txBody>
+          <a:bodyPr wrap="square" lIns="0" tIns="0" rIns="0" bIns="0" rtlCol="0" anchor="t"/>
+          <a:lstStyle/>
+          <a:p>
+            <a:pPr indent="0" marL="0">
+              <a:lnSpc>
+                <a:spcPct val="96000"/>
+              </a:lnSpc>
+              <a:buNone/>
+            </a:pPr>
+            <a:r>
+              <a:rPr lang="en-US" sz="1300" b="1" dirty="0">
+                <a:solidFill>
+                  <a:srgbClr val="0F2C47"/>
                 </a:solidFill>
                 <a:latin typeface="Calibri" pitchFamily="34" charset="0"/>
                 <a:ea typeface="Calibri" pitchFamily="34" charset="-122"/>
@@ -2255,38 +2266,38 @@
               </a:rPr>
               <a:t>DynamoDB</a:t>
             </a:r>
-            <a:endParaRPr lang="en-US" sz="1450" dirty="0"/>
-          </a:p>
-        </p:txBody>
-      </p:sp>
-      <p:sp>
-        <p:nvSpPr>
-          <p:cNvPr id="26" name="Text 24"/>
-          <p:cNvSpPr/>
-          <p:nvPr/>
-        </p:nvSpPr>
-        <p:spPr>
-          <a:xfrm>
-            <a:off x="8111094" y="3200400"/>
-            <a:ext cx="1572768" cy="411480"/>
-          </a:xfrm>
-          <a:prstGeom prst="rect">
-            <a:avLst/>
-          </a:prstGeom>
-          <a:noFill/>
-          <a:ln/>
-        </p:spPr>
-        <p:txBody>
-          <a:bodyPr wrap="square" lIns="0" tIns="0" rIns="0" bIns="0" rtlCol="0" anchor="t"/>
-          <a:lstStyle/>
-          <a:p>
-            <a:pPr algn="ctr" indent="0" marL="0">
-              <a:buNone/>
-            </a:pPr>
-            <a:r>
-              <a:rPr lang="en-US" sz="1050" dirty="0">
-                <a:solidFill>
-                  <a:srgbClr val="567480"/>
+            <a:endParaRPr lang="en-US" sz="1300" dirty="0"/>
+          </a:p>
+        </p:txBody>
+      </p:sp>
+      <p:sp>
+        <p:nvSpPr>
+          <p:cNvPr id="30" name="Text 28"/>
+          <p:cNvSpPr/>
+          <p:nvPr/>
+        </p:nvSpPr>
+        <p:spPr>
+          <a:xfrm>
+            <a:off x="8319821" y="4453128"/>
+            <a:ext cx="1099261" cy="365760"/>
+          </a:xfrm>
+          <a:prstGeom prst="rect">
+            <a:avLst/>
+          </a:prstGeom>
+          <a:noFill/>
+          <a:ln/>
+        </p:spPr>
+        <p:txBody>
+          <a:bodyPr wrap="square" lIns="0" tIns="0" rIns="0" bIns="0" rtlCol="0" anchor="ctr"/>
+          <a:lstStyle/>
+          <a:p>
+            <a:pPr indent="0" marL="0">
+              <a:buNone/>
+            </a:pPr>
+            <a:r>
+              <a:rPr lang="en-US" sz="900" dirty="0">
+                <a:solidFill>
+                  <a:srgbClr val="5F6B74"/>
                 </a:solidFill>
                 <a:latin typeface="Calibri" pitchFamily="34" charset="0"/>
                 <a:ea typeface="Calibri" pitchFamily="34" charset="-122"/>
@@ -2294,56 +2305,52 @@
               </a:rPr>
               <a:t>1 record / slope / window</a:t>
             </a:r>
-            <a:endParaRPr lang="en-US" sz="1050" dirty="0"/>
-          </a:p>
-        </p:txBody>
-      </p:sp>
-      <p:sp>
-        <p:nvSpPr>
-          <p:cNvPr id="27" name="Shape 25"/>
-          <p:cNvSpPr/>
-          <p:nvPr/>
-        </p:nvSpPr>
-        <p:spPr>
-          <a:xfrm>
-            <a:off x="9702150" y="3154680"/>
-            <a:ext cx="258409" cy="0"/>
-          </a:xfrm>
-          <a:prstGeom prst="line">
-            <a:avLst/>
-          </a:prstGeom>
-          <a:noFill/>
-          <a:ln w="25400">
-            <a:solidFill>
-              <a:srgbClr val="5EA0C4"/>
-            </a:solidFill>
-            <a:prstDash val="solid"/>
-            <a:tailEnd type="triangle"/>
-          </a:ln>
-        </p:spPr>
-      </p:sp>
-      <p:sp>
-        <p:nvSpPr>
-          <p:cNvPr id="28" name="Shape 26"/>
-          <p:cNvSpPr/>
-          <p:nvPr/>
-        </p:nvSpPr>
-        <p:spPr>
-          <a:xfrm>
-            <a:off x="9978847" y="2468880"/>
-            <a:ext cx="1572768" cy="1371600"/>
+            <a:endParaRPr lang="en-US" sz="900" dirty="0"/>
+          </a:p>
+        </p:txBody>
+      </p:sp>
+      <p:sp>
+        <p:nvSpPr>
+          <p:cNvPr id="31" name="Shape 29"/>
+          <p:cNvSpPr/>
+          <p:nvPr/>
+        </p:nvSpPr>
+        <p:spPr>
+          <a:xfrm>
+            <a:off x="9638538" y="3845052"/>
+            <a:ext cx="310896" cy="219456"/>
+          </a:xfrm>
+          <a:prstGeom prst="rightArrow">
+            <a:avLst/>
+          </a:prstGeom>
+          <a:solidFill>
+            <a:srgbClr val="5F6B74"/>
+          </a:solidFill>
+          <a:ln/>
+        </p:spPr>
+      </p:sp>
+      <p:sp>
+        <p:nvSpPr>
+          <p:cNvPr id="32" name="Shape 30"/>
+          <p:cNvSpPr/>
+          <p:nvPr/>
+        </p:nvSpPr>
+        <p:spPr>
+          <a:xfrm>
+            <a:off x="10022586" y="2971800"/>
+            <a:ext cx="1391869" cy="1965960"/>
           </a:xfrm>
           <a:prstGeom prst="roundRect">
             <a:avLst>
-              <a:gd name="adj" fmla="val 6667"/>
+              <a:gd name="adj" fmla="val 9197"/>
             </a:avLst>
           </a:prstGeom>
           <a:solidFill>
-            <a:srgbClr val="EDF4F9"/>
-          </a:solidFill>
-          <a:ln w="19050">
+            <a:srgbClr val="FFFFFF"/>
+          </a:solidFill>
+          <a:ln w="12700">
             <a:solidFill>
-              <a:srgbClr val="2E82AC"/>
+              <a:srgbClr val="E4E6E9"/>
             </a:solidFill>
             <a:prstDash val="solid"/>
           </a:ln>
@@ -2351,34 +2358,14 @@
       </p:sp>
       <p:sp>
         <p:nvSpPr>
-          <p:cNvPr id="29" name="Shape 27"/>
-          <p:cNvSpPr/>
-          <p:nvPr/>
-        </p:nvSpPr>
-        <p:spPr>
-          <a:xfrm>
-            <a:off x="10673791" y="2633472"/>
-            <a:ext cx="182880" cy="182880"/>
-          </a:xfrm>
-          <a:prstGeom prst="ellipse">
-            <a:avLst/>
-          </a:prstGeom>
-          <a:solidFill>
-            <a:srgbClr val="2E82AC"/>
-          </a:solidFill>
-          <a:ln/>
-        </p:spPr>
-      </p:sp>
-      <p:sp>
-        <p:nvSpPr>
-          <p:cNvPr id="30" name="Text 28"/>
-          <p:cNvSpPr/>
-          <p:nvPr/>
-        </p:nvSpPr>
-        <p:spPr>
-          <a:xfrm>
-            <a:off x="9951415" y="2852928"/>
-            <a:ext cx="1627632" cy="365760"/>
+          <p:cNvPr id="33" name="Text 31"/>
+          <p:cNvSpPr/>
+          <p:nvPr/>
+        </p:nvSpPr>
+        <p:spPr>
+          <a:xfrm>
+            <a:off x="10168890" y="3154680"/>
+            <a:ext cx="1099261" cy="320040"/>
           </a:xfrm>
           <a:prstGeom prst="rect">
             <a:avLst/>
@@ -2390,13 +2377,55 @@
           <a:bodyPr wrap="square" lIns="0" tIns="0" rIns="0" bIns="0" rtlCol="0" anchor="ctr"/>
           <a:lstStyle/>
           <a:p>
-            <a:pPr algn="ctr" indent="0" marL="0">
-              <a:buNone/>
-            </a:pPr>
-            <a:r>
-              <a:rPr lang="en-US" sz="1450" b="1" dirty="0">
-                <a:solidFill>
-                  <a:srgbClr val="132430"/>
+            <a:pPr indent="0" marL="0">
+              <a:buNone/>
+            </a:pPr>
+            <a:r>
+              <a:rPr lang="en-US" sz="1100" dirty="0">
+                <a:solidFill>
+                  <a:srgbClr val="0B6FA8"/>
+                </a:solidFill>
+                <a:latin typeface="Consolas" pitchFamily="34" charset="0"/>
+                <a:ea typeface="Consolas" pitchFamily="34" charset="-122"/>
+                <a:cs typeface="Consolas" pitchFamily="34" charset="-120"/>
+              </a:rPr>
+              <a:t>06</a:t>
+            </a:r>
+            <a:endParaRPr lang="en-US" sz="1100" dirty="0"/>
+          </a:p>
+        </p:txBody>
+      </p:sp>
+      <p:sp>
+        <p:nvSpPr>
+          <p:cNvPr id="34" name="Text 32"/>
+          <p:cNvSpPr/>
+          <p:nvPr/>
+        </p:nvSpPr>
+        <p:spPr>
+          <a:xfrm>
+            <a:off x="10168890" y="3593592"/>
+            <a:ext cx="1099261" cy="868680"/>
+          </a:xfrm>
+          <a:prstGeom prst="rect">
+            <a:avLst/>
+          </a:prstGeom>
+          <a:noFill/>
+          <a:ln/>
+        </p:spPr>
+        <p:txBody>
+          <a:bodyPr wrap="square" lIns="0" tIns="0" rIns="0" bIns="0" rtlCol="0" anchor="t"/>
+          <a:lstStyle/>
+          <a:p>
+            <a:pPr indent="0" marL="0">
+              <a:lnSpc>
+                <a:spcPct val="96000"/>
+              </a:lnSpc>
+              <a:buNone/>
+            </a:pPr>
+            <a:r>
+              <a:rPr lang="en-US" sz="1300" b="1" dirty="0">
+                <a:solidFill>
+                  <a:srgbClr val="0F2C47"/>
                 </a:solidFill>
                 <a:latin typeface="Calibri" pitchFamily="34" charset="0"/>
                 <a:ea typeface="Calibri" pitchFamily="34" charset="-122"/>
@@ -2404,38 +2433,38 @@
               </a:rPr>
               <a:t>API GW + S3</a:t>
             </a:r>
-            <a:endParaRPr lang="en-US" sz="1450" dirty="0"/>
-          </a:p>
-        </p:txBody>
-      </p:sp>
-      <p:sp>
-        <p:nvSpPr>
-          <p:cNvPr id="31" name="Text 29"/>
-          <p:cNvSpPr/>
-          <p:nvPr/>
-        </p:nvSpPr>
-        <p:spPr>
-          <a:xfrm>
-            <a:off x="9978847" y="3200400"/>
-            <a:ext cx="1572768" cy="411480"/>
-          </a:xfrm>
-          <a:prstGeom prst="rect">
-            <a:avLst/>
-          </a:prstGeom>
-          <a:noFill/>
-          <a:ln/>
-        </p:spPr>
-        <p:txBody>
-          <a:bodyPr wrap="square" lIns="0" tIns="0" rIns="0" bIns="0" rtlCol="0" anchor="t"/>
-          <a:lstStyle/>
-          <a:p>
-            <a:pPr algn="ctr" indent="0" marL="0">
-              <a:buNone/>
-            </a:pPr>
-            <a:r>
-              <a:rPr lang="en-US" sz="1050" dirty="0">
-                <a:solidFill>
-                  <a:srgbClr val="567480"/>
+            <a:endParaRPr lang="en-US" sz="1300" dirty="0"/>
+          </a:p>
+        </p:txBody>
+      </p:sp>
+      <p:sp>
+        <p:nvSpPr>
+          <p:cNvPr id="35" name="Text 33"/>
+          <p:cNvSpPr/>
+          <p:nvPr/>
+        </p:nvSpPr>
+        <p:spPr>
+          <a:xfrm>
+            <a:off x="10168890" y="4453128"/>
+            <a:ext cx="1099261" cy="365760"/>
+          </a:xfrm>
+          <a:prstGeom prst="rect">
+            <a:avLst/>
+          </a:prstGeom>
+          <a:noFill/>
+          <a:ln/>
+        </p:spPr>
+        <p:txBody>
+          <a:bodyPr wrap="square" lIns="0" tIns="0" rIns="0" bIns="0" rtlCol="0" anchor="ctr"/>
+          <a:lstStyle/>
+          <a:p>
+            <a:pPr indent="0" marL="0">
+              <a:buNone/>
+            </a:pPr>
+            <a:r>
+              <a:rPr lang="en-US" sz="900" dirty="0">
+                <a:solidFill>
+                  <a:srgbClr val="5F6B74"/>
                 </a:solidFill>
                 <a:latin typeface="Calibri" pitchFamily="34" charset="0"/>
                 <a:ea typeface="Calibri" pitchFamily="34" charset="-122"/>
@@ -2443,124 +2472,7 @@
               </a:rPr>
               <a:t>live dashboard</a:t>
             </a:r>
-            <a:endParaRPr lang="en-US" sz="1050" dirty="0"/>
-          </a:p>
-        </p:txBody>
-      </p:sp>
-      <p:sp>
-        <p:nvSpPr>
-          <p:cNvPr id="32" name="Text 30"/>
-          <p:cNvSpPr/>
-          <p:nvPr/>
-        </p:nvSpPr>
-        <p:spPr>
-          <a:xfrm>
-            <a:off x="640080" y="3977640"/>
-            <a:ext cx="3440521" cy="274320"/>
-          </a:xfrm>
-          <a:prstGeom prst="rect">
-            <a:avLst/>
-          </a:prstGeom>
-          <a:noFill/>
-          <a:ln/>
-        </p:spPr>
-        <p:txBody>
-          <a:bodyPr wrap="square" rtlCol="0" anchor="ctr"/>
-          <a:lstStyle/>
-          <a:p>
-            <a:pPr algn="ctr" indent="0" marL="0">
-              <a:buNone/>
-            </a:pPr>
-            <a:r>
-              <a:rPr lang="en-US" sz="1100" b="1" spc="200" kern="0" dirty="0">
-                <a:solidFill>
-                  <a:srgbClr val="5EA0C4"/>
-                </a:solidFill>
-                <a:latin typeface="Calibri" pitchFamily="34" charset="0"/>
-                <a:ea typeface="Calibri" pitchFamily="34" charset="-122"/>
-                <a:cs typeface="Calibri" pitchFamily="34" charset="-120"/>
-              </a:rPr>
-              <a:t>EDGE</a:t>
-            </a:r>
-            <a:endParaRPr lang="en-US" sz="1100" dirty="0"/>
-          </a:p>
-        </p:txBody>
-      </p:sp>
-      <p:sp>
-        <p:nvSpPr>
-          <p:cNvPr id="33" name="Text 31"/>
-          <p:cNvSpPr/>
-          <p:nvPr/>
-        </p:nvSpPr>
-        <p:spPr>
-          <a:xfrm>
-            <a:off x="4375587" y="3977640"/>
-            <a:ext cx="7176028" cy="274320"/>
-          </a:xfrm>
-          <a:prstGeom prst="rect">
-            <a:avLst/>
-          </a:prstGeom>
-          <a:noFill/>
-          <a:ln/>
-        </p:spPr>
-        <p:txBody>
-          <a:bodyPr wrap="square" rtlCol="0" anchor="ctr"/>
-          <a:lstStyle/>
-          <a:p>
-            <a:pPr algn="ctr" indent="0" marL="0">
-              <a:buNone/>
-            </a:pPr>
-            <a:r>
-              <a:rPr lang="en-US" sz="1100" b="1" spc="200" kern="0" dirty="0">
-                <a:solidFill>
-                  <a:srgbClr val="1E5A82"/>
-                </a:solidFill>
-                <a:latin typeface="Calibri" pitchFamily="34" charset="0"/>
-                <a:ea typeface="Calibri" pitchFamily="34" charset="-122"/>
-                <a:cs typeface="Calibri" pitchFamily="34" charset="-120"/>
-              </a:rPr>
-              <a:t>CLOUD</a:t>
-            </a:r>
-            <a:endParaRPr lang="en-US" sz="1100" dirty="0"/>
-          </a:p>
-        </p:txBody>
-      </p:sp>
-      <p:sp>
-        <p:nvSpPr>
-          <p:cNvPr id="34" name="Text 32"/>
-          <p:cNvSpPr/>
-          <p:nvPr/>
-        </p:nvSpPr>
-        <p:spPr>
-          <a:xfrm>
-            <a:off x="640080" y="5257800"/>
-            <a:ext cx="10972800" cy="731520"/>
-          </a:xfrm>
-          <a:prstGeom prst="rect">
-            <a:avLst/>
-          </a:prstGeom>
-          <a:noFill/>
-          <a:ln/>
-        </p:spPr>
-        <p:txBody>
-          <a:bodyPr wrap="square" rtlCol="0" anchor="ctr"/>
-          <a:lstStyle/>
-          <a:p>
-            <a:pPr algn="ctr" indent="0" marL="0">
-              <a:buNone/>
-            </a:pPr>
-            <a:r>
-              <a:rPr lang="en-US" sz="1500" i="1" dirty="0">
-                <a:solidFill>
-                  <a:srgbClr val="1E5A82"/>
-                </a:solidFill>
-                <a:latin typeface="Calibri" pitchFamily="34" charset="0"/>
-                <a:ea typeface="Calibri" pitchFamily="34" charset="-122"/>
-                <a:cs typeface="Calibri" pitchFamily="34" charset="-120"/>
-              </a:rPr>
-              <a:t>Raw readings never leave the mountain — only one compact summary per window travels to the cloud, with alerts already evaluated at the fog node.</a:t>
-            </a:r>
-            <a:endParaRPr lang="en-US" sz="1500" dirty="0"/>
+            <a:endParaRPr lang="en-US" sz="900" dirty="0"/>
           </a:p>
         </p:txBody>
       </p:sp>
@@ -2578,7 +2490,7 @@
     <p:bg>
       <p:bgPr>
         <a:solidFill>
-          <a:srgbClr val="FFFFFF"/>
+          <a:srgbClr val="EEF5FB"/>
         </a:solidFill>
       </p:bgPr>
     </p:bg>
@@ -2598,14 +2510,171 @@
       </p:grpSpPr>
       <p:sp>
         <p:nvSpPr>
-          <p:cNvPr id="2" name="Text 0"/>
-          <p:cNvSpPr/>
-          <p:nvPr/>
-        </p:nvSpPr>
-        <p:spPr>
-          <a:xfrm>
-            <a:off x="640080" y="457200"/>
-            <a:ext cx="7315200" cy="640080"/>
+          <p:cNvPr id="2" name="Shape 0"/>
+          <p:cNvSpPr/>
+          <p:nvPr/>
+        </p:nvSpPr>
+        <p:spPr>
+          <a:xfrm>
+            <a:off x="10682935" y="5349240"/>
+            <a:ext cx="3017520" cy="3017520"/>
+          </a:xfrm>
+          <a:prstGeom prst="ellipse">
+            <a:avLst/>
+          </a:prstGeom>
+          <a:solidFill>
+            <a:srgbClr val="0B6FA8"/>
+          </a:solidFill>
+          <a:ln/>
+        </p:spPr>
+      </p:sp>
+      <p:sp>
+        <p:nvSpPr>
+          <p:cNvPr id="3" name="Shape 1"/>
+          <p:cNvSpPr/>
+          <p:nvPr/>
+        </p:nvSpPr>
+        <p:spPr>
+          <a:xfrm>
+            <a:off x="11231575" y="5897880"/>
+            <a:ext cx="1920240" cy="1920240"/>
+          </a:xfrm>
+          <a:prstGeom prst="ellipse">
+            <a:avLst/>
+          </a:prstGeom>
+          <a:solidFill>
+            <a:srgbClr val="51B5EE"/>
+          </a:solidFill>
+          <a:ln/>
+        </p:spPr>
+      </p:sp>
+      <p:sp>
+        <p:nvSpPr>
+          <p:cNvPr id="4" name="Text 2"/>
+          <p:cNvSpPr/>
+          <p:nvPr/>
+        </p:nvSpPr>
+        <p:spPr>
+          <a:xfrm>
+            <a:off x="777240" y="731520"/>
+            <a:ext cx="914400" cy="640080"/>
+          </a:xfrm>
+          <a:prstGeom prst="rect">
+            <a:avLst/>
+          </a:prstGeom>
+          <a:noFill/>
+          <a:ln/>
+        </p:spPr>
+        <p:txBody>
+          <a:bodyPr wrap="square" lIns="0" tIns="0" rIns="0" bIns="0" rtlCol="0" anchor="ctr"/>
+          <a:lstStyle/>
+          <a:p>
+            <a:pPr indent="0" marL="0">
+              <a:buNone/>
+            </a:pPr>
+            <a:r>
+              <a:rPr lang="en-US" sz="3000" b="1" dirty="0">
+                <a:solidFill>
+                  <a:srgbClr val="0B6FA8"/>
+                </a:solidFill>
+                <a:latin typeface="Calibri" pitchFamily="34" charset="0"/>
+                <a:ea typeface="Calibri" pitchFamily="34" charset="-122"/>
+                <a:cs typeface="Calibri" pitchFamily="34" charset="-120"/>
+              </a:rPr>
+              <a:t>02</a:t>
+            </a:r>
+            <a:endParaRPr lang="en-US" sz="3000" dirty="0"/>
+          </a:p>
+        </p:txBody>
+      </p:sp>
+      <p:sp>
+        <p:nvSpPr>
+          <p:cNvPr id="5" name="Text 3"/>
+          <p:cNvSpPr/>
+          <p:nvPr/>
+        </p:nvSpPr>
+        <p:spPr>
+          <a:xfrm>
+            <a:off x="1645920" y="905256"/>
+            <a:ext cx="9768535" cy="274320"/>
+          </a:xfrm>
+          <a:prstGeom prst="rect">
+            <a:avLst/>
+          </a:prstGeom>
+          <a:noFill/>
+          <a:ln/>
+        </p:spPr>
+        <p:txBody>
+          <a:bodyPr wrap="square" lIns="0" tIns="0" rIns="0" bIns="0" rtlCol="0" anchor="ctr"/>
+          <a:lstStyle/>
+          <a:p>
+            <a:pPr indent="0" marL="0">
+              <a:buNone/>
+            </a:pPr>
+            <a:r>
+              <a:rPr lang="en-US" sz="1100" b="1" spc="200" kern="0" dirty="0">
+                <a:solidFill>
+                  <a:srgbClr val="5F6B74"/>
+                </a:solidFill>
+                <a:latin typeface="Calibri" pitchFamily="34" charset="0"/>
+                <a:ea typeface="Calibri" pitchFamily="34" charset="-122"/>
+                <a:cs typeface="Calibri" pitchFamily="34" charset="-120"/>
+              </a:rPr>
+              <a:t>LIVE DEMO</a:t>
+            </a:r>
+            <a:endParaRPr lang="en-US" sz="1100" dirty="0"/>
+          </a:p>
+        </p:txBody>
+      </p:sp>
+      <p:sp>
+        <p:nvSpPr>
+          <p:cNvPr id="6" name="Text 4"/>
+          <p:cNvSpPr/>
+          <p:nvPr/>
+        </p:nvSpPr>
+        <p:spPr>
+          <a:xfrm>
+            <a:off x="777240" y="1380744"/>
+            <a:ext cx="10637215" cy="640080"/>
+          </a:xfrm>
+          <a:prstGeom prst="rect">
+            <a:avLst/>
+          </a:prstGeom>
+          <a:noFill/>
+          <a:ln/>
+        </p:spPr>
+        <p:txBody>
+          <a:bodyPr wrap="square" lIns="0" tIns="0" rIns="0" bIns="0" rtlCol="0" anchor="ctr"/>
+          <a:lstStyle/>
+          <a:p>
+            <a:pPr indent="0" marL="0">
+              <a:buNone/>
+            </a:pPr>
+            <a:r>
+              <a:rPr lang="en-US" sz="2300" b="1" dirty="0">
+                <a:solidFill>
+                  <a:srgbClr val="0F2C47"/>
+                </a:solidFill>
+                <a:latin typeface="Calibri" pitchFamily="34" charset="0"/>
+                <a:ea typeface="Calibri" pitchFamily="34" charset="-122"/>
+                <a:cs typeface="Calibri" pitchFamily="34" charset="-120"/>
+              </a:rPr>
+              <a:t>See it running on AWS</a:t>
+            </a:r>
+            <a:endParaRPr lang="en-US" sz="2300" dirty="0"/>
+          </a:p>
+        </p:txBody>
+      </p:sp>
+      <p:sp>
+        <p:nvSpPr>
+          <p:cNvPr id="7" name="Text 5"/>
+          <p:cNvSpPr/>
+          <p:nvPr/>
+        </p:nvSpPr>
+        <p:spPr>
+          <a:xfrm>
+            <a:off x="777240" y="1901952"/>
+            <a:ext cx="10637215" cy="274320"/>
           </a:xfrm>
           <a:prstGeom prst="rect">
             <a:avLst/>
@@ -2621,48 +2690,9 @@
               <a:buNone/>
             </a:pPr>
             <a:r>
-              <a:rPr lang="en-US" sz="3000" b="1" dirty="0">
-                <a:solidFill>
-                  <a:srgbClr val="132430"/>
-                </a:solidFill>
-                <a:latin typeface="Bookman Old Style" pitchFamily="34" charset="0"/>
-                <a:ea typeface="Bookman Old Style" pitchFamily="34" charset="-122"/>
-                <a:cs typeface="Bookman Old Style" pitchFamily="34" charset="-120"/>
-              </a:rPr>
-              <a:t>Live Demo</a:t>
-            </a:r>
-            <a:endParaRPr lang="en-US" sz="3000" dirty="0"/>
-          </a:p>
-        </p:txBody>
-      </p:sp>
-      <p:sp>
-        <p:nvSpPr>
-          <p:cNvPr id="3" name="Text 1"/>
-          <p:cNvSpPr/>
-          <p:nvPr/>
-        </p:nvSpPr>
-        <p:spPr>
-          <a:xfrm>
-            <a:off x="658368" y="1143000"/>
-            <a:ext cx="10972800" cy="365760"/>
-          </a:xfrm>
-          <a:prstGeom prst="rect">
-            <a:avLst/>
-          </a:prstGeom>
-          <a:noFill/>
-          <a:ln/>
-        </p:spPr>
-        <p:txBody>
-          <a:bodyPr wrap="square" rtlCol="0" anchor="ctr"/>
-          <a:lstStyle/>
-          <a:p>
-            <a:pPr indent="0" marL="0">
-              <a:buNone/>
-            </a:pPr>
-            <a:r>
-              <a:rPr lang="en-US" sz="1400" dirty="0">
-                <a:solidFill>
-                  <a:srgbClr val="2E82AC"/>
+              <a:rPr lang="en-US" sz="1100" dirty="0">
+                <a:solidFill>
+                  <a:srgbClr val="0B6FA8"/>
                 </a:solidFill>
                 <a:latin typeface="Consolas" pitchFamily="34" charset="0"/>
                 <a:ea typeface="Consolas" pitchFamily="34" charset="-122"/>
@@ -2670,32 +2700,32 @@
               </a:rPr>
               <a:t>ska-frontend-475393590440.s3.us-east-1.amazonaws.com</a:t>
             </a:r>
-            <a:endParaRPr lang="en-US" sz="1400" dirty="0"/>
-          </a:p>
-        </p:txBody>
-      </p:sp>
-      <p:sp>
-        <p:nvSpPr>
-          <p:cNvPr id="4" name="Shape 2"/>
-          <p:cNvSpPr/>
-          <p:nvPr/>
-        </p:nvSpPr>
-        <p:spPr>
-          <a:xfrm>
-            <a:off x="640080" y="1874520"/>
-            <a:ext cx="3502152" cy="3977640"/>
+            <a:endParaRPr lang="en-US" sz="1100" dirty="0"/>
+          </a:p>
+        </p:txBody>
+      </p:sp>
+      <p:sp>
+        <p:nvSpPr>
+          <p:cNvPr id="8" name="Shape 6"/>
+          <p:cNvSpPr/>
+          <p:nvPr/>
+        </p:nvSpPr>
+        <p:spPr>
+          <a:xfrm>
+            <a:off x="777240" y="2514600"/>
+            <a:ext cx="3301898" cy="3566160"/>
           </a:xfrm>
           <a:prstGeom prst="roundRect">
             <a:avLst>
-              <a:gd name="adj" fmla="val 2611"/>
+              <a:gd name="adj" fmla="val 3877"/>
             </a:avLst>
           </a:prstGeom>
           <a:solidFill>
-            <a:srgbClr val="EDF4F9"/>
-          </a:solidFill>
-          <a:ln w="15240">
+            <a:srgbClr val="FFFFFF"/>
+          </a:solidFill>
+          <a:ln w="12700">
             <a:solidFill>
-              <a:srgbClr val="2E82AC"/>
+              <a:srgbClr val="E4E6E9"/>
             </a:solidFill>
             <a:prstDash val="solid"/>
           </a:ln>
@@ -2703,34 +2733,14 @@
       </p:sp>
       <p:sp>
         <p:nvSpPr>
-          <p:cNvPr id="5" name="Shape 3"/>
-          <p:cNvSpPr/>
-          <p:nvPr/>
-        </p:nvSpPr>
-        <p:spPr>
-          <a:xfrm>
-            <a:off x="914400" y="2148840"/>
-            <a:ext cx="603504" cy="603504"/>
-          </a:xfrm>
-          <a:prstGeom prst="ellipse">
-            <a:avLst/>
-          </a:prstGeom>
-          <a:solidFill>
-            <a:srgbClr val="1E5A82"/>
-          </a:solidFill>
-          <a:ln/>
-        </p:spPr>
-      </p:sp>
-      <p:sp>
-        <p:nvSpPr>
-          <p:cNvPr id="6" name="Text 4"/>
-          <p:cNvSpPr/>
-          <p:nvPr/>
-        </p:nvSpPr>
-        <p:spPr>
-          <a:xfrm>
-            <a:off x="914400" y="2148840"/>
-            <a:ext cx="603504" cy="603504"/>
+          <p:cNvPr id="9" name="Text 7"/>
+          <p:cNvSpPr/>
+          <p:nvPr/>
+        </p:nvSpPr>
+        <p:spPr>
+          <a:xfrm>
+            <a:off x="1051560" y="2752344"/>
+            <a:ext cx="1828800" cy="777240"/>
           </a:xfrm>
           <a:prstGeom prst="rect">
             <a:avLst/>
@@ -2742,127 +2752,130 @@
           <a:bodyPr wrap="square" lIns="0" tIns="0" rIns="0" bIns="0" rtlCol="0" anchor="ctr"/>
           <a:lstStyle/>
           <a:p>
-            <a:pPr algn="ctr" indent="0" marL="0">
-              <a:buNone/>
-            </a:pPr>
-            <a:r>
-              <a:rPr lang="en-US" sz="2200" b="1" dirty="0">
-                <a:solidFill>
-                  <a:srgbClr val="FFFFFF"/>
-                </a:solidFill>
-                <a:latin typeface="Bookman Old Style" pitchFamily="34" charset="0"/>
-                <a:ea typeface="Bookman Old Style" pitchFamily="34" charset="-122"/>
-                <a:cs typeface="Bookman Old Style" pitchFamily="34" charset="-120"/>
-              </a:rPr>
-              <a:t>1</a:t>
-            </a:r>
-            <a:endParaRPr lang="en-US" sz="2200" dirty="0"/>
-          </a:p>
-        </p:txBody>
-      </p:sp>
-      <p:sp>
-        <p:nvSpPr>
-          <p:cNvPr id="7" name="Text 5"/>
-          <p:cNvSpPr/>
-          <p:nvPr/>
-        </p:nvSpPr>
-        <p:spPr>
-          <a:xfrm>
-            <a:off x="914400" y="2898648"/>
-            <a:ext cx="2953512" cy="777240"/>
-          </a:xfrm>
-          <a:prstGeom prst="rect">
-            <a:avLst/>
-          </a:prstGeom>
-          <a:noFill/>
-          <a:ln/>
-        </p:spPr>
-        <p:txBody>
-          <a:bodyPr wrap="square" lIns="0" tIns="0" rIns="0" bIns="0" rtlCol="0" anchor="ctr"/>
-          <a:lstStyle/>
-          <a:p>
-            <a:pPr indent="0" marL="0">
-              <a:buNone/>
-            </a:pPr>
-            <a:r>
-              <a:rPr lang="en-US" sz="1600" b="1" dirty="0">
-                <a:solidFill>
-                  <a:srgbClr val="132430"/>
+            <a:pPr indent="0" marL="0">
+              <a:buNone/>
+            </a:pPr>
+            <a:r>
+              <a:rPr lang="en-US" sz="3800" b="1" dirty="0">
+                <a:solidFill>
+                  <a:srgbClr val="0B6FA8"/>
                 </a:solidFill>
                 <a:latin typeface="Calibri" pitchFamily="34" charset="0"/>
                 <a:ea typeface="Calibri" pitchFamily="34" charset="-122"/>
                 <a:cs typeface="Calibri" pitchFamily="34" charset="-120"/>
               </a:rPr>
-              <a:t>A live risk gauge per slope</a:t>
-            </a:r>
-            <a:endParaRPr lang="en-US" sz="1600" dirty="0"/>
-          </a:p>
-        </p:txBody>
-      </p:sp>
-      <p:sp>
-        <p:nvSpPr>
-          <p:cNvPr id="8" name="Text 6"/>
-          <p:cNvSpPr/>
-          <p:nvPr/>
-        </p:nvSpPr>
-        <p:spPr>
-          <a:xfrm>
-            <a:off x="914400" y="3657600"/>
-            <a:ext cx="2953512" cy="2011680"/>
-          </a:xfrm>
-          <a:prstGeom prst="rect">
-            <a:avLst/>
-          </a:prstGeom>
-          <a:noFill/>
-          <a:ln/>
-        </p:spPr>
-        <p:txBody>
-          <a:bodyPr wrap="square" lIns="0" tIns="0" rIns="0" bIns="0" rtlCol="0" anchor="ctr"/>
+              <a:t>01</a:t>
+            </a:r>
+            <a:endParaRPr lang="en-US" sz="3800" dirty="0"/>
+          </a:p>
+        </p:txBody>
+      </p:sp>
+      <p:sp>
+        <p:nvSpPr>
+          <p:cNvPr id="10" name="Text 8"/>
+          <p:cNvSpPr/>
+          <p:nvPr/>
+        </p:nvSpPr>
+        <p:spPr>
+          <a:xfrm>
+            <a:off x="1069848" y="3566160"/>
+            <a:ext cx="2753258" cy="868680"/>
+          </a:xfrm>
+          <a:prstGeom prst="rect">
+            <a:avLst/>
+          </a:prstGeom>
+          <a:noFill/>
+          <a:ln/>
+        </p:spPr>
+        <p:txBody>
+          <a:bodyPr wrap="square" lIns="0" tIns="0" rIns="0" bIns="0" rtlCol="0" anchor="t"/>
           <a:lstStyle/>
           <a:p>
             <a:pPr indent="0" marL="0">
               <a:lnSpc>
-                <a:spcPct val="106000"/>
+                <a:spcPct val="100000"/>
               </a:lnSpc>
               <a:buNone/>
             </a:pPr>
             <a:r>
-              <a:rPr lang="en-US" sz="1250" dirty="0">
-                <a:solidFill>
-                  <a:srgbClr val="567480"/>
+              <a:rPr lang="en-US" sz="1550" b="1" dirty="0">
+                <a:solidFill>
+                  <a:srgbClr val="0F2C47"/>
                 </a:solidFill>
                 <a:latin typeface="Calibri" pitchFamily="34" charset="0"/>
                 <a:ea typeface="Calibri" pitchFamily="34" charset="-122"/>
                 <a:cs typeface="Calibri" pitchFamily="34" charset="-120"/>
               </a:rPr>
+              <a:t>A live risk gauge per slope</a:t>
+            </a:r>
+            <a:endParaRPr lang="en-US" sz="1550" dirty="0"/>
+          </a:p>
+        </p:txBody>
+      </p:sp>
+      <p:sp>
+        <p:nvSpPr>
+          <p:cNvPr id="11" name="Text 9"/>
+          <p:cNvSpPr/>
+          <p:nvPr/>
+        </p:nvSpPr>
+        <p:spPr>
+          <a:xfrm>
+            <a:off x="1069848" y="4434840"/>
+            <a:ext cx="2753258" cy="1463040"/>
+          </a:xfrm>
+          <a:prstGeom prst="rect">
+            <a:avLst/>
+          </a:prstGeom>
+          <a:noFill/>
+          <a:ln/>
+        </p:spPr>
+        <p:txBody>
+          <a:bodyPr wrap="square" lIns="0" tIns="0" rIns="0" bIns="0" rtlCol="0" anchor="ctr"/>
+          <a:lstStyle/>
+          <a:p>
+            <a:pPr indent="0" marL="0">
+              <a:lnSpc>
+                <a:spcPct val="120000"/>
+              </a:lnSpc>
+              <a:buNone/>
+            </a:pPr>
+            <a:r>
+              <a:rPr lang="en-US" sz="1200" dirty="0">
+                <a:solidFill>
+                  <a:srgbClr val="5F6B74"/>
+                </a:solidFill>
+                <a:latin typeface="Calibri" pitchFamily="34" charset="0"/>
+                <a:ea typeface="Calibri" pitchFamily="34" charset="-122"/>
+                <a:cs typeface="Calibri" pitchFamily="34" charset="-120"/>
+              </a:rPr>
               <a:t>Snowpack, snow temperature, wind, seismic vibration and lift chairs feed a per-slope risk gauge, updated every window.</a:t>
             </a:r>
-            <a:endParaRPr lang="en-US" sz="1250" dirty="0"/>
-          </a:p>
-        </p:txBody>
-      </p:sp>
-      <p:sp>
-        <p:nvSpPr>
-          <p:cNvPr id="9" name="Shape 7"/>
-          <p:cNvSpPr/>
-          <p:nvPr/>
-        </p:nvSpPr>
-        <p:spPr>
-          <a:xfrm>
-            <a:off x="4416552" y="1874520"/>
-            <a:ext cx="3502152" cy="3977640"/>
+            <a:endParaRPr lang="en-US" sz="1200" dirty="0"/>
+          </a:p>
+        </p:txBody>
+      </p:sp>
+      <p:sp>
+        <p:nvSpPr>
+          <p:cNvPr id="12" name="Shape 10"/>
+          <p:cNvSpPr/>
+          <p:nvPr/>
+        </p:nvSpPr>
+        <p:spPr>
+          <a:xfrm>
+            <a:off x="4444898" y="2514600"/>
+            <a:ext cx="3301898" cy="3566160"/>
           </a:xfrm>
           <a:prstGeom prst="roundRect">
             <a:avLst>
-              <a:gd name="adj" fmla="val 2611"/>
+              <a:gd name="adj" fmla="val 3877"/>
             </a:avLst>
           </a:prstGeom>
           <a:solidFill>
-            <a:srgbClr val="EDF4F9"/>
-          </a:solidFill>
-          <a:ln w="15240">
+            <a:srgbClr val="FFFFFF"/>
+          </a:solidFill>
+          <a:ln w="12700">
             <a:solidFill>
-              <a:srgbClr val="2E82AC"/>
+              <a:srgbClr val="E4E6E9"/>
             </a:solidFill>
             <a:prstDash val="solid"/>
           </a:ln>
@@ -2870,34 +2883,14 @@
       </p:sp>
       <p:sp>
         <p:nvSpPr>
-          <p:cNvPr id="10" name="Shape 8"/>
-          <p:cNvSpPr/>
-          <p:nvPr/>
-        </p:nvSpPr>
-        <p:spPr>
-          <a:xfrm>
-            <a:off x="4690872" y="2148840"/>
-            <a:ext cx="603504" cy="603504"/>
-          </a:xfrm>
-          <a:prstGeom prst="ellipse">
-            <a:avLst/>
-          </a:prstGeom>
-          <a:solidFill>
-            <a:srgbClr val="1E5A82"/>
-          </a:solidFill>
-          <a:ln/>
-        </p:spPr>
-      </p:sp>
-      <p:sp>
-        <p:nvSpPr>
-          <p:cNvPr id="11" name="Text 9"/>
-          <p:cNvSpPr/>
-          <p:nvPr/>
-        </p:nvSpPr>
-        <p:spPr>
-          <a:xfrm>
-            <a:off x="4690872" y="2148840"/>
-            <a:ext cx="603504" cy="603504"/>
+          <p:cNvPr id="13" name="Text 11"/>
+          <p:cNvSpPr/>
+          <p:nvPr/>
+        </p:nvSpPr>
+        <p:spPr>
+          <a:xfrm>
+            <a:off x="4719218" y="2752344"/>
+            <a:ext cx="1828800" cy="777240"/>
           </a:xfrm>
           <a:prstGeom prst="rect">
             <a:avLst/>
@@ -2909,127 +2902,130 @@
           <a:bodyPr wrap="square" lIns="0" tIns="0" rIns="0" bIns="0" rtlCol="0" anchor="ctr"/>
           <a:lstStyle/>
           <a:p>
-            <a:pPr algn="ctr" indent="0" marL="0">
-              <a:buNone/>
-            </a:pPr>
-            <a:r>
-              <a:rPr lang="en-US" sz="2200" b="1" dirty="0">
-                <a:solidFill>
-                  <a:srgbClr val="FFFFFF"/>
-                </a:solidFill>
-                <a:latin typeface="Bookman Old Style" pitchFamily="34" charset="0"/>
-                <a:ea typeface="Bookman Old Style" pitchFamily="34" charset="-122"/>
-                <a:cs typeface="Bookman Old Style" pitchFamily="34" charset="-120"/>
-              </a:rPr>
-              <a:t>2</a:t>
-            </a:r>
-            <a:endParaRPr lang="en-US" sz="2200" dirty="0"/>
-          </a:p>
-        </p:txBody>
-      </p:sp>
-      <p:sp>
-        <p:nvSpPr>
-          <p:cNvPr id="12" name="Text 10"/>
-          <p:cNvSpPr/>
-          <p:nvPr/>
-        </p:nvSpPr>
-        <p:spPr>
-          <a:xfrm>
-            <a:off x="4690872" y="2898648"/>
-            <a:ext cx="2953512" cy="777240"/>
-          </a:xfrm>
-          <a:prstGeom prst="rect">
-            <a:avLst/>
-          </a:prstGeom>
-          <a:noFill/>
-          <a:ln/>
-        </p:spPr>
-        <p:txBody>
-          <a:bodyPr wrap="square" lIns="0" tIns="0" rIns="0" bIns="0" rtlCol="0" anchor="ctr"/>
-          <a:lstStyle/>
-          <a:p>
-            <a:pPr indent="0" marL="0">
-              <a:buNone/>
-            </a:pPr>
-            <a:r>
-              <a:rPr lang="en-US" sz="1600" b="1" dirty="0">
-                <a:solidFill>
-                  <a:srgbClr val="132430"/>
+            <a:pPr indent="0" marL="0">
+              <a:buNone/>
+            </a:pPr>
+            <a:r>
+              <a:rPr lang="en-US" sz="3800" b="1" dirty="0">
+                <a:solidFill>
+                  <a:srgbClr val="0B6FA8"/>
                 </a:solidFill>
                 <a:latin typeface="Calibri" pitchFamily="34" charset="0"/>
                 <a:ea typeface="Calibri" pitchFamily="34" charset="-122"/>
                 <a:cs typeface="Calibri" pitchFamily="34" charset="-120"/>
               </a:rPr>
-              <a:t>A lift-wind-halt alert on real data</a:t>
-            </a:r>
-            <a:endParaRPr lang="en-US" sz="1600" dirty="0"/>
-          </a:p>
-        </p:txBody>
-      </p:sp>
-      <p:sp>
-        <p:nvSpPr>
-          <p:cNvPr id="13" name="Text 11"/>
-          <p:cNvSpPr/>
-          <p:nvPr/>
-        </p:nvSpPr>
-        <p:spPr>
-          <a:xfrm>
-            <a:off x="4690872" y="3657600"/>
-            <a:ext cx="2953512" cy="2011680"/>
-          </a:xfrm>
-          <a:prstGeom prst="rect">
-            <a:avLst/>
-          </a:prstGeom>
-          <a:noFill/>
-          <a:ln/>
-        </p:spPr>
-        <p:txBody>
-          <a:bodyPr wrap="square" lIns="0" tIns="0" rIns="0" bIns="0" rtlCol="0" anchor="ctr"/>
+              <a:t>02</a:t>
+            </a:r>
+            <a:endParaRPr lang="en-US" sz="3800" dirty="0"/>
+          </a:p>
+        </p:txBody>
+      </p:sp>
+      <p:sp>
+        <p:nvSpPr>
+          <p:cNvPr id="14" name="Text 12"/>
+          <p:cNvSpPr/>
+          <p:nvPr/>
+        </p:nvSpPr>
+        <p:spPr>
+          <a:xfrm>
+            <a:off x="4737506" y="3566160"/>
+            <a:ext cx="2753258" cy="868680"/>
+          </a:xfrm>
+          <a:prstGeom prst="rect">
+            <a:avLst/>
+          </a:prstGeom>
+          <a:noFill/>
+          <a:ln/>
+        </p:spPr>
+        <p:txBody>
+          <a:bodyPr wrap="square" lIns="0" tIns="0" rIns="0" bIns="0" rtlCol="0" anchor="t"/>
           <a:lstStyle/>
           <a:p>
             <a:pPr indent="0" marL="0">
               <a:lnSpc>
-                <a:spcPct val="106000"/>
+                <a:spcPct val="100000"/>
               </a:lnSpc>
               <a:buNone/>
             </a:pPr>
             <a:r>
-              <a:rPr lang="en-US" sz="1250" dirty="0">
-                <a:solidFill>
-                  <a:srgbClr val="567480"/>
+              <a:rPr lang="en-US" sz="1550" b="1" dirty="0">
+                <a:solidFill>
+                  <a:srgbClr val="0F2C47"/>
                 </a:solidFill>
                 <a:latin typeface="Calibri" pitchFamily="34" charset="0"/>
                 <a:ea typeface="Calibri" pitchFamily="34" charset="-122"/>
                 <a:cs typeface="Calibri" pitchFamily="34" charset="-120"/>
               </a:rPr>
+              <a:t>A lift-wind-halt alert on real data</a:t>
+            </a:r>
+            <a:endParaRPr lang="en-US" sz="1550" dirty="0"/>
+          </a:p>
+        </p:txBody>
+      </p:sp>
+      <p:sp>
+        <p:nvSpPr>
+          <p:cNvPr id="15" name="Text 13"/>
+          <p:cNvSpPr/>
+          <p:nvPr/>
+        </p:nvSpPr>
+        <p:spPr>
+          <a:xfrm>
+            <a:off x="4737506" y="4434840"/>
+            <a:ext cx="2753258" cy="1463040"/>
+          </a:xfrm>
+          <a:prstGeom prst="rect">
+            <a:avLst/>
+          </a:prstGeom>
+          <a:noFill/>
+          <a:ln/>
+        </p:spPr>
+        <p:txBody>
+          <a:bodyPr wrap="square" lIns="0" tIns="0" rIns="0" bIns="0" rtlCol="0" anchor="ctr"/>
+          <a:lstStyle/>
+          <a:p>
+            <a:pPr indent="0" marL="0">
+              <a:lnSpc>
+                <a:spcPct val="120000"/>
+              </a:lnSpc>
+              <a:buNone/>
+            </a:pPr>
+            <a:r>
+              <a:rPr lang="en-US" sz="1200" dirty="0">
+                <a:solidFill>
+                  <a:srgbClr val="5F6B74"/>
+                </a:solidFill>
+                <a:latin typeface="Calibri" pitchFamily="34" charset="0"/>
+                <a:ea typeface="Calibri" pitchFamily="34" charset="-122"/>
+                <a:cs typeface="Calibri" pitchFamily="34" charset="-120"/>
+              </a:rPr>
               <a:t>Slope-a's gauge reads HIGH with wind at 111.8 km/h tripping the lift-wind-halt banner — no patrol involved.</a:t>
             </a:r>
-            <a:endParaRPr lang="en-US" sz="1250" dirty="0"/>
-          </a:p>
-        </p:txBody>
-      </p:sp>
-      <p:sp>
-        <p:nvSpPr>
-          <p:cNvPr id="14" name="Shape 12"/>
-          <p:cNvSpPr/>
-          <p:nvPr/>
-        </p:nvSpPr>
-        <p:spPr>
-          <a:xfrm>
-            <a:off x="8193024" y="1874520"/>
-            <a:ext cx="3502152" cy="3977640"/>
+            <a:endParaRPr lang="en-US" sz="1200" dirty="0"/>
+          </a:p>
+        </p:txBody>
+      </p:sp>
+      <p:sp>
+        <p:nvSpPr>
+          <p:cNvPr id="16" name="Shape 14"/>
+          <p:cNvSpPr/>
+          <p:nvPr/>
+        </p:nvSpPr>
+        <p:spPr>
+          <a:xfrm>
+            <a:off x="8112557" y="2514600"/>
+            <a:ext cx="3301898" cy="3566160"/>
           </a:xfrm>
           <a:prstGeom prst="roundRect">
             <a:avLst>
-              <a:gd name="adj" fmla="val 2611"/>
+              <a:gd name="adj" fmla="val 3877"/>
             </a:avLst>
           </a:prstGeom>
           <a:solidFill>
-            <a:srgbClr val="EDF4F9"/>
-          </a:solidFill>
-          <a:ln w="15240">
+            <a:srgbClr val="FFFFFF"/>
+          </a:solidFill>
+          <a:ln w="12700">
             <a:solidFill>
-              <a:srgbClr val="2E82AC"/>
+              <a:srgbClr val="E4E6E9"/>
             </a:solidFill>
             <a:prstDash val="solid"/>
           </a:ln>
@@ -3037,34 +3033,14 @@
       </p:sp>
       <p:sp>
         <p:nvSpPr>
-          <p:cNvPr id="15" name="Shape 13"/>
-          <p:cNvSpPr/>
-          <p:nvPr/>
-        </p:nvSpPr>
-        <p:spPr>
-          <a:xfrm>
-            <a:off x="8467344" y="2148840"/>
-            <a:ext cx="603504" cy="603504"/>
-          </a:xfrm>
-          <a:prstGeom prst="ellipse">
-            <a:avLst/>
-          </a:prstGeom>
-          <a:solidFill>
-            <a:srgbClr val="1E5A82"/>
-          </a:solidFill>
-          <a:ln/>
-        </p:spPr>
-      </p:sp>
-      <p:sp>
-        <p:nvSpPr>
-          <p:cNvPr id="16" name="Text 14"/>
-          <p:cNvSpPr/>
-          <p:nvPr/>
-        </p:nvSpPr>
-        <p:spPr>
-          <a:xfrm>
-            <a:off x="8467344" y="2148840"/>
-            <a:ext cx="603504" cy="603504"/>
+          <p:cNvPr id="17" name="Text 15"/>
+          <p:cNvSpPr/>
+          <p:nvPr/>
+        </p:nvSpPr>
+        <p:spPr>
+          <a:xfrm>
+            <a:off x="8386877" y="2752344"/>
+            <a:ext cx="1828800" cy="777240"/>
           </a:xfrm>
           <a:prstGeom prst="rect">
             <a:avLst/>
@@ -3076,60 +3052,21 @@
           <a:bodyPr wrap="square" lIns="0" tIns="0" rIns="0" bIns="0" rtlCol="0" anchor="ctr"/>
           <a:lstStyle/>
           <a:p>
-            <a:pPr algn="ctr" indent="0" marL="0">
-              <a:buNone/>
-            </a:pPr>
-            <a:r>
-              <a:rPr lang="en-US" sz="2200" b="1" dirty="0">
-                <a:solidFill>
-                  <a:srgbClr val="FFFFFF"/>
-                </a:solidFill>
-                <a:latin typeface="Bookman Old Style" pitchFamily="34" charset="0"/>
-                <a:ea typeface="Bookman Old Style" pitchFamily="34" charset="-122"/>
-                <a:cs typeface="Bookman Old Style" pitchFamily="34" charset="-120"/>
-              </a:rPr>
-              <a:t>3</a:t>
-            </a:r>
-            <a:endParaRPr lang="en-US" sz="2200" dirty="0"/>
-          </a:p>
-        </p:txBody>
-      </p:sp>
-      <p:sp>
-        <p:nvSpPr>
-          <p:cNvPr id="17" name="Text 15"/>
-          <p:cNvSpPr/>
-          <p:nvPr/>
-        </p:nvSpPr>
-        <p:spPr>
-          <a:xfrm>
-            <a:off x="8467344" y="2898648"/>
-            <a:ext cx="2953512" cy="777240"/>
-          </a:xfrm>
-          <a:prstGeom prst="rect">
-            <a:avLst/>
-          </a:prstGeom>
-          <a:noFill/>
-          <a:ln/>
-        </p:spPr>
-        <p:txBody>
-          <a:bodyPr wrap="square" lIns="0" tIns="0" rIns="0" bIns="0" rtlCol="0" anchor="ctr"/>
-          <a:lstStyle/>
-          <a:p>
-            <a:pPr indent="0" marL="0">
-              <a:buNone/>
-            </a:pPr>
-            <a:r>
-              <a:rPr lang="en-US" sz="1600" b="1" dirty="0">
-                <a:solidFill>
-                  <a:srgbClr val="132430"/>
+            <a:pPr indent="0" marL="0">
+              <a:buNone/>
+            </a:pPr>
+            <a:r>
+              <a:rPr lang="en-US" sz="3800" b="1" dirty="0">
+                <a:solidFill>
+                  <a:srgbClr val="0B6FA8"/>
                 </a:solidFill>
                 <a:latin typeface="Calibri" pitchFamily="34" charset="0"/>
                 <a:ea typeface="Calibri" pitchFamily="34" charset="-122"/>
                 <a:cs typeface="Calibri" pitchFamily="34" charset="-120"/>
               </a:rPr>
-              <a:t>Filling live before your eyes</a:t>
-            </a:r>
-            <a:endParaRPr lang="en-US" sz="1600" dirty="0"/>
+              <a:t>03</a:t>
+            </a:r>
+            <a:endParaRPr lang="en-US" sz="3800" dirty="0"/>
           </a:p>
         </p:txBody>
       </p:sp>
@@ -3141,37 +3078,79 @@
         </p:nvSpPr>
         <p:spPr>
           <a:xfrm>
-            <a:off x="8467344" y="3657600"/>
-            <a:ext cx="2953512" cy="2011680"/>
-          </a:xfrm>
-          <a:prstGeom prst="rect">
-            <a:avLst/>
-          </a:prstGeom>
-          <a:noFill/>
-          <a:ln/>
-        </p:spPr>
-        <p:txBody>
-          <a:bodyPr wrap="square" lIns="0" tIns="0" rIns="0" bIns="0" rtlCol="0" anchor="ctr"/>
+            <a:off x="8405165" y="3566160"/>
+            <a:ext cx="2753258" cy="868680"/>
+          </a:xfrm>
+          <a:prstGeom prst="rect">
+            <a:avLst/>
+          </a:prstGeom>
+          <a:noFill/>
+          <a:ln/>
+        </p:spPr>
+        <p:txBody>
+          <a:bodyPr wrap="square" lIns="0" tIns="0" rIns="0" bIns="0" rtlCol="0" anchor="t"/>
           <a:lstStyle/>
           <a:p>
             <a:pPr indent="0" marL="0">
               <a:lnSpc>
-                <a:spcPct val="106000"/>
+                <a:spcPct val="100000"/>
               </a:lnSpc>
               <a:buNone/>
             </a:pPr>
             <a:r>
-              <a:rPr lang="en-US" sz="1250" dirty="0">
-                <a:solidFill>
-                  <a:srgbClr val="567480"/>
+              <a:rPr lang="en-US" sz="1550" b="1" dirty="0">
+                <a:solidFill>
+                  <a:srgbClr val="0F2C47"/>
                 </a:solidFill>
                 <a:latin typeface="Calibri" pitchFamily="34" charset="0"/>
                 <a:ea typeface="Calibri" pitchFamily="34" charset="-122"/>
                 <a:cs typeface="Calibri" pitchFamily="34" charset="-120"/>
               </a:rPr>
+              <a:t>Filling live before your eyes</a:t>
+            </a:r>
+            <a:endParaRPr lang="en-US" sz="1550" dirty="0"/>
+          </a:p>
+        </p:txBody>
+      </p:sp>
+      <p:sp>
+        <p:nvSpPr>
+          <p:cNvPr id="19" name="Text 17"/>
+          <p:cNvSpPr/>
+          <p:nvPr/>
+        </p:nvSpPr>
+        <p:spPr>
+          <a:xfrm>
+            <a:off x="8405165" y="4434840"/>
+            <a:ext cx="2753258" cy="1463040"/>
+          </a:xfrm>
+          <a:prstGeom prst="rect">
+            <a:avLst/>
+          </a:prstGeom>
+          <a:noFill/>
+          <a:ln/>
+        </p:spPr>
+        <p:txBody>
+          <a:bodyPr wrap="square" lIns="0" tIns="0" rIns="0" bIns="0" rtlCol="0" anchor="ctr"/>
+          <a:lstStyle/>
+          <a:p>
+            <a:pPr indent="0" marL="0">
+              <a:lnSpc>
+                <a:spcPct val="120000"/>
+              </a:lnSpc>
+              <a:buNone/>
+            </a:pPr>
+            <a:r>
+              <a:rPr lang="en-US" sz="1200" dirty="0">
+                <a:solidFill>
+                  <a:srgbClr val="5F6B74"/>
+                </a:solidFill>
+                <a:latin typeface="Calibri" pitchFamily="34" charset="0"/>
+                <a:ea typeface="Calibri" pitchFamily="34" charset="-122"/>
+                <a:cs typeface="Calibri" pitchFamily="34" charset="-120"/>
+              </a:rPr>
               <a:t>The store climbs 0 to 569 records in about ninety seconds and keeps rising, so the board is genuinely live.</a:t>
             </a:r>
-            <a:endParaRPr lang="en-US" sz="1250" dirty="0"/>
+            <a:endParaRPr lang="en-US" sz="1200" dirty="0"/>
           </a:p>
         </p:txBody>
       </p:sp>
@@ -3189,7 +3168,7 @@
     <p:bg>
       <p:bgPr>
         <a:solidFill>
-          <a:srgbClr val="FFFFFF"/>
+          <a:srgbClr val="EEF5FB"/>
         </a:solidFill>
       </p:bgPr>
     </p:bg>
@@ -3209,42 +3188,23 @@
       </p:grpSpPr>
       <p:sp>
         <p:nvSpPr>
-          <p:cNvPr id="2" name="Text 0"/>
-          <p:cNvSpPr/>
-          <p:nvPr/>
-        </p:nvSpPr>
-        <p:spPr>
-          <a:xfrm>
-            <a:off x="640080" y="502920"/>
-            <a:ext cx="10972800" cy="822960"/>
-          </a:xfrm>
-          <a:prstGeom prst="rect">
-            <a:avLst/>
-          </a:prstGeom>
-          <a:noFill/>
-          <a:ln/>
-        </p:spPr>
-        <p:txBody>
-          <a:bodyPr wrap="square" rtlCol="0" anchor="t"/>
-          <a:lstStyle/>
-          <a:p>
-            <a:pPr indent="0" marL="0">
-              <a:buNone/>
-            </a:pPr>
-            <a:r>
-              <a:rPr lang="en-US" sz="2800" b="1" dirty="0">
-                <a:solidFill>
-                  <a:srgbClr val="132430"/>
-                </a:solidFill>
-                <a:latin typeface="Bookman Old Style" pitchFamily="34" charset="0"/>
-                <a:ea typeface="Bookman Old Style" pitchFamily="34" charset="-122"/>
-                <a:cs typeface="Bookman Old Style" pitchFamily="34" charset="-120"/>
-              </a:rPr>
-              <a:t>Hardest Part — the dashboard that lied</a:t>
-            </a:r>
-            <a:endParaRPr lang="en-US" sz="2800" dirty="0"/>
-          </a:p>
-        </p:txBody>
+          <p:cNvPr id="2" name="Shape 0"/>
+          <p:cNvSpPr/>
+          <p:nvPr/>
+        </p:nvSpPr>
+        <p:spPr>
+          <a:xfrm>
+            <a:off x="10682935" y="5349240"/>
+            <a:ext cx="3017520" cy="3017520"/>
+          </a:xfrm>
+          <a:prstGeom prst="ellipse">
+            <a:avLst/>
+          </a:prstGeom>
+          <a:solidFill>
+            <a:srgbClr val="0B6FA8"/>
+          </a:solidFill>
+          <a:ln/>
+        </p:spPr>
       </p:sp>
       <p:sp>
         <p:nvSpPr>
@@ -3254,20 +3214,157 @@
         </p:nvSpPr>
         <p:spPr>
           <a:xfrm>
-            <a:off x="640080" y="1874520"/>
-            <a:ext cx="4937760" cy="4160520"/>
+            <a:off x="11231575" y="5897880"/>
+            <a:ext cx="1920240" cy="1920240"/>
+          </a:xfrm>
+          <a:prstGeom prst="ellipse">
+            <a:avLst/>
+          </a:prstGeom>
+          <a:solidFill>
+            <a:srgbClr val="51B5EE"/>
+          </a:solidFill>
+          <a:ln/>
+        </p:spPr>
+      </p:sp>
+      <p:sp>
+        <p:nvSpPr>
+          <p:cNvPr id="4" name="Text 2"/>
+          <p:cNvSpPr/>
+          <p:nvPr/>
+        </p:nvSpPr>
+        <p:spPr>
+          <a:xfrm>
+            <a:off x="777240" y="731520"/>
+            <a:ext cx="914400" cy="640080"/>
+          </a:xfrm>
+          <a:prstGeom prst="rect">
+            <a:avLst/>
+          </a:prstGeom>
+          <a:noFill/>
+          <a:ln/>
+        </p:spPr>
+        <p:txBody>
+          <a:bodyPr wrap="square" lIns="0" tIns="0" rIns="0" bIns="0" rtlCol="0" anchor="ctr"/>
+          <a:lstStyle/>
+          <a:p>
+            <a:pPr indent="0" marL="0">
+              <a:buNone/>
+            </a:pPr>
+            <a:r>
+              <a:rPr lang="en-US" sz="3000" b="1" dirty="0">
+                <a:solidFill>
+                  <a:srgbClr val="0B6FA8"/>
+                </a:solidFill>
+                <a:latin typeface="Calibri" pitchFamily="34" charset="0"/>
+                <a:ea typeface="Calibri" pitchFamily="34" charset="-122"/>
+                <a:cs typeface="Calibri" pitchFamily="34" charset="-120"/>
+              </a:rPr>
+              <a:t>03</a:t>
+            </a:r>
+            <a:endParaRPr lang="en-US" sz="3000" dirty="0"/>
+          </a:p>
+        </p:txBody>
+      </p:sp>
+      <p:sp>
+        <p:nvSpPr>
+          <p:cNvPr id="5" name="Text 3"/>
+          <p:cNvSpPr/>
+          <p:nvPr/>
+        </p:nvSpPr>
+        <p:spPr>
+          <a:xfrm>
+            <a:off x="1645920" y="905256"/>
+            <a:ext cx="9768535" cy="274320"/>
+          </a:xfrm>
+          <a:prstGeom prst="rect">
+            <a:avLst/>
+          </a:prstGeom>
+          <a:noFill/>
+          <a:ln/>
+        </p:spPr>
+        <p:txBody>
+          <a:bodyPr wrap="square" lIns="0" tIns="0" rIns="0" bIns="0" rtlCol="0" anchor="ctr"/>
+          <a:lstStyle/>
+          <a:p>
+            <a:pPr indent="0" marL="0">
+              <a:buNone/>
+            </a:pPr>
+            <a:r>
+              <a:rPr lang="en-US" sz="1100" b="1" spc="200" kern="0" dirty="0">
+                <a:solidFill>
+                  <a:srgbClr val="5F6B74"/>
+                </a:solidFill>
+                <a:latin typeface="Calibri" pitchFamily="34" charset="0"/>
+                <a:ea typeface="Calibri" pitchFamily="34" charset="-122"/>
+                <a:cs typeface="Calibri" pitchFamily="34" charset="-120"/>
+              </a:rPr>
+              <a:t>CHALLENGE</a:t>
+            </a:r>
+            <a:endParaRPr lang="en-US" sz="1100" dirty="0"/>
+          </a:p>
+        </p:txBody>
+      </p:sp>
+      <p:sp>
+        <p:nvSpPr>
+          <p:cNvPr id="6" name="Text 4"/>
+          <p:cNvSpPr/>
+          <p:nvPr/>
+        </p:nvSpPr>
+        <p:spPr>
+          <a:xfrm>
+            <a:off x="777240" y="1380744"/>
+            <a:ext cx="10637215" cy="640080"/>
+          </a:xfrm>
+          <a:prstGeom prst="rect">
+            <a:avLst/>
+          </a:prstGeom>
+          <a:noFill/>
+          <a:ln/>
+        </p:spPr>
+        <p:txBody>
+          <a:bodyPr wrap="square" lIns="0" tIns="0" rIns="0" bIns="0" rtlCol="0" anchor="ctr"/>
+          <a:lstStyle/>
+          <a:p>
+            <a:pPr indent="0" marL="0">
+              <a:buNone/>
+            </a:pPr>
+            <a:r>
+              <a:rPr lang="en-US" sz="2300" b="1" dirty="0">
+                <a:solidFill>
+                  <a:srgbClr val="0F2C47"/>
+                </a:solidFill>
+                <a:latin typeface="Calibri" pitchFamily="34" charset="0"/>
+                <a:ea typeface="Calibri" pitchFamily="34" charset="-122"/>
+                <a:cs typeface="Calibri" pitchFamily="34" charset="-120"/>
+              </a:rPr>
+              <a:t>routes with a variable in them</a:t>
+            </a:r>
+            <a:endParaRPr lang="en-US" sz="2300" dirty="0"/>
+          </a:p>
+        </p:txBody>
+      </p:sp>
+      <p:sp>
+        <p:nvSpPr>
+          <p:cNvPr id="7" name="Shape 5"/>
+          <p:cNvSpPr/>
+          <p:nvPr/>
+        </p:nvSpPr>
+        <p:spPr>
+          <a:xfrm>
+            <a:off x="777240" y="2423160"/>
+            <a:ext cx="5090008" cy="3657600"/>
           </a:xfrm>
           <a:prstGeom prst="roundRect">
             <a:avLst>
-              <a:gd name="adj" fmla="val 2198"/>
+              <a:gd name="adj" fmla="val 3500"/>
             </a:avLst>
           </a:prstGeom>
           <a:solidFill>
-            <a:srgbClr val="EDF4F9"/>
-          </a:solidFill>
-          <a:ln w="19050">
+            <a:srgbClr val="FFFFFF"/>
+          </a:solidFill>
+          <a:ln w="12700">
             <a:solidFill>
-              <a:srgbClr val="E4A83C"/>
+              <a:srgbClr val="E4E6E9"/>
             </a:solidFill>
             <a:prstDash val="solid"/>
           </a:ln>
@@ -3275,14 +3372,14 @@
       </p:sp>
       <p:sp>
         <p:nvSpPr>
-          <p:cNvPr id="4" name="Text 2"/>
-          <p:cNvSpPr/>
-          <p:nvPr/>
-        </p:nvSpPr>
-        <p:spPr>
-          <a:xfrm>
-            <a:off x="960120" y="2103120"/>
-            <a:ext cx="3657600" cy="457200"/>
+          <p:cNvPr id="8" name="Text 6"/>
+          <p:cNvSpPr/>
+          <p:nvPr/>
+        </p:nvSpPr>
+        <p:spPr>
+          <a:xfrm>
+            <a:off x="1097280" y="2697480"/>
+            <a:ext cx="4449928" cy="320040"/>
           </a:xfrm>
           <a:prstGeom prst="rect">
             <a:avLst/>
@@ -3298,84 +3395,38 @@
               <a:buNone/>
             </a:pPr>
             <a:r>
-              <a:rPr lang="en-US" sz="1900" b="1" dirty="0">
-                <a:solidFill>
-                  <a:srgbClr val="E4A83C"/>
-                </a:solidFill>
-                <a:latin typeface="Bookman Old Style" pitchFamily="34" charset="0"/>
-                <a:ea typeface="Bookman Old Style" pitchFamily="34" charset="-122"/>
-                <a:cs typeface="Bookman Old Style" pitchFamily="34" charset="-120"/>
-              </a:rPr>
-              <a:t>Problem</a:t>
-            </a:r>
-            <a:endParaRPr lang="en-US" sz="1900" dirty="0"/>
-          </a:p>
-        </p:txBody>
-      </p:sp>
-      <p:sp>
-        <p:nvSpPr>
-          <p:cNvPr id="5" name="Text 3"/>
-          <p:cNvSpPr/>
-          <p:nvPr/>
-        </p:nvSpPr>
-        <p:spPr>
-          <a:xfrm>
-            <a:off x="960120" y="2651760"/>
-            <a:ext cx="4343400" cy="3200400"/>
-          </a:xfrm>
-          <a:prstGeom prst="rect">
-            <a:avLst/>
-          </a:prstGeom>
-          <a:noFill/>
-          <a:ln/>
-        </p:spPr>
-        <p:txBody>
-          <a:bodyPr wrap="square" lIns="0" tIns="0" rIns="0" bIns="0" rtlCol="0" anchor="ctr"/>
-          <a:lstStyle/>
-          <a:p>
-            <a:pPr indent="0" marL="0">
-              <a:lnSpc>
-                <a:spcPct val="112000"/>
-              </a:lnSpc>
-              <a:buNone/>
-            </a:pPr>
-            <a:r>
-              <a:rPr lang="en-US" sz="1350" dirty="0">
-                <a:solidFill>
-                  <a:srgbClr val="132430"/>
+              <a:rPr lang="en-US" sz="1200" b="1" spc="200" kern="0" dirty="0">
+                <a:solidFill>
+                  <a:srgbClr val="D1584E"/>
                 </a:solidFill>
                 <a:latin typeface="Calibri" pitchFamily="34" charset="0"/>
                 <a:ea typeface="Calibri" pitchFamily="34" charset="-122"/>
                 <a:cs typeface="Calibri" pitchFamily="34" charset="-120"/>
               </a:rPr>
-              <a:t>Deployed to real AWS, the health endpoint reported gateway, queue, Lambda and pipeline all true, curl returned live JSON, and the browser console showed zero errors and zero failed requests — yet every panel on the page stayed empty, indistinguishable from still loading. The API's responses carried no cross-origin header, so the browser silently blocked the S3 page's calls, and the polling loop swallowed each failure into a quiet retry.</a:t>
-            </a:r>
-            <a:endParaRPr lang="en-US" sz="1350" dirty="0"/>
-          </a:p>
-        </p:txBody>
-      </p:sp>
-      <p:sp>
-        <p:nvSpPr>
-          <p:cNvPr id="6" name="Shape 4"/>
-          <p:cNvSpPr/>
-          <p:nvPr/>
-        </p:nvSpPr>
-        <p:spPr>
-          <a:xfrm>
-            <a:off x="6611112" y="1874520"/>
-            <a:ext cx="4937760" cy="4160520"/>
-          </a:xfrm>
-          <a:prstGeom prst="roundRect">
-            <a:avLst>
-              <a:gd name="adj" fmla="val 2198"/>
-            </a:avLst>
-          </a:prstGeom>
-          <a:solidFill>
-            <a:srgbClr val="EDF4F9"/>
-          </a:solidFill>
+              <a:t>PROBLEM</a:t>
+            </a:r>
+            <a:endParaRPr lang="en-US" sz="1200" dirty="0"/>
+          </a:p>
+        </p:txBody>
+      </p:sp>
+      <p:sp>
+        <p:nvSpPr>
+          <p:cNvPr id="9" name="Shape 7"/>
+          <p:cNvSpPr/>
+          <p:nvPr/>
+        </p:nvSpPr>
+        <p:spPr>
+          <a:xfrm>
+            <a:off x="1097280" y="3081528"/>
+            <a:ext cx="4449928" cy="0"/>
+          </a:xfrm>
+          <a:prstGeom prst="line">
+            <a:avLst/>
+          </a:prstGeom>
+          <a:noFill/>
           <a:ln w="19050">
             <a:solidFill>
-              <a:srgbClr val="2E82AC"/>
+              <a:srgbClr val="D1584E"/>
             </a:solidFill>
             <a:prstDash val="solid"/>
           </a:ln>
@@ -3383,80 +3434,41 @@
       </p:sp>
       <p:sp>
         <p:nvSpPr>
-          <p:cNvPr id="7" name="Text 5"/>
-          <p:cNvSpPr/>
-          <p:nvPr/>
-        </p:nvSpPr>
-        <p:spPr>
-          <a:xfrm>
-            <a:off x="6931152" y="2103120"/>
-            <a:ext cx="3657600" cy="457200"/>
-          </a:xfrm>
-          <a:prstGeom prst="rect">
-            <a:avLst/>
-          </a:prstGeom>
-          <a:noFill/>
-          <a:ln/>
-        </p:spPr>
-        <p:txBody>
-          <a:bodyPr wrap="square" lIns="0" tIns="0" rIns="0" bIns="0" rtlCol="0" anchor="ctr"/>
-          <a:lstStyle/>
-          <a:p>
-            <a:pPr indent="0" marL="0">
-              <a:buNone/>
-            </a:pPr>
-            <a:r>
-              <a:rPr lang="en-US" sz="1900" b="1" dirty="0">
-                <a:solidFill>
-                  <a:srgbClr val="2E82AC"/>
-                </a:solidFill>
-                <a:latin typeface="Bookman Old Style" pitchFamily="34" charset="0"/>
-                <a:ea typeface="Bookman Old Style" pitchFamily="34" charset="-122"/>
-                <a:cs typeface="Bookman Old Style" pitchFamily="34" charset="-120"/>
-              </a:rPr>
-              <a:t>Solution</a:t>
-            </a:r>
-            <a:endParaRPr lang="en-US" sz="1900" dirty="0"/>
-          </a:p>
-        </p:txBody>
-      </p:sp>
-      <p:sp>
-        <p:nvSpPr>
-          <p:cNvPr id="8" name="Text 6"/>
-          <p:cNvSpPr/>
-          <p:nvPr/>
-        </p:nvSpPr>
-        <p:spPr>
-          <a:xfrm>
-            <a:off x="6931152" y="2651760"/>
-            <a:ext cx="4343400" cy="3200400"/>
-          </a:xfrm>
-          <a:prstGeom prst="rect">
-            <a:avLst/>
-          </a:prstGeom>
-          <a:noFill/>
-          <a:ln/>
-        </p:spPr>
-        <p:txBody>
-          <a:bodyPr wrap="square" lIns="0" tIns="0" rIns="0" bIns="0" rtlCol="0" anchor="ctr"/>
+          <p:cNvPr id="10" name="Text 8"/>
+          <p:cNvSpPr/>
+          <p:nvPr/>
+        </p:nvSpPr>
+        <p:spPr>
+          <a:xfrm>
+            <a:off x="1097280" y="3246120"/>
+            <a:ext cx="4449928" cy="2651760"/>
+          </a:xfrm>
+          <a:prstGeom prst="rect">
+            <a:avLst/>
+          </a:prstGeom>
+          <a:noFill/>
+          <a:ln/>
+        </p:spPr>
+        <p:txBody>
+          <a:bodyPr wrap="square" lIns="0" tIns="0" rIns="0" bIns="0" rtlCol="0" anchor="t"/>
           <a:lstStyle/>
           <a:p>
             <a:pPr indent="0" marL="0">
               <a:lnSpc>
-                <a:spcPct val="112000"/>
+                <a:spcPct val="128000"/>
               </a:lnSpc>
               <a:buNone/>
             </a:pPr>
             <a:r>
               <a:rPr lang="en-US" sz="1350" dirty="0">
                 <a:solidFill>
-                  <a:srgbClr val="132430"/>
+                  <a:srgbClr val="0F2C47"/>
                 </a:solidFill>
                 <a:latin typeface="Calibri" pitchFamily="34" charset="0"/>
                 <a:ea typeface="Calibri" pitchFamily="34" charset="-122"/>
                 <a:cs typeface="Calibri" pitchFamily="34" charset="-120"/>
               </a:rPr>
-              <a:t>Add the cross-origin header to every response the API Lambda returns, then redeploy and re-verify in a real browser until every panel filled with live data. New rule: a green health check proves the API works, but only a browser proves the user sees it.</a:t>
+              <a:t>Some dashboard paths carry a value inside them — a slope identifier or a sensor type embedded in the URL — so exact-string route matching is not enough. The cloud function had to recognise a whole family of paths and pull the variable out, while still serving the fixed routes, and behave identically to the local server.</a:t>
             </a:r>
             <a:endParaRPr lang="en-US" sz="1350" dirty="0"/>
           </a:p>
@@ -3464,23 +3476,134 @@
       </p:sp>
       <p:sp>
         <p:nvSpPr>
-          <p:cNvPr id="9" name="Shape 7"/>
-          <p:cNvSpPr/>
-          <p:nvPr/>
-        </p:nvSpPr>
-        <p:spPr>
-          <a:xfrm>
-            <a:off x="5669280" y="3703320"/>
-            <a:ext cx="841248" cy="512064"/>
-          </a:xfrm>
-          <a:prstGeom prst="rightArrow">
-            <a:avLst/>
-          </a:prstGeom>
-          <a:solidFill>
-            <a:srgbClr val="1E5A82"/>
-          </a:solidFill>
-          <a:ln/>
-        </p:spPr>
+          <p:cNvPr id="11" name="Shape 9"/>
+          <p:cNvSpPr/>
+          <p:nvPr/>
+        </p:nvSpPr>
+        <p:spPr>
+          <a:xfrm>
+            <a:off x="6324448" y="2423160"/>
+            <a:ext cx="5090008" cy="3657600"/>
+          </a:xfrm>
+          <a:prstGeom prst="roundRect">
+            <a:avLst>
+              <a:gd name="adj" fmla="val 3500"/>
+            </a:avLst>
+          </a:prstGeom>
+          <a:solidFill>
+            <a:srgbClr val="FFFFFF"/>
+          </a:solidFill>
+          <a:ln w="12700">
+            <a:solidFill>
+              <a:srgbClr val="E4E6E9"/>
+            </a:solidFill>
+            <a:prstDash val="solid"/>
+          </a:ln>
+        </p:spPr>
+      </p:sp>
+      <p:sp>
+        <p:nvSpPr>
+          <p:cNvPr id="12" name="Text 10"/>
+          <p:cNvSpPr/>
+          <p:nvPr/>
+        </p:nvSpPr>
+        <p:spPr>
+          <a:xfrm>
+            <a:off x="6644488" y="2697480"/>
+            <a:ext cx="4449928" cy="320040"/>
+          </a:xfrm>
+          <a:prstGeom prst="rect">
+            <a:avLst/>
+          </a:prstGeom>
+          <a:noFill/>
+          <a:ln/>
+        </p:spPr>
+        <p:txBody>
+          <a:bodyPr wrap="square" lIns="0" tIns="0" rIns="0" bIns="0" rtlCol="0" anchor="ctr"/>
+          <a:lstStyle/>
+          <a:p>
+            <a:pPr indent="0" marL="0">
+              <a:buNone/>
+            </a:pPr>
+            <a:r>
+              <a:rPr lang="en-US" sz="1200" b="1" spc="200" kern="0" dirty="0">
+                <a:solidFill>
+                  <a:srgbClr val="1F7A5C"/>
+                </a:solidFill>
+                <a:latin typeface="Calibri" pitchFamily="34" charset="0"/>
+                <a:ea typeface="Calibri" pitchFamily="34" charset="-122"/>
+                <a:cs typeface="Calibri" pitchFamily="34" charset="-120"/>
+              </a:rPr>
+              <a:t>SOLUTION</a:t>
+            </a:r>
+            <a:endParaRPr lang="en-US" sz="1200" dirty="0"/>
+          </a:p>
+        </p:txBody>
+      </p:sp>
+      <p:sp>
+        <p:nvSpPr>
+          <p:cNvPr id="13" name="Shape 11"/>
+          <p:cNvSpPr/>
+          <p:nvPr/>
+        </p:nvSpPr>
+        <p:spPr>
+          <a:xfrm>
+            <a:off x="6644488" y="3081528"/>
+            <a:ext cx="4449928" cy="0"/>
+          </a:xfrm>
+          <a:prstGeom prst="line">
+            <a:avLst/>
+          </a:prstGeom>
+          <a:noFill/>
+          <a:ln w="19050">
+            <a:solidFill>
+              <a:srgbClr val="1F7A5C"/>
+            </a:solidFill>
+            <a:prstDash val="solid"/>
+          </a:ln>
+        </p:spPr>
+      </p:sp>
+      <p:sp>
+        <p:nvSpPr>
+          <p:cNvPr id="14" name="Text 12"/>
+          <p:cNvSpPr/>
+          <p:nvPr/>
+        </p:nvSpPr>
+        <p:spPr>
+          <a:xfrm>
+            <a:off x="6644488" y="3246120"/>
+            <a:ext cx="4449928" cy="2651760"/>
+          </a:xfrm>
+          <a:prstGeom prst="rect">
+            <a:avLst/>
+          </a:prstGeom>
+          <a:noFill/>
+          <a:ln/>
+        </p:spPr>
+        <p:txBody>
+          <a:bodyPr wrap="square" lIns="0" tIns="0" rIns="0" bIns="0" rtlCol="0" anchor="t"/>
+          <a:lstStyle/>
+          <a:p>
+            <a:pPr indent="0" marL="0">
+              <a:lnSpc>
+                <a:spcPct val="128000"/>
+              </a:lnSpc>
+              <a:buNone/>
+            </a:pPr>
+            <a:r>
+              <a:rPr lang="en-US" sz="1350" dirty="0">
+                <a:solidFill>
+                  <a:srgbClr val="0F2C47"/>
+                </a:solidFill>
+                <a:latin typeface="Calibri" pitchFamily="34" charset="0"/>
+                <a:ea typeface="Calibri" pitchFamily="34" charset="-122"/>
+                <a:cs typeface="Calibri" pitchFamily="34" charset="-120"/>
+              </a:rPr>
+              <a:t>The function uses a pattern-matcher dispatch: each route is a pattern that fixes the literal segments and captures the variable ones, matched in order against the incoming path. The same patterns drive the local server and the function, so a parameterised request resolves the same way in both, and every reply carries the cross-origin header the browser requires.</a:t>
+            </a:r>
+            <a:endParaRPr lang="en-US" sz="1350" dirty="0"/>
+          </a:p>
+        </p:txBody>
       </p:sp>
     </p:spTree>
   </p:cSld>
